--- a/examples/Presentacion_MTDH_2026_09.pptx
+++ b/examples/Presentacion_MTDH_2026_09.pptx
@@ -17,6 +17,7 @@
     <p:sldId xmlns:ns6="http://schemas.openxmlformats.org/officeDocument/2006/relationships" id="262" ns6:id="rIdReport7"/>
     <p:sldId xmlns:ns7="http://schemas.openxmlformats.org/officeDocument/2006/relationships" id="263" ns7:id="rIdReport8"/>
     <p:sldId xmlns:ns8="http://schemas.openxmlformats.org/officeDocument/2006/relationships" id="264" ns8:id="rIdReport9"/>
+    <p:sldId xmlns:ns9="http://schemas.openxmlformats.org/officeDocument/2006/relationships" id="265" ns9:id="rIdReport10"/>
   </p:sldIdLst>
   <p:sldSz cx="12192000" cy="6858000"/>
   <p:notesSz cx="6858000" cy="9144000"/>
@@ -455,7 +456,84 @@
 El monto fiscal corresponde a la columna Presupuesto 2026 de la fuente. El acumulado de gobierno incluye el monto fiscal y los períodos anteriores. No deben sumarse entre sí.
 Los montos no representan transferencias del mes. La fuente no certifica por sí sola el presupuesto ejecutado, que se presenta como N/D cuando no existe una validación adicional.
 Las unidades corresponden a servicios de protección integral. En bonos y pensiones este indicador no aplica. N/D distingue información no disponible de un cero reportado.
-Identificación del corte: Resumen_Ejecutivo_MTDH_2026_09.pdf: Septiembre 2026; totales provinciales conciliados con el boletín..
+Identificación del corte: Resumen_Ejecutivo_MTDH_2026_09.pdf: Septiembre 2026; totales provinciales conciliados con el boletín.
+Íconos Lucide, licencia ISC: https://lucide.dev/license
+Selección: a08650cd76fc</a:t>
+            </a:r>
+          </a:p>
+        </p:txBody>
+      </p:sp>
+      <p:sp>
+        <p:nvSpPr>
+          <p:cNvPr id="4" name="Slide Number Placeholder 3"/>
+          <p:cNvSpPr>
+            <a:spLocks xmlns:a="http://schemas.openxmlformats.org/drawingml/2006/main" noGrp="1"/>
+          </p:cNvSpPr>
+          <p:nvPr>
+            <p:ph type="sldNum" idx="5"/>
+          </p:nvPr>
+        </p:nvSpPr>
+        <p:spPr/>
+        <p:txBody>
+          <a:bodyPr xmlns:a="http://schemas.openxmlformats.org/drawingml/2006/main"/>
+          <a:lstStyle xmlns:a="http://schemas.openxmlformats.org/drawingml/2006/main"/>
+          <a:p xmlns:a="http://schemas.openxmlformats.org/drawingml/2006/main"/>
+        </p:txBody>
+      </p:sp>
+    </p:spTree>
+  </p:cSld>
+  <p:clrMapOvr>
+    <a:masterClrMapping xmlns:a="http://schemas.openxmlformats.org/drawingml/2006/main"/>
+  </p:clrMapOvr>
+</p:notes>
+</file>
+
+<file path=ppt/notesSlides/notesSlide10.xml><?xml version="1.0" encoding="utf-8"?>
+<p:notes xmlns:p="http://schemas.openxmlformats.org/presentationml/2006/main">
+  <p:cSld>
+    <p:spTree>
+      <p:nvGrpSpPr>
+        <p:cNvPr id="1" name=""/>
+        <p:cNvGrpSpPr/>
+        <p:nvPr/>
+      </p:nvGrpSpPr>
+      <p:grpSpPr>
+        <a:xfrm xmlns:a="http://schemas.openxmlformats.org/drawingml/2006/main"/>
+      </p:grpSpPr>
+      <p:sp>
+        <p:nvSpPr>
+          <p:cNvPr id="2" name="Slide Image Placeholder 1"/>
+          <p:cNvSpPr>
+            <a:spLocks xmlns:a="http://schemas.openxmlformats.org/drawingml/2006/main" noGrp="1"/>
+          </p:cNvSpPr>
+          <p:nvPr>
+            <p:ph type="sldImg" idx="0"/>
+          </p:nvPr>
+        </p:nvSpPr>
+        <p:spPr/>
+      </p:sp>
+      <p:sp>
+        <p:nvSpPr>
+          <p:cNvPr id="3" name="Notes Placeholder 2"/>
+          <p:cNvSpPr>
+            <a:spLocks xmlns:a="http://schemas.openxmlformats.org/drawingml/2006/main" noGrp="1"/>
+          </p:cNvSpPr>
+          <p:nvPr>
+            <p:ph type="body" idx="1"/>
+          </p:nvPr>
+        </p:nvSpPr>
+        <p:spPr/>
+        <p:txBody>
+          <a:bodyPr xmlns:a="http://schemas.openxmlformats.org/drawingml/2006/main"/>
+          <a:lstStyle xmlns:a="http://schemas.openxmlformats.org/drawingml/2006/main"/>
+          <a:p xmlns:a="http://schemas.openxmlformats.org/drawingml/2006/main">
+            <a:r>
+              <a:t>Fuente: Acumulado VIS-VIE.xlsx
+Beneficiarios y usuarios corresponden a conteos reportados en una base agregada. La fuente no permite comprobar personas únicas ni eliminar coincidencias entre programas.
+El monto fiscal corresponde a la columna Presupuesto 2026 de la fuente. El acumulado de gobierno incluye el monto fiscal y los períodos anteriores. No deben sumarse entre sí.
+Los montos no representan transferencias del mes. La fuente no certifica por sí sola el presupuesto ejecutado, que se presenta como N/D cuando no existe una validación adicional.
+Las unidades corresponden a servicios de protección integral. En bonos y pensiones este indicador no aplica. N/D distingue información no disponible de un cero reportado.
+Identificación del corte: Resumen_Ejecutivo_MTDH_2026_09.pdf: Septiembre 2026; totales provinciales conciliados con el boletín.
 Íconos Lucide, licencia ISC: https://lucide.dev/license
 Selección: a08650cd76fc</a:t>
             </a:r>
@@ -532,7 +610,7 @@
 El monto fiscal corresponde a la columna Presupuesto 2026 de la fuente. El acumulado de gobierno incluye el monto fiscal y los períodos anteriores. No deben sumarse entre sí.
 Los montos no representan transferencias del mes. La fuente no certifica por sí sola el presupuesto ejecutado, que se presenta como N/D cuando no existe una validación adicional.
 Las unidades corresponden a servicios de protección integral. En bonos y pensiones este indicador no aplica. N/D distingue información no disponible de un cero reportado.
-Identificación del corte: Resumen_Ejecutivo_MTDH_2026_09.pdf: Septiembre 2026; totales provinciales conciliados con el boletín..
+Identificación del corte: Resumen_Ejecutivo_MTDH_2026_09.pdf: Septiembre 2026; totales provinciales conciliados con el boletín.
 Íconos Lucide, licencia ISC: https://lucide.dev/license
 Selección: a08650cd76fc</a:t>
             </a:r>
@@ -609,7 +687,7 @@
 El monto fiscal corresponde a la columna Presupuesto 2026 de la fuente. El acumulado de gobierno incluye el monto fiscal y los períodos anteriores. No deben sumarse entre sí.
 Los montos no representan transferencias del mes. La fuente no certifica por sí sola el presupuesto ejecutado, que se presenta como N/D cuando no existe una validación adicional.
 Las unidades corresponden a servicios de protección integral. En bonos y pensiones este indicador no aplica. N/D distingue información no disponible de un cero reportado.
-Identificación del corte: Resumen_Ejecutivo_MTDH_2026_09.pdf: Septiembre 2026; totales provinciales conciliados con el boletín..
+Identificación del corte: Resumen_Ejecutivo_MTDH_2026_09.pdf: Septiembre 2026; totales provinciales conciliados con el boletín.
 Íconos Lucide, licencia ISC: https://lucide.dev/license
 Selección: a08650cd76fc</a:t>
             </a:r>
@@ -686,7 +764,7 @@
 El monto fiscal corresponde a la columna Presupuesto 2026 de la fuente. El acumulado de gobierno incluye el monto fiscal y los períodos anteriores. No deben sumarse entre sí.
 Los montos no representan transferencias del mes. La fuente no certifica por sí sola el presupuesto ejecutado, que se presenta como N/D cuando no existe una validación adicional.
 Las unidades corresponden a servicios de protección integral. En bonos y pensiones este indicador no aplica. N/D distingue información no disponible de un cero reportado.
-Identificación del corte: Resumen_Ejecutivo_MTDH_2026_09.pdf: Septiembre 2026; totales provinciales conciliados con el boletín..
+Identificación del corte: Resumen_Ejecutivo_MTDH_2026_09.pdf: Septiembre 2026; totales provinciales conciliados con el boletín.
 Íconos Lucide, licencia ISC: https://lucide.dev/license
 Selección: a08650cd76fc</a:t>
             </a:r>
@@ -763,7 +841,7 @@
 El monto fiscal corresponde a la columna Presupuesto 2026 de la fuente. El acumulado de gobierno incluye el monto fiscal y los períodos anteriores. No deben sumarse entre sí.
 Los montos no representan transferencias del mes. La fuente no certifica por sí sola el presupuesto ejecutado, que se presenta como N/D cuando no existe una validación adicional.
 Las unidades corresponden a servicios de protección integral. En bonos y pensiones este indicador no aplica. N/D distingue información no disponible de un cero reportado.
-Identificación del corte: Resumen_Ejecutivo_MTDH_2026_09.pdf: Septiembre 2026; totales provinciales conciliados con el boletín..
+Identificación del corte: Resumen_Ejecutivo_MTDH_2026_09.pdf: Septiembre 2026; totales provinciales conciliados con el boletín.
 Íconos Lucide, licencia ISC: https://lucide.dev/license
 Selección: a08650cd76fc</a:t>
             </a:r>
@@ -840,7 +918,7 @@
 El monto fiscal corresponde a la columna Presupuesto 2026 de la fuente. El acumulado de gobierno incluye el monto fiscal y los períodos anteriores. No deben sumarse entre sí.
 Los montos no representan transferencias del mes. La fuente no certifica por sí sola el presupuesto ejecutado, que se presenta como N/D cuando no existe una validación adicional.
 Las unidades corresponden a servicios de protección integral. En bonos y pensiones este indicador no aplica. N/D distingue información no disponible de un cero reportado.
-Identificación del corte: Resumen_Ejecutivo_MTDH_2026_09.pdf: Septiembre 2026; totales provinciales conciliados con el boletín..
+Identificación del corte: Resumen_Ejecutivo_MTDH_2026_09.pdf: Septiembre 2026; totales provinciales conciliados con el boletín.
 Íconos Lucide, licencia ISC: https://lucide.dev/license
 Selección: a08650cd76fc</a:t>
             </a:r>
@@ -917,7 +995,7 @@
 El monto fiscal corresponde a la columna Presupuesto 2026 de la fuente. El acumulado de gobierno incluye el monto fiscal y los períodos anteriores. No deben sumarse entre sí.
 Los montos no representan transferencias del mes. La fuente no certifica por sí sola el presupuesto ejecutado, que se presenta como N/D cuando no existe una validación adicional.
 Las unidades corresponden a servicios de protección integral. En bonos y pensiones este indicador no aplica. N/D distingue información no disponible de un cero reportado.
-Identificación del corte: Resumen_Ejecutivo_MTDH_2026_09.pdf: Septiembre 2026; totales provinciales conciliados con el boletín..
+Identificación del corte: Resumen_Ejecutivo_MTDH_2026_09.pdf: Septiembre 2026; totales provinciales conciliados con el boletín.
 Íconos Lucide, licencia ISC: https://lucide.dev/license
 Selección: a08650cd76fc</a:t>
             </a:r>
@@ -994,7 +1072,7 @@
 El monto fiscal corresponde a la columna Presupuesto 2026 de la fuente. El acumulado de gobierno incluye el monto fiscal y los períodos anteriores. No deben sumarse entre sí.
 Los montos no representan transferencias del mes. La fuente no certifica por sí sola el presupuesto ejecutado, que se presenta como N/D cuando no existe una validación adicional.
 Las unidades corresponden a servicios de protección integral. En bonos y pensiones este indicador no aplica. N/D distingue información no disponible de un cero reportado.
-Identificación del corte: Resumen_Ejecutivo_MTDH_2026_09.pdf: Septiembre 2026; totales provinciales conciliados con el boletín..
+Identificación del corte: Resumen_Ejecutivo_MTDH_2026_09.pdf: Septiembre 2026; totales provinciales conciliados con el boletín.
 Íconos Lucide, licencia ISC: https://lucide.dev/license
 Selección: a08650cd76fc</a:t>
             </a:r>
@@ -1071,7 +1149,7 @@
 El monto fiscal corresponde a la columna Presupuesto 2026 de la fuente. El acumulado de gobierno incluye el monto fiscal y los períodos anteriores. No deben sumarse entre sí.
 Los montos no representan transferencias del mes. La fuente no certifica por sí sola el presupuesto ejecutado, que se presenta como N/D cuando no existe una validación adicional.
 Las unidades corresponden a servicios de protección integral. En bonos y pensiones este indicador no aplica. N/D distingue información no disponible de un cero reportado.
-Identificación del corte: Resumen_Ejecutivo_MTDH_2026_09.pdf: Septiembre 2026; totales provinciales conciliados con el boletín..
+Identificación del corte: Resumen_Ejecutivo_MTDH_2026_09.pdf: Septiembre 2026; totales provinciales conciliados con el boletín.
 Íconos Lucide, licencia ISC: https://lucide.dev/license
 Selección: a08650cd76fc</a:t>
             </a:r>
@@ -5047,7 +5125,7 @@
           </c:tx>
           <c:spPr>
             <a:solidFill xmlns:a="http://schemas.openxmlformats.org/drawingml/2006/main">
-              <a:srgbClr val="512F8D"/>
+              <a:srgbClr val="C33F8D"/>
             </a:solidFill>
           </c:spPr>
           <c:invertIfNegative val="0"/>
@@ -5400,7 +5478,7 @@
           </c:tx>
           <c:spPr>
             <a:solidFill xmlns:a="http://schemas.openxmlformats.org/drawingml/2006/main">
-              <a:srgbClr val="512F8D"/>
+              <a:srgbClr val="C33F8D"/>
             </a:solidFill>
           </c:spPr>
           <c:invertIfNegative val="0"/>
@@ -5984,7 +6062,7 @@
         <p:spPr>
           <a:xfrm xmlns:a="http://schemas.openxmlformats.org/drawingml/2006/main">
             <a:off x="685800" y="2667000"/>
-            <a:ext cx="10668000" cy="1571625"/>
+            <a:ext cx="6150000" cy="1571625"/>
           </a:xfrm>
           <a:prstGeom xmlns:a="http://schemas.openxmlformats.org/drawingml/2006/main" prst="rect">
             <a:avLst/>
@@ -6121,7 +6199,7 @@
                 <a:ea typeface="Arial"/>
                 <a:cs typeface="Arial"/>
               </a:rPr>
-              <a:t>Boletín estadístico institucional</a:t>
+              <a:t>Boletín de protección social</a:t>
             </a:r>
           </a:p>
         </p:txBody>
@@ -6143,7 +6221,7 @@
         <p:spPr>
           <a:xfrm xmlns:a="http://schemas.openxmlformats.org/drawingml/2006/main">
             <a:off x="685800" y="4543425"/>
-            <a:ext cx="10287000" cy="523875"/>
+            <a:ext cx="6150000" cy="523875"/>
           </a:xfrm>
           <a:prstGeom xmlns:a="http://schemas.openxmlformats.org/drawingml/2006/main" prst="rect">
             <a:avLst/>
@@ -6302,7 +6380,7 @@
         <p:spPr>
           <a:xfrm xmlns:a="http://schemas.openxmlformats.org/drawingml/2006/main">
             <a:off x="685800" y="5257800"/>
-            <a:ext cx="10287000" cy="609600"/>
+            <a:ext cx="6150000" cy="609600"/>
           </a:xfrm>
           <a:prstGeom xmlns:a="http://schemas.openxmlformats.org/drawingml/2006/main" prst="rect">
             <a:avLst/>
@@ -6461,7 +6539,7 @@
         <p:spPr>
           <a:xfrm xmlns:a="http://schemas.openxmlformats.org/drawingml/2006/main">
             <a:off x="685800" y="6381750"/>
-            <a:ext cx="10477500" cy="228600"/>
+            <a:ext cx="6150000" cy="228600"/>
           </a:xfrm>
           <a:prstGeom xmlns:a="http://schemas.openxmlformats.org/drawingml/2006/main" prst="rect">
             <a:avLst/>
@@ -6603,6 +6681,30 @@
           </a:p>
         </p:txBody>
       </p:sp>
+      <p:pic>
+        <p:nvPicPr>
+          <p:cNvPr id="900" name="Mapa del Ecuador" descr="Mapa del Ecuador con la cobertura reportada por provincia"/>
+          <p:cNvPicPr>
+            <ns0:picLocks xmlns:ns0="http://schemas.openxmlformats.org/drawingml/2006/main" noChangeAspect="1"/>
+          </p:cNvPicPr>
+          <p:nvPr/>
+        </p:nvPicPr>
+        <p:blipFill>
+          <ns1:blip xmlns:ns1="http://schemas.openxmlformats.org/drawingml/2006/main" xmlns:ns2="http://schemas.openxmlformats.org/officeDocument/2006/relationships" ns2:embed="rIdCoverMap"/>
+          <ns3:stretch xmlns:ns3="http://schemas.openxmlformats.org/drawingml/2006/main">
+            <ns3:fillRect/>
+          </ns3:stretch>
+        </p:blipFill>
+        <p:spPr>
+          <ns4:xfrm xmlns:ns4="http://schemas.openxmlformats.org/drawingml/2006/main">
+            <ns4:off x="6980000" y="1380000"/>
+            <ns4:ext cx="4620000" cy="3960000"/>
+          </ns4:xfrm>
+          <ns5:prstGeom xmlns:ns5="http://schemas.openxmlformats.org/drawingml/2006/main" prst="rect">
+            <ns5:avLst/>
+          </ns5:prstGeom>
+        </p:spPr>
+      </p:pic>
     </p:spTree>
     <p:extLst>
       <p:ext uri="{BB962C8B-B14F-4D97-AF65-F5344CB8AC3E}">
@@ -6613,7 +6715,3276 @@
 </p:sld>
 </file>
 
+<file path=ppt/slides/slide10.xml><?xml version="1.0" encoding="utf-8"?>
+<p:sld xmlns:p="http://schemas.openxmlformats.org/presentationml/2006/main">
+  <p:cSld>
+    <p:bg>
+      <p:bgPr>
+        <a:solidFill xmlns:a="http://schemas.openxmlformats.org/drawingml/2006/main">
+          <a:srgbClr val="FFFFFF"/>
+        </a:solidFill>
+      </p:bgPr>
+    </p:bg>
+    <p:spTree>
+      <p:nvGrpSpPr>
+        <p:cNvPr id="1" name=""/>
+        <p:cNvGrpSpPr/>
+        <p:nvPr/>
+      </p:nvGrpSpPr>
+      <p:grpSpPr>
+        <a:xfrm xmlns:a="http://schemas.openxmlformats.org/drawingml/2006/main"/>
+      </p:grpSpPr>
+      <p:sp>
+        <p:nvSpPr>
+          <p:cNvPr id="11" name="eyebrow">
+            <a:extLst xmlns:a="http://schemas.openxmlformats.org/drawingml/2006/main">
+              <a:ext uri="{FF2B5EF4-FFF2-40B4-BE49-F238E27FC236}">
+                <a16:creationId xmlns:a16="http://schemas.microsoft.com/office/drawing/2014/main" id="{4EB87881-4BD7-4CC1-A478-5E402BABBE84}"/>
+              </a:ext>
+            </a:extLst>
+          </p:cNvPr>
+          <p:cNvSpPr>
+            <a:spLocks xmlns:a="http://schemas.openxmlformats.org/drawingml/2006/main" noGrp="1"/>
+          </p:cNvSpPr>
+          <p:nvPr/>
+        </p:nvSpPr>
+        <p:spPr>
+          <a:xfrm xmlns:a="http://schemas.openxmlformats.org/drawingml/2006/main">
+            <a:off x="685800" y="361950"/>
+            <a:ext cx="6858000" cy="238125"/>
+          </a:xfrm>
+          <a:prstGeom xmlns:a="http://schemas.openxmlformats.org/drawingml/2006/main" prst="rect">
+            <a:avLst/>
+          </a:prstGeom>
+          <a:noFill xmlns:a="http://schemas.openxmlformats.org/drawingml/2006/main"/>
+          <a:ln xmlns:a="http://schemas.openxmlformats.org/drawingml/2006/main" w="0">
+            <a:noFill/>
+            <a:prstDash val="solid"/>
+          </a:ln>
+        </p:spPr>
+        <p:txBody>
+          <a:bodyPr xmlns:a="http://schemas.openxmlformats.org/drawingml/2006/main" wrap="square" lIns="0" tIns="0" rIns="0" bIns="0">
+            <a:noAutofit/>
+          </a:bodyPr>
+          <a:lstStyle xmlns:a="http://schemas.openxmlformats.org/drawingml/2006/main">
+            <a:defPPr>
+              <a:defRPr sz="1350" b="1">
+                <a:solidFill>
+                  <a:srgbClr val="512F8D"/>
+                </a:solidFill>
+                <a:latin typeface="Arial"/>
+                <a:ea typeface="Arial"/>
+                <a:cs typeface="Arial"/>
+              </a:defRPr>
+            </a:defPPr>
+            <a:lvl1pPr>
+              <a:defRPr sz="1350" b="1">
+                <a:solidFill>
+                  <a:srgbClr val="512F8D"/>
+                </a:solidFill>
+                <a:latin typeface="Arial"/>
+                <a:ea typeface="Arial"/>
+                <a:cs typeface="Arial"/>
+              </a:defRPr>
+            </a:lvl1pPr>
+            <a:lvl2pPr>
+              <a:defRPr sz="1350" b="1">
+                <a:solidFill>
+                  <a:srgbClr val="512F8D"/>
+                </a:solidFill>
+                <a:latin typeface="Arial"/>
+                <a:ea typeface="Arial"/>
+                <a:cs typeface="Arial"/>
+              </a:defRPr>
+            </a:lvl2pPr>
+            <a:lvl3pPr>
+              <a:defRPr sz="1350" b="1">
+                <a:solidFill>
+                  <a:srgbClr val="512F8D"/>
+                </a:solidFill>
+                <a:latin typeface="Arial"/>
+                <a:ea typeface="Arial"/>
+                <a:cs typeface="Arial"/>
+              </a:defRPr>
+            </a:lvl3pPr>
+            <a:lvl4pPr>
+              <a:defRPr sz="1350" b="1">
+                <a:solidFill>
+                  <a:srgbClr val="512F8D"/>
+                </a:solidFill>
+                <a:latin typeface="Arial"/>
+                <a:ea typeface="Arial"/>
+                <a:cs typeface="Arial"/>
+              </a:defRPr>
+            </a:lvl4pPr>
+            <a:lvl5pPr>
+              <a:defRPr sz="1350" b="1">
+                <a:solidFill>
+                  <a:srgbClr val="512F8D"/>
+                </a:solidFill>
+                <a:latin typeface="Arial"/>
+                <a:ea typeface="Arial"/>
+                <a:cs typeface="Arial"/>
+              </a:defRPr>
+            </a:lvl5pPr>
+            <a:lvl6pPr>
+              <a:defRPr sz="1350" b="1">
+                <a:solidFill>
+                  <a:srgbClr val="512F8D"/>
+                </a:solidFill>
+                <a:latin typeface="Arial"/>
+                <a:ea typeface="Arial"/>
+                <a:cs typeface="Arial"/>
+              </a:defRPr>
+            </a:lvl6pPr>
+            <a:lvl7pPr>
+              <a:defRPr sz="1350" b="1">
+                <a:solidFill>
+                  <a:srgbClr val="512F8D"/>
+                </a:solidFill>
+                <a:latin typeface="Arial"/>
+                <a:ea typeface="Arial"/>
+                <a:cs typeface="Arial"/>
+              </a:defRPr>
+            </a:lvl7pPr>
+            <a:lvl8pPr>
+              <a:defRPr sz="1350" b="1">
+                <a:solidFill>
+                  <a:srgbClr val="512F8D"/>
+                </a:solidFill>
+                <a:latin typeface="Arial"/>
+                <a:ea typeface="Arial"/>
+                <a:cs typeface="Arial"/>
+              </a:defRPr>
+            </a:lvl8pPr>
+            <a:lvl9pPr>
+              <a:defRPr sz="1350" b="1">
+                <a:solidFill>
+                  <a:srgbClr val="512F8D"/>
+                </a:solidFill>
+                <a:latin typeface="Arial"/>
+                <a:ea typeface="Arial"/>
+                <a:cs typeface="Arial"/>
+              </a:defRPr>
+            </a:lvl9pPr>
+          </a:lstStyle>
+          <a:p xmlns:a="http://schemas.openxmlformats.org/drawingml/2006/main">
+            <a:pPr>
+              <a:defRPr sz="1350" b="1">
+                <a:solidFill>
+                  <a:srgbClr val="512F8D"/>
+                </a:solidFill>
+                <a:latin typeface="Arial"/>
+                <a:ea typeface="Arial"/>
+                <a:cs typeface="Arial"/>
+              </a:defRPr>
+            </a:pPr>
+            <a:r>
+              <a:rPr sz="1350" b="1">
+                <a:solidFill>
+                  <a:srgbClr val="512F8D"/>
+                </a:solidFill>
+                <a:latin typeface="Arial"/>
+                <a:ea typeface="Arial"/>
+                <a:cs typeface="Arial"/>
+              </a:rPr>
+              <a:t>Septiembre 2026</a:t>
+            </a:r>
+          </a:p>
+        </p:txBody>
+      </p:sp>
+      <p:sp>
+        <p:nvSpPr>
+          <p:cNvPr id="2" name="title">
+            <a:extLst xmlns:a="http://schemas.openxmlformats.org/drawingml/2006/main">
+              <a:ext uri="{FF2B5EF4-FFF2-40B4-BE49-F238E27FC236}">
+                <a16:creationId xmlns:a16="http://schemas.microsoft.com/office/drawing/2014/main" id="{37EAA87D-ACA3-4949-A403-118B30B6B6E9}"/>
+              </a:ext>
+            </a:extLst>
+          </p:cNvPr>
+          <p:cNvSpPr>
+            <a:spLocks xmlns:a="http://schemas.openxmlformats.org/drawingml/2006/main" noGrp="1"/>
+          </p:cNvSpPr>
+          <p:nvPr/>
+        </p:nvSpPr>
+        <p:spPr>
+          <a:xfrm xmlns:a="http://schemas.openxmlformats.org/drawingml/2006/main">
+            <a:off x="685800" y="790575"/>
+            <a:ext cx="10820400" cy="904875"/>
+          </a:xfrm>
+          <a:prstGeom xmlns:a="http://schemas.openxmlformats.org/drawingml/2006/main" prst="rect">
+            <a:avLst/>
+          </a:prstGeom>
+          <a:noFill xmlns:a="http://schemas.openxmlformats.org/drawingml/2006/main"/>
+          <a:ln xmlns:a="http://schemas.openxmlformats.org/drawingml/2006/main" w="0">
+            <a:noFill/>
+            <a:prstDash val="solid"/>
+          </a:ln>
+        </p:spPr>
+        <p:txBody>
+          <a:bodyPr xmlns:a="http://schemas.openxmlformats.org/drawingml/2006/main" wrap="square" lIns="0" tIns="0" rIns="0" bIns="0">
+            <a:noAutofit/>
+          </a:bodyPr>
+          <a:lstStyle xmlns:a="http://schemas.openxmlformats.org/drawingml/2006/main">
+            <a:defPPr>
+              <a:defRPr sz="3300" b="1">
+                <a:solidFill>
+                  <a:srgbClr val="20202B"/>
+                </a:solidFill>
+                <a:latin typeface="Arial"/>
+                <a:ea typeface="Arial"/>
+                <a:cs typeface="Arial"/>
+              </a:defRPr>
+            </a:defPPr>
+            <a:lvl1pPr>
+              <a:defRPr sz="3300" b="1">
+                <a:solidFill>
+                  <a:srgbClr val="20202B"/>
+                </a:solidFill>
+                <a:latin typeface="Arial"/>
+                <a:ea typeface="Arial"/>
+                <a:cs typeface="Arial"/>
+              </a:defRPr>
+            </a:lvl1pPr>
+            <a:lvl2pPr>
+              <a:defRPr sz="3300" b="1">
+                <a:solidFill>
+                  <a:srgbClr val="20202B"/>
+                </a:solidFill>
+                <a:latin typeface="Arial"/>
+                <a:ea typeface="Arial"/>
+                <a:cs typeface="Arial"/>
+              </a:defRPr>
+            </a:lvl2pPr>
+            <a:lvl3pPr>
+              <a:defRPr sz="3300" b="1">
+                <a:solidFill>
+                  <a:srgbClr val="20202B"/>
+                </a:solidFill>
+                <a:latin typeface="Arial"/>
+                <a:ea typeface="Arial"/>
+                <a:cs typeface="Arial"/>
+              </a:defRPr>
+            </a:lvl3pPr>
+            <a:lvl4pPr>
+              <a:defRPr sz="3300" b="1">
+                <a:solidFill>
+                  <a:srgbClr val="20202B"/>
+                </a:solidFill>
+                <a:latin typeface="Arial"/>
+                <a:ea typeface="Arial"/>
+                <a:cs typeface="Arial"/>
+              </a:defRPr>
+            </a:lvl4pPr>
+            <a:lvl5pPr>
+              <a:defRPr sz="3300" b="1">
+                <a:solidFill>
+                  <a:srgbClr val="20202B"/>
+                </a:solidFill>
+                <a:latin typeface="Arial"/>
+                <a:ea typeface="Arial"/>
+                <a:cs typeface="Arial"/>
+              </a:defRPr>
+            </a:lvl5pPr>
+            <a:lvl6pPr>
+              <a:defRPr sz="3300" b="1">
+                <a:solidFill>
+                  <a:srgbClr val="20202B"/>
+                </a:solidFill>
+                <a:latin typeface="Arial"/>
+                <a:ea typeface="Arial"/>
+                <a:cs typeface="Arial"/>
+              </a:defRPr>
+            </a:lvl6pPr>
+            <a:lvl7pPr>
+              <a:defRPr sz="3300" b="1">
+                <a:solidFill>
+                  <a:srgbClr val="20202B"/>
+                </a:solidFill>
+                <a:latin typeface="Arial"/>
+                <a:ea typeface="Arial"/>
+                <a:cs typeface="Arial"/>
+              </a:defRPr>
+            </a:lvl7pPr>
+            <a:lvl8pPr>
+              <a:defRPr sz="3300" b="1">
+                <a:solidFill>
+                  <a:srgbClr val="20202B"/>
+                </a:solidFill>
+                <a:latin typeface="Arial"/>
+                <a:ea typeface="Arial"/>
+                <a:cs typeface="Arial"/>
+              </a:defRPr>
+            </a:lvl8pPr>
+            <a:lvl9pPr>
+              <a:defRPr sz="3300" b="1">
+                <a:solidFill>
+                  <a:srgbClr val="20202B"/>
+                </a:solidFill>
+                <a:latin typeface="Arial"/>
+                <a:ea typeface="Arial"/>
+                <a:cs typeface="Arial"/>
+              </a:defRPr>
+            </a:lvl9pPr>
+          </a:lstStyle>
+          <a:p xmlns:a="http://schemas.openxmlformats.org/drawingml/2006/main">
+            <a:pPr>
+              <a:defRPr sz="3300" b="1">
+                <a:solidFill>
+                  <a:srgbClr val="20202B"/>
+                </a:solidFill>
+                <a:latin typeface="Arial"/>
+                <a:ea typeface="Arial"/>
+                <a:cs typeface="Arial"/>
+              </a:defRPr>
+            </a:pPr>
+            <a:r>
+              <a:rPr sz="3300" b="1">
+                <a:solidFill>
+                  <a:srgbClr val="20202B"/>
+                </a:solidFill>
+                <a:latin typeface="Arial"/>
+                <a:ea typeface="Arial"/>
+                <a:cs typeface="Arial"/>
+              </a:rPr>
+              <a:t>Alcance y lectura de las cifras</a:t>
+            </a:r>
+          </a:p>
+        </p:txBody>
+      </p:sp>
+      <p:sp>
+        <p:nvSpPr>
+          <p:cNvPr id="3" name="footer">
+            <a:extLst xmlns:a="http://schemas.openxmlformats.org/drawingml/2006/main">
+              <a:ext uri="{FF2B5EF4-FFF2-40B4-BE49-F238E27FC236}">
+                <a16:creationId xmlns:a16="http://schemas.microsoft.com/office/drawing/2014/main" id="{76A5493E-8815-4D84-ADD1-62A795A6DD6F}"/>
+              </a:ext>
+            </a:extLst>
+          </p:cNvPr>
+          <p:cNvSpPr>
+            <a:spLocks xmlns:a="http://schemas.openxmlformats.org/drawingml/2006/main" noGrp="1"/>
+          </p:cNvSpPr>
+          <p:nvPr/>
+        </p:nvSpPr>
+        <p:spPr>
+          <a:xfrm xmlns:a="http://schemas.openxmlformats.org/drawingml/2006/main">
+            <a:off x="685800" y="6457950"/>
+            <a:ext cx="10096500" cy="190500"/>
+          </a:xfrm>
+          <a:prstGeom xmlns:a="http://schemas.openxmlformats.org/drawingml/2006/main" prst="rect">
+            <a:avLst/>
+          </a:prstGeom>
+          <a:noFill xmlns:a="http://schemas.openxmlformats.org/drawingml/2006/main"/>
+          <a:ln xmlns:a="http://schemas.openxmlformats.org/drawingml/2006/main" w="0">
+            <a:noFill/>
+            <a:prstDash val="solid"/>
+          </a:ln>
+        </p:spPr>
+        <p:txBody>
+          <a:bodyPr xmlns:a="http://schemas.openxmlformats.org/drawingml/2006/main" wrap="square" lIns="0" tIns="0" rIns="0" bIns="0">
+            <a:noAutofit/>
+          </a:bodyPr>
+          <a:lstStyle xmlns:a="http://schemas.openxmlformats.org/drawingml/2006/main">
+            <a:defPPr>
+              <a:defRPr sz="975" b="0">
+                <a:solidFill>
+                  <a:srgbClr val="777080"/>
+                </a:solidFill>
+                <a:latin typeface="Arial"/>
+                <a:ea typeface="Arial"/>
+                <a:cs typeface="Arial"/>
+              </a:defRPr>
+            </a:defPPr>
+            <a:lvl1pPr>
+              <a:defRPr sz="975" b="0">
+                <a:solidFill>
+                  <a:srgbClr val="777080"/>
+                </a:solidFill>
+                <a:latin typeface="Arial"/>
+                <a:ea typeface="Arial"/>
+                <a:cs typeface="Arial"/>
+              </a:defRPr>
+            </a:lvl1pPr>
+            <a:lvl2pPr>
+              <a:defRPr sz="975" b="0">
+                <a:solidFill>
+                  <a:srgbClr val="777080"/>
+                </a:solidFill>
+                <a:latin typeface="Arial"/>
+                <a:ea typeface="Arial"/>
+                <a:cs typeface="Arial"/>
+              </a:defRPr>
+            </a:lvl2pPr>
+            <a:lvl3pPr>
+              <a:defRPr sz="975" b="0">
+                <a:solidFill>
+                  <a:srgbClr val="777080"/>
+                </a:solidFill>
+                <a:latin typeface="Arial"/>
+                <a:ea typeface="Arial"/>
+                <a:cs typeface="Arial"/>
+              </a:defRPr>
+            </a:lvl3pPr>
+            <a:lvl4pPr>
+              <a:defRPr sz="975" b="0">
+                <a:solidFill>
+                  <a:srgbClr val="777080"/>
+                </a:solidFill>
+                <a:latin typeface="Arial"/>
+                <a:ea typeface="Arial"/>
+                <a:cs typeface="Arial"/>
+              </a:defRPr>
+            </a:lvl4pPr>
+            <a:lvl5pPr>
+              <a:defRPr sz="975" b="0">
+                <a:solidFill>
+                  <a:srgbClr val="777080"/>
+                </a:solidFill>
+                <a:latin typeface="Arial"/>
+                <a:ea typeface="Arial"/>
+                <a:cs typeface="Arial"/>
+              </a:defRPr>
+            </a:lvl5pPr>
+            <a:lvl6pPr>
+              <a:defRPr sz="975" b="0">
+                <a:solidFill>
+                  <a:srgbClr val="777080"/>
+                </a:solidFill>
+                <a:latin typeface="Arial"/>
+                <a:ea typeface="Arial"/>
+                <a:cs typeface="Arial"/>
+              </a:defRPr>
+            </a:lvl6pPr>
+            <a:lvl7pPr>
+              <a:defRPr sz="975" b="0">
+                <a:solidFill>
+                  <a:srgbClr val="777080"/>
+                </a:solidFill>
+                <a:latin typeface="Arial"/>
+                <a:ea typeface="Arial"/>
+                <a:cs typeface="Arial"/>
+              </a:defRPr>
+            </a:lvl7pPr>
+            <a:lvl8pPr>
+              <a:defRPr sz="975" b="0">
+                <a:solidFill>
+                  <a:srgbClr val="777080"/>
+                </a:solidFill>
+                <a:latin typeface="Arial"/>
+                <a:ea typeface="Arial"/>
+                <a:cs typeface="Arial"/>
+              </a:defRPr>
+            </a:lvl8pPr>
+            <a:lvl9pPr>
+              <a:defRPr sz="975" b="0">
+                <a:solidFill>
+                  <a:srgbClr val="777080"/>
+                </a:solidFill>
+                <a:latin typeface="Arial"/>
+                <a:ea typeface="Arial"/>
+                <a:cs typeface="Arial"/>
+              </a:defRPr>
+            </a:lvl9pPr>
+          </a:lstStyle>
+          <a:p xmlns:a="http://schemas.openxmlformats.org/drawingml/2006/main">
+            <a:pPr>
+              <a:defRPr sz="975" b="0">
+                <a:solidFill>
+                  <a:srgbClr val="777080"/>
+                </a:solidFill>
+                <a:latin typeface="Arial"/>
+                <a:ea typeface="Arial"/>
+                <a:cs typeface="Arial"/>
+              </a:defRPr>
+            </a:pPr>
+            <a:r>
+              <a:rPr sz="975" b="0">
+                <a:solidFill>
+                  <a:srgbClr val="777080"/>
+                </a:solidFill>
+                <a:latin typeface="Arial"/>
+                <a:ea typeface="Arial"/>
+                <a:cs typeface="Arial"/>
+              </a:rPr>
+              <a:t>MTDH   Septiembre 2026   Nacional - 24 provincias y zona en estudio</a:t>
+            </a:r>
+          </a:p>
+        </p:txBody>
+      </p:sp>
+      <p:sp>
+        <p:nvSpPr>
+          <p:cNvPr id="4" name="page">
+            <a:extLst xmlns:a="http://schemas.openxmlformats.org/drawingml/2006/main">
+              <a:ext uri="{FF2B5EF4-FFF2-40B4-BE49-F238E27FC236}">
+                <a16:creationId xmlns:a16="http://schemas.microsoft.com/office/drawing/2014/main" id="{DC718EE2-72E7-4B3D-89A0-0C0DC36BDCC8}"/>
+              </a:ext>
+            </a:extLst>
+          </p:cNvPr>
+          <p:cNvSpPr>
+            <a:spLocks xmlns:a="http://schemas.openxmlformats.org/drawingml/2006/main" noGrp="1"/>
+          </p:cNvSpPr>
+          <p:nvPr/>
+        </p:nvSpPr>
+        <p:spPr>
+          <a:xfrm xmlns:a="http://schemas.openxmlformats.org/drawingml/2006/main">
+            <a:off x="10953750" y="6457950"/>
+            <a:ext cx="552450" cy="190500"/>
+          </a:xfrm>
+          <a:prstGeom xmlns:a="http://schemas.openxmlformats.org/drawingml/2006/main" prst="rect">
+            <a:avLst/>
+          </a:prstGeom>
+          <a:noFill xmlns:a="http://schemas.openxmlformats.org/drawingml/2006/main"/>
+          <a:ln xmlns:a="http://schemas.openxmlformats.org/drawingml/2006/main" w="0">
+            <a:noFill/>
+            <a:prstDash val="solid"/>
+          </a:ln>
+        </p:spPr>
+        <p:txBody>
+          <a:bodyPr xmlns:a="http://schemas.openxmlformats.org/drawingml/2006/main" wrap="square" lIns="0" tIns="0" rIns="0" bIns="0">
+            <a:noAutofit/>
+          </a:bodyPr>
+          <a:lstStyle xmlns:a="http://schemas.openxmlformats.org/drawingml/2006/main">
+            <a:defPPr>
+              <a:defRPr sz="975" b="0">
+                <a:solidFill>
+                  <a:srgbClr val="777080"/>
+                </a:solidFill>
+                <a:latin typeface="Arial"/>
+                <a:ea typeface="Arial"/>
+                <a:cs typeface="Arial"/>
+              </a:defRPr>
+            </a:defPPr>
+            <a:lvl1pPr>
+              <a:defRPr sz="975" b="0">
+                <a:solidFill>
+                  <a:srgbClr val="777080"/>
+                </a:solidFill>
+                <a:latin typeface="Arial"/>
+                <a:ea typeface="Arial"/>
+                <a:cs typeface="Arial"/>
+              </a:defRPr>
+            </a:lvl1pPr>
+            <a:lvl2pPr>
+              <a:defRPr sz="975" b="0">
+                <a:solidFill>
+                  <a:srgbClr val="777080"/>
+                </a:solidFill>
+                <a:latin typeface="Arial"/>
+                <a:ea typeface="Arial"/>
+                <a:cs typeface="Arial"/>
+              </a:defRPr>
+            </a:lvl2pPr>
+            <a:lvl3pPr>
+              <a:defRPr sz="975" b="0">
+                <a:solidFill>
+                  <a:srgbClr val="777080"/>
+                </a:solidFill>
+                <a:latin typeface="Arial"/>
+                <a:ea typeface="Arial"/>
+                <a:cs typeface="Arial"/>
+              </a:defRPr>
+            </a:lvl3pPr>
+            <a:lvl4pPr>
+              <a:defRPr sz="975" b="0">
+                <a:solidFill>
+                  <a:srgbClr val="777080"/>
+                </a:solidFill>
+                <a:latin typeface="Arial"/>
+                <a:ea typeface="Arial"/>
+                <a:cs typeface="Arial"/>
+              </a:defRPr>
+            </a:lvl4pPr>
+            <a:lvl5pPr>
+              <a:defRPr sz="975" b="0">
+                <a:solidFill>
+                  <a:srgbClr val="777080"/>
+                </a:solidFill>
+                <a:latin typeface="Arial"/>
+                <a:ea typeface="Arial"/>
+                <a:cs typeface="Arial"/>
+              </a:defRPr>
+            </a:lvl5pPr>
+            <a:lvl6pPr>
+              <a:defRPr sz="975" b="0">
+                <a:solidFill>
+                  <a:srgbClr val="777080"/>
+                </a:solidFill>
+                <a:latin typeface="Arial"/>
+                <a:ea typeface="Arial"/>
+                <a:cs typeface="Arial"/>
+              </a:defRPr>
+            </a:lvl6pPr>
+            <a:lvl7pPr>
+              <a:defRPr sz="975" b="0">
+                <a:solidFill>
+                  <a:srgbClr val="777080"/>
+                </a:solidFill>
+                <a:latin typeface="Arial"/>
+                <a:ea typeface="Arial"/>
+                <a:cs typeface="Arial"/>
+              </a:defRPr>
+            </a:lvl7pPr>
+            <a:lvl8pPr>
+              <a:defRPr sz="975" b="0">
+                <a:solidFill>
+                  <a:srgbClr val="777080"/>
+                </a:solidFill>
+                <a:latin typeface="Arial"/>
+                <a:ea typeface="Arial"/>
+                <a:cs typeface="Arial"/>
+              </a:defRPr>
+            </a:lvl8pPr>
+            <a:lvl9pPr>
+              <a:defRPr sz="975" b="0">
+                <a:solidFill>
+                  <a:srgbClr val="777080"/>
+                </a:solidFill>
+                <a:latin typeface="Arial"/>
+                <a:ea typeface="Arial"/>
+                <a:cs typeface="Arial"/>
+              </a:defRPr>
+            </a:lvl9pPr>
+          </a:lstStyle>
+          <a:p xmlns:a="http://schemas.openxmlformats.org/drawingml/2006/main">
+            <a:pPr>
+              <a:defRPr sz="975" b="0">
+                <a:solidFill>
+                  <a:srgbClr val="777080"/>
+                </a:solidFill>
+                <a:latin typeface="Arial"/>
+                <a:ea typeface="Arial"/>
+                <a:cs typeface="Arial"/>
+              </a:defRPr>
+            </a:pPr>
+            <a:r>
+              <a:rPr sz="975" b="0">
+                <a:solidFill>
+                  <a:srgbClr val="777080"/>
+                </a:solidFill>
+                <a:latin typeface="Arial"/>
+                <a:ea typeface="Arial"/>
+                <a:cs typeface="Arial"/>
+              </a:rPr>
+              <a:t>10</a:t>
+            </a:r>
+          </a:p>
+        </p:txBody>
+      </p:sp>
+      <p:sp>
+        <p:nvSpPr>
+          <p:cNvPr id="5" name="method-head-1">
+            <a:extLst xmlns:a="http://schemas.openxmlformats.org/drawingml/2006/main">
+              <a:ext uri="{FF2B5EF4-FFF2-40B4-BE49-F238E27FC236}">
+                <a16:creationId xmlns:a16="http://schemas.microsoft.com/office/drawing/2014/main" id="{5F8AD009-F4F1-4681-B562-6D55F47093FF}"/>
+              </a:ext>
+            </a:extLst>
+          </p:cNvPr>
+          <p:cNvSpPr>
+            <a:spLocks xmlns:a="http://schemas.openxmlformats.org/drawingml/2006/main" noGrp="1"/>
+          </p:cNvSpPr>
+          <p:nvPr/>
+        </p:nvSpPr>
+        <p:spPr>
+          <a:xfrm xmlns:a="http://schemas.openxmlformats.org/drawingml/2006/main">
+            <a:off x="685800" y="1981200"/>
+            <a:ext cx="10477500" cy="342900"/>
+          </a:xfrm>
+          <a:prstGeom xmlns:a="http://schemas.openxmlformats.org/drawingml/2006/main" prst="rect">
+            <a:avLst/>
+          </a:prstGeom>
+          <a:noFill xmlns:a="http://schemas.openxmlformats.org/drawingml/2006/main"/>
+          <a:ln xmlns:a="http://schemas.openxmlformats.org/drawingml/2006/main" w="0">
+            <a:noFill/>
+            <a:prstDash val="solid"/>
+          </a:ln>
+        </p:spPr>
+        <p:txBody>
+          <a:bodyPr xmlns:a="http://schemas.openxmlformats.org/drawingml/2006/main" wrap="square" lIns="0" tIns="0" rIns="0" bIns="0">
+            <a:noAutofit/>
+          </a:bodyPr>
+          <a:lstStyle xmlns:a="http://schemas.openxmlformats.org/drawingml/2006/main">
+            <a:defPPr>
+              <a:defRPr sz="1950" b="1">
+                <a:solidFill>
+                  <a:srgbClr val="512F8D"/>
+                </a:solidFill>
+                <a:latin typeface="Arial"/>
+                <a:ea typeface="Arial"/>
+                <a:cs typeface="Arial"/>
+              </a:defRPr>
+            </a:defPPr>
+            <a:lvl1pPr>
+              <a:defRPr sz="1950" b="1">
+                <a:solidFill>
+                  <a:srgbClr val="512F8D"/>
+                </a:solidFill>
+                <a:latin typeface="Arial"/>
+                <a:ea typeface="Arial"/>
+                <a:cs typeface="Arial"/>
+              </a:defRPr>
+            </a:lvl1pPr>
+            <a:lvl2pPr>
+              <a:defRPr sz="1950" b="1">
+                <a:solidFill>
+                  <a:srgbClr val="512F8D"/>
+                </a:solidFill>
+                <a:latin typeface="Arial"/>
+                <a:ea typeface="Arial"/>
+                <a:cs typeface="Arial"/>
+              </a:defRPr>
+            </a:lvl2pPr>
+            <a:lvl3pPr>
+              <a:defRPr sz="1950" b="1">
+                <a:solidFill>
+                  <a:srgbClr val="512F8D"/>
+                </a:solidFill>
+                <a:latin typeface="Arial"/>
+                <a:ea typeface="Arial"/>
+                <a:cs typeface="Arial"/>
+              </a:defRPr>
+            </a:lvl3pPr>
+            <a:lvl4pPr>
+              <a:defRPr sz="1950" b="1">
+                <a:solidFill>
+                  <a:srgbClr val="512F8D"/>
+                </a:solidFill>
+                <a:latin typeface="Arial"/>
+                <a:ea typeface="Arial"/>
+                <a:cs typeface="Arial"/>
+              </a:defRPr>
+            </a:lvl4pPr>
+            <a:lvl5pPr>
+              <a:defRPr sz="1950" b="1">
+                <a:solidFill>
+                  <a:srgbClr val="512F8D"/>
+                </a:solidFill>
+                <a:latin typeface="Arial"/>
+                <a:ea typeface="Arial"/>
+                <a:cs typeface="Arial"/>
+              </a:defRPr>
+            </a:lvl5pPr>
+            <a:lvl6pPr>
+              <a:defRPr sz="1950" b="1">
+                <a:solidFill>
+                  <a:srgbClr val="512F8D"/>
+                </a:solidFill>
+                <a:latin typeface="Arial"/>
+                <a:ea typeface="Arial"/>
+                <a:cs typeface="Arial"/>
+              </a:defRPr>
+            </a:lvl6pPr>
+            <a:lvl7pPr>
+              <a:defRPr sz="1950" b="1">
+                <a:solidFill>
+                  <a:srgbClr val="512F8D"/>
+                </a:solidFill>
+                <a:latin typeface="Arial"/>
+                <a:ea typeface="Arial"/>
+                <a:cs typeface="Arial"/>
+              </a:defRPr>
+            </a:lvl7pPr>
+            <a:lvl8pPr>
+              <a:defRPr sz="1950" b="1">
+                <a:solidFill>
+                  <a:srgbClr val="512F8D"/>
+                </a:solidFill>
+                <a:latin typeface="Arial"/>
+                <a:ea typeface="Arial"/>
+                <a:cs typeface="Arial"/>
+              </a:defRPr>
+            </a:lvl8pPr>
+            <a:lvl9pPr>
+              <a:defRPr sz="1950" b="1">
+                <a:solidFill>
+                  <a:srgbClr val="512F8D"/>
+                </a:solidFill>
+                <a:latin typeface="Arial"/>
+                <a:ea typeface="Arial"/>
+                <a:cs typeface="Arial"/>
+              </a:defRPr>
+            </a:lvl9pPr>
+          </a:lstStyle>
+          <a:p xmlns:a="http://schemas.openxmlformats.org/drawingml/2006/main">
+            <a:pPr>
+              <a:defRPr sz="1950" b="1">
+                <a:solidFill>
+                  <a:srgbClr val="512F8D"/>
+                </a:solidFill>
+                <a:latin typeface="Arial"/>
+                <a:ea typeface="Arial"/>
+                <a:cs typeface="Arial"/>
+              </a:defRPr>
+            </a:pPr>
+            <a:r>
+              <a:rPr sz="1950" b="1">
+                <a:solidFill>
+                  <a:srgbClr val="512F8D"/>
+                </a:solidFill>
+                <a:latin typeface="Arial"/>
+                <a:ea typeface="Arial"/>
+                <a:cs typeface="Arial"/>
+              </a:rPr>
+              <a:t>Cobertura reportada</a:t>
+            </a:r>
+          </a:p>
+        </p:txBody>
+      </p:sp>
+      <p:sp>
+        <p:nvSpPr>
+          <p:cNvPr id="6" name="method-body-1">
+            <a:extLst xmlns:a="http://schemas.openxmlformats.org/drawingml/2006/main">
+              <a:ext uri="{FF2B5EF4-FFF2-40B4-BE49-F238E27FC236}">
+                <a16:creationId xmlns:a16="http://schemas.microsoft.com/office/drawing/2014/main" id="{1660426F-EDEF-4AF7-A845-8FD90D190E4F}"/>
+              </a:ext>
+            </a:extLst>
+          </p:cNvPr>
+          <p:cNvSpPr>
+            <a:spLocks xmlns:a="http://schemas.openxmlformats.org/drawingml/2006/main" noGrp="1"/>
+          </p:cNvSpPr>
+          <p:nvPr/>
+        </p:nvSpPr>
+        <p:spPr>
+          <a:xfrm xmlns:a="http://schemas.openxmlformats.org/drawingml/2006/main">
+            <a:off x="685800" y="2381250"/>
+            <a:ext cx="10572750" cy="742950"/>
+          </a:xfrm>
+          <a:prstGeom xmlns:a="http://schemas.openxmlformats.org/drawingml/2006/main" prst="rect">
+            <a:avLst/>
+          </a:prstGeom>
+          <a:noFill xmlns:a="http://schemas.openxmlformats.org/drawingml/2006/main"/>
+          <a:ln xmlns:a="http://schemas.openxmlformats.org/drawingml/2006/main" w="0">
+            <a:noFill/>
+            <a:prstDash val="solid"/>
+          </a:ln>
+        </p:spPr>
+        <p:txBody>
+          <a:bodyPr xmlns:a="http://schemas.openxmlformats.org/drawingml/2006/main" wrap="square" lIns="0" tIns="0" rIns="0" bIns="0">
+            <a:noAutofit/>
+          </a:bodyPr>
+          <a:lstStyle xmlns:a="http://schemas.openxmlformats.org/drawingml/2006/main">
+            <a:defPPr>
+              <a:defRPr sz="1800" b="0">
+                <a:solidFill>
+                  <a:srgbClr val="20202B"/>
+                </a:solidFill>
+                <a:latin typeface="Arial"/>
+                <a:ea typeface="Arial"/>
+                <a:cs typeface="Arial"/>
+              </a:defRPr>
+            </a:defPPr>
+            <a:lvl1pPr>
+              <a:defRPr sz="1800" b="0">
+                <a:solidFill>
+                  <a:srgbClr val="20202B"/>
+                </a:solidFill>
+                <a:latin typeface="Arial"/>
+                <a:ea typeface="Arial"/>
+                <a:cs typeface="Arial"/>
+              </a:defRPr>
+            </a:lvl1pPr>
+            <a:lvl2pPr>
+              <a:defRPr sz="1800" b="0">
+                <a:solidFill>
+                  <a:srgbClr val="20202B"/>
+                </a:solidFill>
+                <a:latin typeface="Arial"/>
+                <a:ea typeface="Arial"/>
+                <a:cs typeface="Arial"/>
+              </a:defRPr>
+            </a:lvl2pPr>
+            <a:lvl3pPr>
+              <a:defRPr sz="1800" b="0">
+                <a:solidFill>
+                  <a:srgbClr val="20202B"/>
+                </a:solidFill>
+                <a:latin typeface="Arial"/>
+                <a:ea typeface="Arial"/>
+                <a:cs typeface="Arial"/>
+              </a:defRPr>
+            </a:lvl3pPr>
+            <a:lvl4pPr>
+              <a:defRPr sz="1800" b="0">
+                <a:solidFill>
+                  <a:srgbClr val="20202B"/>
+                </a:solidFill>
+                <a:latin typeface="Arial"/>
+                <a:ea typeface="Arial"/>
+                <a:cs typeface="Arial"/>
+              </a:defRPr>
+            </a:lvl4pPr>
+            <a:lvl5pPr>
+              <a:defRPr sz="1800" b="0">
+                <a:solidFill>
+                  <a:srgbClr val="20202B"/>
+                </a:solidFill>
+                <a:latin typeface="Arial"/>
+                <a:ea typeface="Arial"/>
+                <a:cs typeface="Arial"/>
+              </a:defRPr>
+            </a:lvl5pPr>
+            <a:lvl6pPr>
+              <a:defRPr sz="1800" b="0">
+                <a:solidFill>
+                  <a:srgbClr val="20202B"/>
+                </a:solidFill>
+                <a:latin typeface="Arial"/>
+                <a:ea typeface="Arial"/>
+                <a:cs typeface="Arial"/>
+              </a:defRPr>
+            </a:lvl6pPr>
+            <a:lvl7pPr>
+              <a:defRPr sz="1800" b="0">
+                <a:solidFill>
+                  <a:srgbClr val="20202B"/>
+                </a:solidFill>
+                <a:latin typeface="Arial"/>
+                <a:ea typeface="Arial"/>
+                <a:cs typeface="Arial"/>
+              </a:defRPr>
+            </a:lvl7pPr>
+            <a:lvl8pPr>
+              <a:defRPr sz="1800" b="0">
+                <a:solidFill>
+                  <a:srgbClr val="20202B"/>
+                </a:solidFill>
+                <a:latin typeface="Arial"/>
+                <a:ea typeface="Arial"/>
+                <a:cs typeface="Arial"/>
+              </a:defRPr>
+            </a:lvl8pPr>
+            <a:lvl9pPr>
+              <a:defRPr sz="1800" b="0">
+                <a:solidFill>
+                  <a:srgbClr val="20202B"/>
+                </a:solidFill>
+                <a:latin typeface="Arial"/>
+                <a:ea typeface="Arial"/>
+                <a:cs typeface="Arial"/>
+              </a:defRPr>
+            </a:lvl9pPr>
+          </a:lstStyle>
+          <a:p xmlns:a="http://schemas.openxmlformats.org/drawingml/2006/main">
+            <a:pPr>
+              <a:defRPr sz="1800" b="0">
+                <a:solidFill>
+                  <a:srgbClr val="20202B"/>
+                </a:solidFill>
+                <a:latin typeface="Arial"/>
+                <a:ea typeface="Arial"/>
+                <a:cs typeface="Arial"/>
+              </a:defRPr>
+            </a:pPr>
+            <a:r>
+              <a:rPr sz="1800" b="0">
+                <a:solidFill>
+                  <a:srgbClr val="20202B"/>
+                </a:solidFill>
+                <a:latin typeface="Arial"/>
+                <a:ea typeface="Arial"/>
+                <a:cs typeface="Arial"/>
+              </a:rPr>
+              <a:t>Conteos agregados de beneficiarios y usuarios. La fuente no permite comprobar personas únicas ni eliminar coincidencias entre programas.</a:t>
+            </a:r>
+          </a:p>
+        </p:txBody>
+      </p:sp>
+      <p:sp>
+        <p:nvSpPr>
+          <p:cNvPr id="7" name="method-head-2">
+            <a:extLst xmlns:a="http://schemas.openxmlformats.org/drawingml/2006/main">
+              <a:ext uri="{FF2B5EF4-FFF2-40B4-BE49-F238E27FC236}">
+                <a16:creationId xmlns:a16="http://schemas.microsoft.com/office/drawing/2014/main" id="{1080B6DF-38E8-4480-BA34-DF1DD6B37BC7}"/>
+              </a:ext>
+            </a:extLst>
+          </p:cNvPr>
+          <p:cNvSpPr>
+            <a:spLocks xmlns:a="http://schemas.openxmlformats.org/drawingml/2006/main" noGrp="1"/>
+          </p:cNvSpPr>
+          <p:nvPr/>
+        </p:nvSpPr>
+        <p:spPr>
+          <a:xfrm xmlns:a="http://schemas.openxmlformats.org/drawingml/2006/main">
+            <a:off x="685800" y="3371850"/>
+            <a:ext cx="10477500" cy="342900"/>
+          </a:xfrm>
+          <a:prstGeom xmlns:a="http://schemas.openxmlformats.org/drawingml/2006/main" prst="rect">
+            <a:avLst/>
+          </a:prstGeom>
+          <a:noFill xmlns:a="http://schemas.openxmlformats.org/drawingml/2006/main"/>
+          <a:ln xmlns:a="http://schemas.openxmlformats.org/drawingml/2006/main" w="0">
+            <a:noFill/>
+            <a:prstDash val="solid"/>
+          </a:ln>
+        </p:spPr>
+        <p:txBody>
+          <a:bodyPr xmlns:a="http://schemas.openxmlformats.org/drawingml/2006/main" wrap="square" lIns="0" tIns="0" rIns="0" bIns="0">
+            <a:noAutofit/>
+          </a:bodyPr>
+          <a:lstStyle xmlns:a="http://schemas.openxmlformats.org/drawingml/2006/main">
+            <a:defPPr>
+              <a:defRPr sz="1950" b="1">
+                <a:solidFill>
+                  <a:srgbClr val="512F8D"/>
+                </a:solidFill>
+                <a:latin typeface="Arial"/>
+                <a:ea typeface="Arial"/>
+                <a:cs typeface="Arial"/>
+              </a:defRPr>
+            </a:defPPr>
+            <a:lvl1pPr>
+              <a:defRPr sz="1950" b="1">
+                <a:solidFill>
+                  <a:srgbClr val="512F8D"/>
+                </a:solidFill>
+                <a:latin typeface="Arial"/>
+                <a:ea typeface="Arial"/>
+                <a:cs typeface="Arial"/>
+              </a:defRPr>
+            </a:lvl1pPr>
+            <a:lvl2pPr>
+              <a:defRPr sz="1950" b="1">
+                <a:solidFill>
+                  <a:srgbClr val="512F8D"/>
+                </a:solidFill>
+                <a:latin typeface="Arial"/>
+                <a:ea typeface="Arial"/>
+                <a:cs typeface="Arial"/>
+              </a:defRPr>
+            </a:lvl2pPr>
+            <a:lvl3pPr>
+              <a:defRPr sz="1950" b="1">
+                <a:solidFill>
+                  <a:srgbClr val="512F8D"/>
+                </a:solidFill>
+                <a:latin typeface="Arial"/>
+                <a:ea typeface="Arial"/>
+                <a:cs typeface="Arial"/>
+              </a:defRPr>
+            </a:lvl3pPr>
+            <a:lvl4pPr>
+              <a:defRPr sz="1950" b="1">
+                <a:solidFill>
+                  <a:srgbClr val="512F8D"/>
+                </a:solidFill>
+                <a:latin typeface="Arial"/>
+                <a:ea typeface="Arial"/>
+                <a:cs typeface="Arial"/>
+              </a:defRPr>
+            </a:lvl4pPr>
+            <a:lvl5pPr>
+              <a:defRPr sz="1950" b="1">
+                <a:solidFill>
+                  <a:srgbClr val="512F8D"/>
+                </a:solidFill>
+                <a:latin typeface="Arial"/>
+                <a:ea typeface="Arial"/>
+                <a:cs typeface="Arial"/>
+              </a:defRPr>
+            </a:lvl5pPr>
+            <a:lvl6pPr>
+              <a:defRPr sz="1950" b="1">
+                <a:solidFill>
+                  <a:srgbClr val="512F8D"/>
+                </a:solidFill>
+                <a:latin typeface="Arial"/>
+                <a:ea typeface="Arial"/>
+                <a:cs typeface="Arial"/>
+              </a:defRPr>
+            </a:lvl6pPr>
+            <a:lvl7pPr>
+              <a:defRPr sz="1950" b="1">
+                <a:solidFill>
+                  <a:srgbClr val="512F8D"/>
+                </a:solidFill>
+                <a:latin typeface="Arial"/>
+                <a:ea typeface="Arial"/>
+                <a:cs typeface="Arial"/>
+              </a:defRPr>
+            </a:lvl7pPr>
+            <a:lvl8pPr>
+              <a:defRPr sz="1950" b="1">
+                <a:solidFill>
+                  <a:srgbClr val="512F8D"/>
+                </a:solidFill>
+                <a:latin typeface="Arial"/>
+                <a:ea typeface="Arial"/>
+                <a:cs typeface="Arial"/>
+              </a:defRPr>
+            </a:lvl8pPr>
+            <a:lvl9pPr>
+              <a:defRPr sz="1950" b="1">
+                <a:solidFill>
+                  <a:srgbClr val="512F8D"/>
+                </a:solidFill>
+                <a:latin typeface="Arial"/>
+                <a:ea typeface="Arial"/>
+                <a:cs typeface="Arial"/>
+              </a:defRPr>
+            </a:lvl9pPr>
+          </a:lstStyle>
+          <a:p xmlns:a="http://schemas.openxmlformats.org/drawingml/2006/main">
+            <a:pPr>
+              <a:defRPr sz="1950" b="1">
+                <a:solidFill>
+                  <a:srgbClr val="512F8D"/>
+                </a:solidFill>
+                <a:latin typeface="Arial"/>
+                <a:ea typeface="Arial"/>
+                <a:cs typeface="Arial"/>
+              </a:defRPr>
+            </a:pPr>
+            <a:r>
+              <a:rPr sz="1950" b="1">
+                <a:solidFill>
+                  <a:srgbClr val="512F8D"/>
+                </a:solidFill>
+                <a:latin typeface="Arial"/>
+                <a:ea typeface="Arial"/>
+                <a:cs typeface="Arial"/>
+              </a:rPr>
+              <a:t>Montos acumulados</a:t>
+            </a:r>
+          </a:p>
+        </p:txBody>
+      </p:sp>
+      <p:sp>
+        <p:nvSpPr>
+          <p:cNvPr id="8" name="method-body-2">
+            <a:extLst xmlns:a="http://schemas.openxmlformats.org/drawingml/2006/main">
+              <a:ext uri="{FF2B5EF4-FFF2-40B4-BE49-F238E27FC236}">
+                <a16:creationId xmlns:a16="http://schemas.microsoft.com/office/drawing/2014/main" id="{9028004D-0C9E-47A3-962F-A6837C5BCCBB}"/>
+              </a:ext>
+            </a:extLst>
+          </p:cNvPr>
+          <p:cNvSpPr>
+            <a:spLocks xmlns:a="http://schemas.openxmlformats.org/drawingml/2006/main" noGrp="1"/>
+          </p:cNvSpPr>
+          <p:nvPr/>
+        </p:nvSpPr>
+        <p:spPr>
+          <a:xfrm xmlns:a="http://schemas.openxmlformats.org/drawingml/2006/main">
+            <a:off x="685800" y="3771900"/>
+            <a:ext cx="10572750" cy="742950"/>
+          </a:xfrm>
+          <a:prstGeom xmlns:a="http://schemas.openxmlformats.org/drawingml/2006/main" prst="rect">
+            <a:avLst/>
+          </a:prstGeom>
+          <a:noFill xmlns:a="http://schemas.openxmlformats.org/drawingml/2006/main"/>
+          <a:ln xmlns:a="http://schemas.openxmlformats.org/drawingml/2006/main" w="0">
+            <a:noFill/>
+            <a:prstDash val="solid"/>
+          </a:ln>
+        </p:spPr>
+        <p:txBody>
+          <a:bodyPr xmlns:a="http://schemas.openxmlformats.org/drawingml/2006/main" wrap="square" lIns="0" tIns="0" rIns="0" bIns="0">
+            <a:noAutofit/>
+          </a:bodyPr>
+          <a:lstStyle xmlns:a="http://schemas.openxmlformats.org/drawingml/2006/main">
+            <a:defPPr>
+              <a:defRPr sz="1800" b="0">
+                <a:solidFill>
+                  <a:srgbClr val="20202B"/>
+                </a:solidFill>
+                <a:latin typeface="Arial"/>
+                <a:ea typeface="Arial"/>
+                <a:cs typeface="Arial"/>
+              </a:defRPr>
+            </a:defPPr>
+            <a:lvl1pPr>
+              <a:defRPr sz="1800" b="0">
+                <a:solidFill>
+                  <a:srgbClr val="20202B"/>
+                </a:solidFill>
+                <a:latin typeface="Arial"/>
+                <a:ea typeface="Arial"/>
+                <a:cs typeface="Arial"/>
+              </a:defRPr>
+            </a:lvl1pPr>
+            <a:lvl2pPr>
+              <a:defRPr sz="1800" b="0">
+                <a:solidFill>
+                  <a:srgbClr val="20202B"/>
+                </a:solidFill>
+                <a:latin typeface="Arial"/>
+                <a:ea typeface="Arial"/>
+                <a:cs typeface="Arial"/>
+              </a:defRPr>
+            </a:lvl2pPr>
+            <a:lvl3pPr>
+              <a:defRPr sz="1800" b="0">
+                <a:solidFill>
+                  <a:srgbClr val="20202B"/>
+                </a:solidFill>
+                <a:latin typeface="Arial"/>
+                <a:ea typeface="Arial"/>
+                <a:cs typeface="Arial"/>
+              </a:defRPr>
+            </a:lvl3pPr>
+            <a:lvl4pPr>
+              <a:defRPr sz="1800" b="0">
+                <a:solidFill>
+                  <a:srgbClr val="20202B"/>
+                </a:solidFill>
+                <a:latin typeface="Arial"/>
+                <a:ea typeface="Arial"/>
+                <a:cs typeface="Arial"/>
+              </a:defRPr>
+            </a:lvl4pPr>
+            <a:lvl5pPr>
+              <a:defRPr sz="1800" b="0">
+                <a:solidFill>
+                  <a:srgbClr val="20202B"/>
+                </a:solidFill>
+                <a:latin typeface="Arial"/>
+                <a:ea typeface="Arial"/>
+                <a:cs typeface="Arial"/>
+              </a:defRPr>
+            </a:lvl5pPr>
+            <a:lvl6pPr>
+              <a:defRPr sz="1800" b="0">
+                <a:solidFill>
+                  <a:srgbClr val="20202B"/>
+                </a:solidFill>
+                <a:latin typeface="Arial"/>
+                <a:ea typeface="Arial"/>
+                <a:cs typeface="Arial"/>
+              </a:defRPr>
+            </a:lvl6pPr>
+            <a:lvl7pPr>
+              <a:defRPr sz="1800" b="0">
+                <a:solidFill>
+                  <a:srgbClr val="20202B"/>
+                </a:solidFill>
+                <a:latin typeface="Arial"/>
+                <a:ea typeface="Arial"/>
+                <a:cs typeface="Arial"/>
+              </a:defRPr>
+            </a:lvl7pPr>
+            <a:lvl8pPr>
+              <a:defRPr sz="1800" b="0">
+                <a:solidFill>
+                  <a:srgbClr val="20202B"/>
+                </a:solidFill>
+                <a:latin typeface="Arial"/>
+                <a:ea typeface="Arial"/>
+                <a:cs typeface="Arial"/>
+              </a:defRPr>
+            </a:lvl8pPr>
+            <a:lvl9pPr>
+              <a:defRPr sz="1800" b="0">
+                <a:solidFill>
+                  <a:srgbClr val="20202B"/>
+                </a:solidFill>
+                <a:latin typeface="Arial"/>
+                <a:ea typeface="Arial"/>
+                <a:cs typeface="Arial"/>
+              </a:defRPr>
+            </a:lvl9pPr>
+          </a:lstStyle>
+          <a:p xmlns:a="http://schemas.openxmlformats.org/drawingml/2006/main">
+            <a:pPr>
+              <a:defRPr sz="1800" b="0">
+                <a:solidFill>
+                  <a:srgbClr val="20202B"/>
+                </a:solidFill>
+                <a:latin typeface="Arial"/>
+                <a:ea typeface="Arial"/>
+                <a:cs typeface="Arial"/>
+              </a:defRPr>
+            </a:pPr>
+            <a:r>
+              <a:rPr sz="1800" b="0">
+                <a:solidFill>
+                  <a:srgbClr val="20202B"/>
+                </a:solidFill>
+                <a:latin typeface="Arial"/>
+                <a:ea typeface="Arial"/>
+                <a:cs typeface="Arial"/>
+              </a:rPr>
+              <a:t>El fiscal 2026 corresponde al presupuesto del año en la fuente. El acumulado de gobierno lo incluye y añade períodos anteriores. No se suman entre sí.</a:t>
+            </a:r>
+          </a:p>
+        </p:txBody>
+      </p:sp>
+      <p:sp>
+        <p:nvSpPr>
+          <p:cNvPr id="9" name="method-head-3">
+            <a:extLst xmlns:a="http://schemas.openxmlformats.org/drawingml/2006/main">
+              <a:ext uri="{FF2B5EF4-FFF2-40B4-BE49-F238E27FC236}">
+                <a16:creationId xmlns:a16="http://schemas.microsoft.com/office/drawing/2014/main" id="{37A8A915-7ECB-4133-9C46-A14F769A2AA9}"/>
+              </a:ext>
+            </a:extLst>
+          </p:cNvPr>
+          <p:cNvSpPr>
+            <a:spLocks xmlns:a="http://schemas.openxmlformats.org/drawingml/2006/main" noGrp="1"/>
+          </p:cNvSpPr>
+          <p:nvPr/>
+        </p:nvSpPr>
+        <p:spPr>
+          <a:xfrm xmlns:a="http://schemas.openxmlformats.org/drawingml/2006/main">
+            <a:off x="685800" y="4762500"/>
+            <a:ext cx="10477500" cy="342900"/>
+          </a:xfrm>
+          <a:prstGeom xmlns:a="http://schemas.openxmlformats.org/drawingml/2006/main" prst="rect">
+            <a:avLst/>
+          </a:prstGeom>
+          <a:noFill xmlns:a="http://schemas.openxmlformats.org/drawingml/2006/main"/>
+          <a:ln xmlns:a="http://schemas.openxmlformats.org/drawingml/2006/main" w="0">
+            <a:noFill/>
+            <a:prstDash val="solid"/>
+          </a:ln>
+        </p:spPr>
+        <p:txBody>
+          <a:bodyPr xmlns:a="http://schemas.openxmlformats.org/drawingml/2006/main" wrap="square" lIns="0" tIns="0" rIns="0" bIns="0">
+            <a:noAutofit/>
+          </a:bodyPr>
+          <a:lstStyle xmlns:a="http://schemas.openxmlformats.org/drawingml/2006/main">
+            <a:defPPr>
+              <a:defRPr sz="1950" b="1">
+                <a:solidFill>
+                  <a:srgbClr val="512F8D"/>
+                </a:solidFill>
+                <a:latin typeface="Arial"/>
+                <a:ea typeface="Arial"/>
+                <a:cs typeface="Arial"/>
+              </a:defRPr>
+            </a:defPPr>
+            <a:lvl1pPr>
+              <a:defRPr sz="1950" b="1">
+                <a:solidFill>
+                  <a:srgbClr val="512F8D"/>
+                </a:solidFill>
+                <a:latin typeface="Arial"/>
+                <a:ea typeface="Arial"/>
+                <a:cs typeface="Arial"/>
+              </a:defRPr>
+            </a:lvl1pPr>
+            <a:lvl2pPr>
+              <a:defRPr sz="1950" b="1">
+                <a:solidFill>
+                  <a:srgbClr val="512F8D"/>
+                </a:solidFill>
+                <a:latin typeface="Arial"/>
+                <a:ea typeface="Arial"/>
+                <a:cs typeface="Arial"/>
+              </a:defRPr>
+            </a:lvl2pPr>
+            <a:lvl3pPr>
+              <a:defRPr sz="1950" b="1">
+                <a:solidFill>
+                  <a:srgbClr val="512F8D"/>
+                </a:solidFill>
+                <a:latin typeface="Arial"/>
+                <a:ea typeface="Arial"/>
+                <a:cs typeface="Arial"/>
+              </a:defRPr>
+            </a:lvl3pPr>
+            <a:lvl4pPr>
+              <a:defRPr sz="1950" b="1">
+                <a:solidFill>
+                  <a:srgbClr val="512F8D"/>
+                </a:solidFill>
+                <a:latin typeface="Arial"/>
+                <a:ea typeface="Arial"/>
+                <a:cs typeface="Arial"/>
+              </a:defRPr>
+            </a:lvl4pPr>
+            <a:lvl5pPr>
+              <a:defRPr sz="1950" b="1">
+                <a:solidFill>
+                  <a:srgbClr val="512F8D"/>
+                </a:solidFill>
+                <a:latin typeface="Arial"/>
+                <a:ea typeface="Arial"/>
+                <a:cs typeface="Arial"/>
+              </a:defRPr>
+            </a:lvl5pPr>
+            <a:lvl6pPr>
+              <a:defRPr sz="1950" b="1">
+                <a:solidFill>
+                  <a:srgbClr val="512F8D"/>
+                </a:solidFill>
+                <a:latin typeface="Arial"/>
+                <a:ea typeface="Arial"/>
+                <a:cs typeface="Arial"/>
+              </a:defRPr>
+            </a:lvl6pPr>
+            <a:lvl7pPr>
+              <a:defRPr sz="1950" b="1">
+                <a:solidFill>
+                  <a:srgbClr val="512F8D"/>
+                </a:solidFill>
+                <a:latin typeface="Arial"/>
+                <a:ea typeface="Arial"/>
+                <a:cs typeface="Arial"/>
+              </a:defRPr>
+            </a:lvl7pPr>
+            <a:lvl8pPr>
+              <a:defRPr sz="1950" b="1">
+                <a:solidFill>
+                  <a:srgbClr val="512F8D"/>
+                </a:solidFill>
+                <a:latin typeface="Arial"/>
+                <a:ea typeface="Arial"/>
+                <a:cs typeface="Arial"/>
+              </a:defRPr>
+            </a:lvl8pPr>
+            <a:lvl9pPr>
+              <a:defRPr sz="1950" b="1">
+                <a:solidFill>
+                  <a:srgbClr val="512F8D"/>
+                </a:solidFill>
+                <a:latin typeface="Arial"/>
+                <a:ea typeface="Arial"/>
+                <a:cs typeface="Arial"/>
+              </a:defRPr>
+            </a:lvl9pPr>
+          </a:lstStyle>
+          <a:p xmlns:a="http://schemas.openxmlformats.org/drawingml/2006/main">
+            <a:pPr>
+              <a:defRPr sz="1950" b="1">
+                <a:solidFill>
+                  <a:srgbClr val="512F8D"/>
+                </a:solidFill>
+                <a:latin typeface="Arial"/>
+                <a:ea typeface="Arial"/>
+                <a:cs typeface="Arial"/>
+              </a:defRPr>
+            </a:pPr>
+            <a:r>
+              <a:rPr sz="1950" b="1">
+                <a:solidFill>
+                  <a:srgbClr val="512F8D"/>
+                </a:solidFill>
+                <a:latin typeface="Arial"/>
+                <a:ea typeface="Arial"/>
+                <a:cs typeface="Arial"/>
+              </a:rPr>
+              <a:t>Presupuesto ejecutado y unidades</a:t>
+            </a:r>
+          </a:p>
+        </p:txBody>
+      </p:sp>
+      <p:sp>
+        <p:nvSpPr>
+          <p:cNvPr id="10" name="method-body-3">
+            <a:extLst xmlns:a="http://schemas.openxmlformats.org/drawingml/2006/main">
+              <a:ext uri="{FF2B5EF4-FFF2-40B4-BE49-F238E27FC236}">
+                <a16:creationId xmlns:a16="http://schemas.microsoft.com/office/drawing/2014/main" id="{901EA0C3-125D-4A64-9AF6-4784152DE1B0}"/>
+              </a:ext>
+            </a:extLst>
+          </p:cNvPr>
+          <p:cNvSpPr>
+            <a:spLocks xmlns:a="http://schemas.openxmlformats.org/drawingml/2006/main" noGrp="1"/>
+          </p:cNvSpPr>
+          <p:nvPr/>
+        </p:nvSpPr>
+        <p:spPr>
+          <a:xfrm xmlns:a="http://schemas.openxmlformats.org/drawingml/2006/main">
+            <a:off x="685800" y="5162550"/>
+            <a:ext cx="10572750" cy="895350"/>
+          </a:xfrm>
+          <a:prstGeom xmlns:a="http://schemas.openxmlformats.org/drawingml/2006/main" prst="rect">
+            <a:avLst/>
+          </a:prstGeom>
+          <a:noFill xmlns:a="http://schemas.openxmlformats.org/drawingml/2006/main"/>
+          <a:ln xmlns:a="http://schemas.openxmlformats.org/drawingml/2006/main" w="0">
+            <a:noFill/>
+            <a:prstDash val="solid"/>
+          </a:ln>
+        </p:spPr>
+        <p:txBody>
+          <a:bodyPr xmlns:a="http://schemas.openxmlformats.org/drawingml/2006/main" wrap="square" lIns="0" tIns="0" rIns="0" bIns="0">
+            <a:noAutofit/>
+          </a:bodyPr>
+          <a:lstStyle xmlns:a="http://schemas.openxmlformats.org/drawingml/2006/main">
+            <a:defPPr>
+              <a:defRPr sz="1800" b="0">
+                <a:solidFill>
+                  <a:srgbClr val="20202B"/>
+                </a:solidFill>
+                <a:latin typeface="Arial"/>
+                <a:ea typeface="Arial"/>
+                <a:cs typeface="Arial"/>
+              </a:defRPr>
+            </a:defPPr>
+            <a:lvl1pPr>
+              <a:defRPr sz="1800" b="0">
+                <a:solidFill>
+                  <a:srgbClr val="20202B"/>
+                </a:solidFill>
+                <a:latin typeface="Arial"/>
+                <a:ea typeface="Arial"/>
+                <a:cs typeface="Arial"/>
+              </a:defRPr>
+            </a:lvl1pPr>
+            <a:lvl2pPr>
+              <a:defRPr sz="1800" b="0">
+                <a:solidFill>
+                  <a:srgbClr val="20202B"/>
+                </a:solidFill>
+                <a:latin typeface="Arial"/>
+                <a:ea typeface="Arial"/>
+                <a:cs typeface="Arial"/>
+              </a:defRPr>
+            </a:lvl2pPr>
+            <a:lvl3pPr>
+              <a:defRPr sz="1800" b="0">
+                <a:solidFill>
+                  <a:srgbClr val="20202B"/>
+                </a:solidFill>
+                <a:latin typeface="Arial"/>
+                <a:ea typeface="Arial"/>
+                <a:cs typeface="Arial"/>
+              </a:defRPr>
+            </a:lvl3pPr>
+            <a:lvl4pPr>
+              <a:defRPr sz="1800" b="0">
+                <a:solidFill>
+                  <a:srgbClr val="20202B"/>
+                </a:solidFill>
+                <a:latin typeface="Arial"/>
+                <a:ea typeface="Arial"/>
+                <a:cs typeface="Arial"/>
+              </a:defRPr>
+            </a:lvl4pPr>
+            <a:lvl5pPr>
+              <a:defRPr sz="1800" b="0">
+                <a:solidFill>
+                  <a:srgbClr val="20202B"/>
+                </a:solidFill>
+                <a:latin typeface="Arial"/>
+                <a:ea typeface="Arial"/>
+                <a:cs typeface="Arial"/>
+              </a:defRPr>
+            </a:lvl5pPr>
+            <a:lvl6pPr>
+              <a:defRPr sz="1800" b="0">
+                <a:solidFill>
+                  <a:srgbClr val="20202B"/>
+                </a:solidFill>
+                <a:latin typeface="Arial"/>
+                <a:ea typeface="Arial"/>
+                <a:cs typeface="Arial"/>
+              </a:defRPr>
+            </a:lvl6pPr>
+            <a:lvl7pPr>
+              <a:defRPr sz="1800" b="0">
+                <a:solidFill>
+                  <a:srgbClr val="20202B"/>
+                </a:solidFill>
+                <a:latin typeface="Arial"/>
+                <a:ea typeface="Arial"/>
+                <a:cs typeface="Arial"/>
+              </a:defRPr>
+            </a:lvl7pPr>
+            <a:lvl8pPr>
+              <a:defRPr sz="1800" b="0">
+                <a:solidFill>
+                  <a:srgbClr val="20202B"/>
+                </a:solidFill>
+                <a:latin typeface="Arial"/>
+                <a:ea typeface="Arial"/>
+                <a:cs typeface="Arial"/>
+              </a:defRPr>
+            </a:lvl8pPr>
+            <a:lvl9pPr>
+              <a:defRPr sz="1800" b="0">
+                <a:solidFill>
+                  <a:srgbClr val="20202B"/>
+                </a:solidFill>
+                <a:latin typeface="Arial"/>
+                <a:ea typeface="Arial"/>
+                <a:cs typeface="Arial"/>
+              </a:defRPr>
+            </a:lvl9pPr>
+          </a:lstStyle>
+          <a:p xmlns:a="http://schemas.openxmlformats.org/drawingml/2006/main">
+            <a:pPr>
+              <a:defRPr sz="1800" b="0">
+                <a:solidFill>
+                  <a:srgbClr val="20202B"/>
+                </a:solidFill>
+                <a:latin typeface="Arial"/>
+                <a:ea typeface="Arial"/>
+                <a:cs typeface="Arial"/>
+              </a:defRPr>
+            </a:pPr>
+            <a:r>
+              <a:rPr sz="1800" b="0">
+                <a:solidFill>
+                  <a:srgbClr val="20202B"/>
+                </a:solidFill>
+                <a:latin typeface="Arial"/>
+                <a:ea typeface="Arial"/>
+                <a:cs typeface="Arial"/>
+              </a:rPr>
+              <a:t>Ejecución presupuestaria: N/D. La fuente no certifica el gasto ejecutado. Las unidades corresponden a protección integral. N/D distingue un dato ausente de un cero reportado.</a:t>
+            </a:r>
+          </a:p>
+        </p:txBody>
+      </p:sp>
+    </p:spTree>
+    <p:extLst>
+      <p:ext uri="{BB962C8B-B14F-4D97-AF65-F5344CB8AC3E}">
+        <p14:creationId xmlns:p14="http://schemas.microsoft.com/office/powerpoint/2010/main" val="2108744431"/>
+      </p:ext>
+    </p:extLst>
+  </p:cSld>
+</p:sld>
+</file>
+
 <file path=ppt/slides/slide2.xml><?xml version="1.0" encoding="utf-8"?>
+<p:sld xmlns:p="http://schemas.openxmlformats.org/presentationml/2006/main">
+  <p:cSld>
+    <p:bg>
+      <p:bgPr>
+        <a:solidFill xmlns:a="http://schemas.openxmlformats.org/drawingml/2006/main">
+          <a:srgbClr val="FFFFFF"/>
+        </a:solidFill>
+      </p:bgPr>
+    </p:bg>
+    <p:spTree>
+      <p:nvGrpSpPr>
+        <p:cNvPr id="1" name=""/>
+        <p:cNvGrpSpPr/>
+        <p:nvPr/>
+      </p:nvGrpSpPr>
+      <p:grpSpPr>
+        <a:xfrm xmlns:a="http://schemas.openxmlformats.org/drawingml/2006/main"/>
+      </p:grpSpPr>
+      <p:sp>
+        <p:nvSpPr>
+          <p:cNvPr id="11" name="eyebrow">
+            <a:extLst xmlns:a="http://schemas.openxmlformats.org/drawingml/2006/main">
+              <a:ext uri="{FF2B5EF4-FFF2-40B4-BE49-F238E27FC236}">
+                <a16:creationId xmlns:a16="http://schemas.microsoft.com/office/drawing/2014/main" id="{4EB87881-4BD7-4CC1-A478-5E402BABBE84}"/>
+              </a:ext>
+            </a:extLst>
+          </p:cNvPr>
+          <p:cNvSpPr>
+            <a:spLocks xmlns:a="http://schemas.openxmlformats.org/drawingml/2006/main" noGrp="1"/>
+          </p:cNvSpPr>
+          <p:nvPr/>
+        </p:nvSpPr>
+        <p:spPr>
+          <a:xfrm xmlns:a="http://schemas.openxmlformats.org/drawingml/2006/main">
+            <a:off x="685800" y="361950"/>
+            <a:ext cx="6858000" cy="238125"/>
+          </a:xfrm>
+          <a:prstGeom xmlns:a="http://schemas.openxmlformats.org/drawingml/2006/main" prst="rect">
+            <a:avLst/>
+          </a:prstGeom>
+          <a:noFill xmlns:a="http://schemas.openxmlformats.org/drawingml/2006/main"/>
+          <a:ln xmlns:a="http://schemas.openxmlformats.org/drawingml/2006/main" w="0">
+            <a:noFill/>
+            <a:prstDash val="solid"/>
+          </a:ln>
+        </p:spPr>
+        <p:txBody>
+          <a:bodyPr xmlns:a="http://schemas.openxmlformats.org/drawingml/2006/main" wrap="square" lIns="0" tIns="0" rIns="0" bIns="0">
+            <a:noAutofit/>
+          </a:bodyPr>
+          <a:lstStyle xmlns:a="http://schemas.openxmlformats.org/drawingml/2006/main">
+            <a:defPPr>
+              <a:defRPr sz="1350" b="1">
+                <a:solidFill>
+                  <a:srgbClr val="512F8D"/>
+                </a:solidFill>
+                <a:latin typeface="Arial"/>
+                <a:ea typeface="Arial"/>
+                <a:cs typeface="Arial"/>
+              </a:defRPr>
+            </a:defPPr>
+            <a:lvl1pPr>
+              <a:defRPr sz="1350" b="1">
+                <a:solidFill>
+                  <a:srgbClr val="512F8D"/>
+                </a:solidFill>
+                <a:latin typeface="Arial"/>
+                <a:ea typeface="Arial"/>
+                <a:cs typeface="Arial"/>
+              </a:defRPr>
+            </a:lvl1pPr>
+            <a:lvl2pPr>
+              <a:defRPr sz="1350" b="1">
+                <a:solidFill>
+                  <a:srgbClr val="512F8D"/>
+                </a:solidFill>
+                <a:latin typeface="Arial"/>
+                <a:ea typeface="Arial"/>
+                <a:cs typeface="Arial"/>
+              </a:defRPr>
+            </a:lvl2pPr>
+            <a:lvl3pPr>
+              <a:defRPr sz="1350" b="1">
+                <a:solidFill>
+                  <a:srgbClr val="512F8D"/>
+                </a:solidFill>
+                <a:latin typeface="Arial"/>
+                <a:ea typeface="Arial"/>
+                <a:cs typeface="Arial"/>
+              </a:defRPr>
+            </a:lvl3pPr>
+            <a:lvl4pPr>
+              <a:defRPr sz="1350" b="1">
+                <a:solidFill>
+                  <a:srgbClr val="512F8D"/>
+                </a:solidFill>
+                <a:latin typeface="Arial"/>
+                <a:ea typeface="Arial"/>
+                <a:cs typeface="Arial"/>
+              </a:defRPr>
+            </a:lvl4pPr>
+            <a:lvl5pPr>
+              <a:defRPr sz="1350" b="1">
+                <a:solidFill>
+                  <a:srgbClr val="512F8D"/>
+                </a:solidFill>
+                <a:latin typeface="Arial"/>
+                <a:ea typeface="Arial"/>
+                <a:cs typeface="Arial"/>
+              </a:defRPr>
+            </a:lvl5pPr>
+            <a:lvl6pPr>
+              <a:defRPr sz="1350" b="1">
+                <a:solidFill>
+                  <a:srgbClr val="512F8D"/>
+                </a:solidFill>
+                <a:latin typeface="Arial"/>
+                <a:ea typeface="Arial"/>
+                <a:cs typeface="Arial"/>
+              </a:defRPr>
+            </a:lvl6pPr>
+            <a:lvl7pPr>
+              <a:defRPr sz="1350" b="1">
+                <a:solidFill>
+                  <a:srgbClr val="512F8D"/>
+                </a:solidFill>
+                <a:latin typeface="Arial"/>
+                <a:ea typeface="Arial"/>
+                <a:cs typeface="Arial"/>
+              </a:defRPr>
+            </a:lvl7pPr>
+            <a:lvl8pPr>
+              <a:defRPr sz="1350" b="1">
+                <a:solidFill>
+                  <a:srgbClr val="512F8D"/>
+                </a:solidFill>
+                <a:latin typeface="Arial"/>
+                <a:ea typeface="Arial"/>
+                <a:cs typeface="Arial"/>
+              </a:defRPr>
+            </a:lvl8pPr>
+            <a:lvl9pPr>
+              <a:defRPr sz="1350" b="1">
+                <a:solidFill>
+                  <a:srgbClr val="512F8D"/>
+                </a:solidFill>
+                <a:latin typeface="Arial"/>
+                <a:ea typeface="Arial"/>
+                <a:cs typeface="Arial"/>
+              </a:defRPr>
+            </a:lvl9pPr>
+          </a:lstStyle>
+          <a:p xmlns:a="http://schemas.openxmlformats.org/drawingml/2006/main">
+            <a:pPr>
+              <a:defRPr sz="1350" b="1">
+                <a:solidFill>
+                  <a:srgbClr val="512F8D"/>
+                </a:solidFill>
+                <a:latin typeface="Arial"/>
+                <a:ea typeface="Arial"/>
+                <a:cs typeface="Arial"/>
+              </a:defRPr>
+            </a:pPr>
+            <a:r>
+              <a:rPr sz="1350" b="1">
+                <a:solidFill>
+                  <a:srgbClr val="512F8D"/>
+                </a:solidFill>
+                <a:latin typeface="Arial"/>
+                <a:ea typeface="Arial"/>
+                <a:cs typeface="Arial"/>
+              </a:rPr>
+              <a:t>Septiembre 2026</a:t>
+            </a:r>
+          </a:p>
+        </p:txBody>
+      </p:sp>
+      <p:sp>
+        <p:nvSpPr>
+          <p:cNvPr id="2" name="title">
+            <a:extLst xmlns:a="http://schemas.openxmlformats.org/drawingml/2006/main">
+              <a:ext uri="{FF2B5EF4-FFF2-40B4-BE49-F238E27FC236}">
+                <a16:creationId xmlns:a16="http://schemas.microsoft.com/office/drawing/2014/main" id="{37EAA87D-ACA3-4949-A403-118B30B6B6E9}"/>
+              </a:ext>
+            </a:extLst>
+          </p:cNvPr>
+          <p:cNvSpPr>
+            <a:spLocks xmlns:a="http://schemas.openxmlformats.org/drawingml/2006/main" noGrp="1"/>
+          </p:cNvSpPr>
+          <p:nvPr/>
+        </p:nvSpPr>
+        <p:spPr>
+          <a:xfrm xmlns:a="http://schemas.openxmlformats.org/drawingml/2006/main">
+            <a:off x="685800" y="790575"/>
+            <a:ext cx="10820400" cy="904875"/>
+          </a:xfrm>
+          <a:prstGeom xmlns:a="http://schemas.openxmlformats.org/drawingml/2006/main" prst="rect">
+            <a:avLst/>
+          </a:prstGeom>
+          <a:noFill xmlns:a="http://schemas.openxmlformats.org/drawingml/2006/main"/>
+          <a:ln xmlns:a="http://schemas.openxmlformats.org/drawingml/2006/main" w="0">
+            <a:noFill/>
+            <a:prstDash val="solid"/>
+          </a:ln>
+        </p:spPr>
+        <p:txBody>
+          <a:bodyPr xmlns:a="http://schemas.openxmlformats.org/drawingml/2006/main" wrap="square" lIns="0" tIns="0" rIns="0" bIns="0">
+            <a:noAutofit/>
+          </a:bodyPr>
+          <a:lstStyle xmlns:a="http://schemas.openxmlformats.org/drawingml/2006/main">
+            <a:defPPr>
+              <a:defRPr sz="3300" b="1">
+                <a:solidFill>
+                  <a:srgbClr val="20202B"/>
+                </a:solidFill>
+                <a:latin typeface="Arial"/>
+                <a:ea typeface="Arial"/>
+                <a:cs typeface="Arial"/>
+              </a:defRPr>
+            </a:defPPr>
+            <a:lvl1pPr>
+              <a:defRPr sz="3300" b="1">
+                <a:solidFill>
+                  <a:srgbClr val="20202B"/>
+                </a:solidFill>
+                <a:latin typeface="Arial"/>
+                <a:ea typeface="Arial"/>
+                <a:cs typeface="Arial"/>
+              </a:defRPr>
+            </a:lvl1pPr>
+            <a:lvl2pPr>
+              <a:defRPr sz="3300" b="1">
+                <a:solidFill>
+                  <a:srgbClr val="20202B"/>
+                </a:solidFill>
+                <a:latin typeface="Arial"/>
+                <a:ea typeface="Arial"/>
+                <a:cs typeface="Arial"/>
+              </a:defRPr>
+            </a:lvl2pPr>
+            <a:lvl3pPr>
+              <a:defRPr sz="3300" b="1">
+                <a:solidFill>
+                  <a:srgbClr val="20202B"/>
+                </a:solidFill>
+                <a:latin typeface="Arial"/>
+                <a:ea typeface="Arial"/>
+                <a:cs typeface="Arial"/>
+              </a:defRPr>
+            </a:lvl3pPr>
+            <a:lvl4pPr>
+              <a:defRPr sz="3300" b="1">
+                <a:solidFill>
+                  <a:srgbClr val="20202B"/>
+                </a:solidFill>
+                <a:latin typeface="Arial"/>
+                <a:ea typeface="Arial"/>
+                <a:cs typeface="Arial"/>
+              </a:defRPr>
+            </a:lvl4pPr>
+            <a:lvl5pPr>
+              <a:defRPr sz="3300" b="1">
+                <a:solidFill>
+                  <a:srgbClr val="20202B"/>
+                </a:solidFill>
+                <a:latin typeface="Arial"/>
+                <a:ea typeface="Arial"/>
+                <a:cs typeface="Arial"/>
+              </a:defRPr>
+            </a:lvl5pPr>
+            <a:lvl6pPr>
+              <a:defRPr sz="3300" b="1">
+                <a:solidFill>
+                  <a:srgbClr val="20202B"/>
+                </a:solidFill>
+                <a:latin typeface="Arial"/>
+                <a:ea typeface="Arial"/>
+                <a:cs typeface="Arial"/>
+              </a:defRPr>
+            </a:lvl6pPr>
+            <a:lvl7pPr>
+              <a:defRPr sz="3300" b="1">
+                <a:solidFill>
+                  <a:srgbClr val="20202B"/>
+                </a:solidFill>
+                <a:latin typeface="Arial"/>
+                <a:ea typeface="Arial"/>
+                <a:cs typeface="Arial"/>
+              </a:defRPr>
+            </a:lvl7pPr>
+            <a:lvl8pPr>
+              <a:defRPr sz="3300" b="1">
+                <a:solidFill>
+                  <a:srgbClr val="20202B"/>
+                </a:solidFill>
+                <a:latin typeface="Arial"/>
+                <a:ea typeface="Arial"/>
+                <a:cs typeface="Arial"/>
+              </a:defRPr>
+            </a:lvl8pPr>
+            <a:lvl9pPr>
+              <a:defRPr sz="3300" b="1">
+                <a:solidFill>
+                  <a:srgbClr val="20202B"/>
+                </a:solidFill>
+                <a:latin typeface="Arial"/>
+                <a:ea typeface="Arial"/>
+                <a:cs typeface="Arial"/>
+              </a:defRPr>
+            </a:lvl9pPr>
+          </a:lstStyle>
+          <a:p xmlns:a="http://schemas.openxmlformats.org/drawingml/2006/main">
+            <a:pPr>
+              <a:defRPr sz="3300" b="1">
+                <a:solidFill>
+                  <a:srgbClr val="20202B"/>
+                </a:solidFill>
+                <a:latin typeface="Arial"/>
+                <a:ea typeface="Arial"/>
+                <a:cs typeface="Arial"/>
+              </a:defRPr>
+            </a:pPr>
+            <a:r>
+              <a:rPr sz="3300" b="1">
+                <a:solidFill>
+                  <a:srgbClr val="20202B"/>
+                </a:solidFill>
+                <a:latin typeface="Arial"/>
+                <a:ea typeface="Arial"/>
+                <a:cs typeface="Arial"/>
+              </a:rPr>
+              <a:t>Cobertura en el territorio</a:t>
+            </a:r>
+          </a:p>
+        </p:txBody>
+      </p:sp>
+      <p:sp>
+        <p:nvSpPr>
+          <p:cNvPr id="3" name="footer">
+            <a:extLst xmlns:a="http://schemas.openxmlformats.org/drawingml/2006/main">
+              <a:ext uri="{FF2B5EF4-FFF2-40B4-BE49-F238E27FC236}">
+                <a16:creationId xmlns:a16="http://schemas.microsoft.com/office/drawing/2014/main" id="{76A5493E-8815-4D84-ADD1-62A795A6DD6F}"/>
+              </a:ext>
+            </a:extLst>
+          </p:cNvPr>
+          <p:cNvSpPr>
+            <a:spLocks xmlns:a="http://schemas.openxmlformats.org/drawingml/2006/main" noGrp="1"/>
+          </p:cNvSpPr>
+          <p:nvPr/>
+        </p:nvSpPr>
+        <p:spPr>
+          <a:xfrm xmlns:a="http://schemas.openxmlformats.org/drawingml/2006/main">
+            <a:off x="685800" y="6457950"/>
+            <a:ext cx="10096500" cy="190500"/>
+          </a:xfrm>
+          <a:prstGeom xmlns:a="http://schemas.openxmlformats.org/drawingml/2006/main" prst="rect">
+            <a:avLst/>
+          </a:prstGeom>
+          <a:noFill xmlns:a="http://schemas.openxmlformats.org/drawingml/2006/main"/>
+          <a:ln xmlns:a="http://schemas.openxmlformats.org/drawingml/2006/main" w="0">
+            <a:noFill/>
+            <a:prstDash val="solid"/>
+          </a:ln>
+        </p:spPr>
+        <p:txBody>
+          <a:bodyPr xmlns:a="http://schemas.openxmlformats.org/drawingml/2006/main" wrap="square" lIns="0" tIns="0" rIns="0" bIns="0">
+            <a:noAutofit/>
+          </a:bodyPr>
+          <a:lstStyle xmlns:a="http://schemas.openxmlformats.org/drawingml/2006/main">
+            <a:defPPr>
+              <a:defRPr sz="975" b="0">
+                <a:solidFill>
+                  <a:srgbClr val="777080"/>
+                </a:solidFill>
+                <a:latin typeface="Arial"/>
+                <a:ea typeface="Arial"/>
+                <a:cs typeface="Arial"/>
+              </a:defRPr>
+            </a:defPPr>
+            <a:lvl1pPr>
+              <a:defRPr sz="975" b="0">
+                <a:solidFill>
+                  <a:srgbClr val="777080"/>
+                </a:solidFill>
+                <a:latin typeface="Arial"/>
+                <a:ea typeface="Arial"/>
+                <a:cs typeface="Arial"/>
+              </a:defRPr>
+            </a:lvl1pPr>
+            <a:lvl2pPr>
+              <a:defRPr sz="975" b="0">
+                <a:solidFill>
+                  <a:srgbClr val="777080"/>
+                </a:solidFill>
+                <a:latin typeface="Arial"/>
+                <a:ea typeface="Arial"/>
+                <a:cs typeface="Arial"/>
+              </a:defRPr>
+            </a:lvl2pPr>
+            <a:lvl3pPr>
+              <a:defRPr sz="975" b="0">
+                <a:solidFill>
+                  <a:srgbClr val="777080"/>
+                </a:solidFill>
+                <a:latin typeface="Arial"/>
+                <a:ea typeface="Arial"/>
+                <a:cs typeface="Arial"/>
+              </a:defRPr>
+            </a:lvl3pPr>
+            <a:lvl4pPr>
+              <a:defRPr sz="975" b="0">
+                <a:solidFill>
+                  <a:srgbClr val="777080"/>
+                </a:solidFill>
+                <a:latin typeface="Arial"/>
+                <a:ea typeface="Arial"/>
+                <a:cs typeface="Arial"/>
+              </a:defRPr>
+            </a:lvl4pPr>
+            <a:lvl5pPr>
+              <a:defRPr sz="975" b="0">
+                <a:solidFill>
+                  <a:srgbClr val="777080"/>
+                </a:solidFill>
+                <a:latin typeface="Arial"/>
+                <a:ea typeface="Arial"/>
+                <a:cs typeface="Arial"/>
+              </a:defRPr>
+            </a:lvl5pPr>
+            <a:lvl6pPr>
+              <a:defRPr sz="975" b="0">
+                <a:solidFill>
+                  <a:srgbClr val="777080"/>
+                </a:solidFill>
+                <a:latin typeface="Arial"/>
+                <a:ea typeface="Arial"/>
+                <a:cs typeface="Arial"/>
+              </a:defRPr>
+            </a:lvl6pPr>
+            <a:lvl7pPr>
+              <a:defRPr sz="975" b="0">
+                <a:solidFill>
+                  <a:srgbClr val="777080"/>
+                </a:solidFill>
+                <a:latin typeface="Arial"/>
+                <a:ea typeface="Arial"/>
+                <a:cs typeface="Arial"/>
+              </a:defRPr>
+            </a:lvl7pPr>
+            <a:lvl8pPr>
+              <a:defRPr sz="975" b="0">
+                <a:solidFill>
+                  <a:srgbClr val="777080"/>
+                </a:solidFill>
+                <a:latin typeface="Arial"/>
+                <a:ea typeface="Arial"/>
+                <a:cs typeface="Arial"/>
+              </a:defRPr>
+            </a:lvl8pPr>
+            <a:lvl9pPr>
+              <a:defRPr sz="975" b="0">
+                <a:solidFill>
+                  <a:srgbClr val="777080"/>
+                </a:solidFill>
+                <a:latin typeface="Arial"/>
+                <a:ea typeface="Arial"/>
+                <a:cs typeface="Arial"/>
+              </a:defRPr>
+            </a:lvl9pPr>
+          </a:lstStyle>
+          <a:p xmlns:a="http://schemas.openxmlformats.org/drawingml/2006/main">
+            <a:pPr>
+              <a:defRPr sz="975" b="0">
+                <a:solidFill>
+                  <a:srgbClr val="777080"/>
+                </a:solidFill>
+                <a:latin typeface="Arial"/>
+                <a:ea typeface="Arial"/>
+                <a:cs typeface="Arial"/>
+              </a:defRPr>
+            </a:pPr>
+            <a:r>
+              <a:rPr sz="975" b="0">
+                <a:solidFill>
+                  <a:srgbClr val="777080"/>
+                </a:solidFill>
+                <a:latin typeface="Arial"/>
+                <a:ea typeface="Arial"/>
+                <a:cs typeface="Arial"/>
+              </a:rPr>
+              <a:t>MTDH   Septiembre 2026   Nacional - 24 provincias y zona en estudio</a:t>
+            </a:r>
+          </a:p>
+        </p:txBody>
+      </p:sp>
+      <p:sp>
+        <p:nvSpPr>
+          <p:cNvPr id="4" name="page">
+            <a:extLst xmlns:a="http://schemas.openxmlformats.org/drawingml/2006/main">
+              <a:ext uri="{FF2B5EF4-FFF2-40B4-BE49-F238E27FC236}">
+                <a16:creationId xmlns:a16="http://schemas.microsoft.com/office/drawing/2014/main" id="{DC718EE2-72E7-4B3D-89A0-0C0DC36BDCC8}"/>
+              </a:ext>
+            </a:extLst>
+          </p:cNvPr>
+          <p:cNvSpPr>
+            <a:spLocks xmlns:a="http://schemas.openxmlformats.org/drawingml/2006/main" noGrp="1"/>
+          </p:cNvSpPr>
+          <p:nvPr/>
+        </p:nvSpPr>
+        <p:spPr>
+          <a:xfrm xmlns:a="http://schemas.openxmlformats.org/drawingml/2006/main">
+            <a:off x="10953750" y="6457950"/>
+            <a:ext cx="552450" cy="190500"/>
+          </a:xfrm>
+          <a:prstGeom xmlns:a="http://schemas.openxmlformats.org/drawingml/2006/main" prst="rect">
+            <a:avLst/>
+          </a:prstGeom>
+          <a:noFill xmlns:a="http://schemas.openxmlformats.org/drawingml/2006/main"/>
+          <a:ln xmlns:a="http://schemas.openxmlformats.org/drawingml/2006/main" w="0">
+            <a:noFill/>
+            <a:prstDash val="solid"/>
+          </a:ln>
+        </p:spPr>
+        <p:txBody>
+          <a:bodyPr xmlns:a="http://schemas.openxmlformats.org/drawingml/2006/main" wrap="square" lIns="0" tIns="0" rIns="0" bIns="0">
+            <a:noAutofit/>
+          </a:bodyPr>
+          <a:lstStyle xmlns:a="http://schemas.openxmlformats.org/drawingml/2006/main">
+            <a:defPPr>
+              <a:defRPr sz="975" b="0">
+                <a:solidFill>
+                  <a:srgbClr val="777080"/>
+                </a:solidFill>
+                <a:latin typeface="Arial"/>
+                <a:ea typeface="Arial"/>
+                <a:cs typeface="Arial"/>
+              </a:defRPr>
+            </a:defPPr>
+            <a:lvl1pPr>
+              <a:defRPr sz="975" b="0">
+                <a:solidFill>
+                  <a:srgbClr val="777080"/>
+                </a:solidFill>
+                <a:latin typeface="Arial"/>
+                <a:ea typeface="Arial"/>
+                <a:cs typeface="Arial"/>
+              </a:defRPr>
+            </a:lvl1pPr>
+            <a:lvl2pPr>
+              <a:defRPr sz="975" b="0">
+                <a:solidFill>
+                  <a:srgbClr val="777080"/>
+                </a:solidFill>
+                <a:latin typeface="Arial"/>
+                <a:ea typeface="Arial"/>
+                <a:cs typeface="Arial"/>
+              </a:defRPr>
+            </a:lvl2pPr>
+            <a:lvl3pPr>
+              <a:defRPr sz="975" b="0">
+                <a:solidFill>
+                  <a:srgbClr val="777080"/>
+                </a:solidFill>
+                <a:latin typeface="Arial"/>
+                <a:ea typeface="Arial"/>
+                <a:cs typeface="Arial"/>
+              </a:defRPr>
+            </a:lvl3pPr>
+            <a:lvl4pPr>
+              <a:defRPr sz="975" b="0">
+                <a:solidFill>
+                  <a:srgbClr val="777080"/>
+                </a:solidFill>
+                <a:latin typeface="Arial"/>
+                <a:ea typeface="Arial"/>
+                <a:cs typeface="Arial"/>
+              </a:defRPr>
+            </a:lvl4pPr>
+            <a:lvl5pPr>
+              <a:defRPr sz="975" b="0">
+                <a:solidFill>
+                  <a:srgbClr val="777080"/>
+                </a:solidFill>
+                <a:latin typeface="Arial"/>
+                <a:ea typeface="Arial"/>
+                <a:cs typeface="Arial"/>
+              </a:defRPr>
+            </a:lvl5pPr>
+            <a:lvl6pPr>
+              <a:defRPr sz="975" b="0">
+                <a:solidFill>
+                  <a:srgbClr val="777080"/>
+                </a:solidFill>
+                <a:latin typeface="Arial"/>
+                <a:ea typeface="Arial"/>
+                <a:cs typeface="Arial"/>
+              </a:defRPr>
+            </a:lvl6pPr>
+            <a:lvl7pPr>
+              <a:defRPr sz="975" b="0">
+                <a:solidFill>
+                  <a:srgbClr val="777080"/>
+                </a:solidFill>
+                <a:latin typeface="Arial"/>
+                <a:ea typeface="Arial"/>
+                <a:cs typeface="Arial"/>
+              </a:defRPr>
+            </a:lvl7pPr>
+            <a:lvl8pPr>
+              <a:defRPr sz="975" b="0">
+                <a:solidFill>
+                  <a:srgbClr val="777080"/>
+                </a:solidFill>
+                <a:latin typeface="Arial"/>
+                <a:ea typeface="Arial"/>
+                <a:cs typeface="Arial"/>
+              </a:defRPr>
+            </a:lvl8pPr>
+            <a:lvl9pPr>
+              <a:defRPr sz="975" b="0">
+                <a:solidFill>
+                  <a:srgbClr val="777080"/>
+                </a:solidFill>
+                <a:latin typeface="Arial"/>
+                <a:ea typeface="Arial"/>
+                <a:cs typeface="Arial"/>
+              </a:defRPr>
+            </a:lvl9pPr>
+          </a:lstStyle>
+          <a:p xmlns:a="http://schemas.openxmlformats.org/drawingml/2006/main">
+            <a:pPr>
+              <a:defRPr sz="975" b="0">
+                <a:solidFill>
+                  <a:srgbClr val="777080"/>
+                </a:solidFill>
+                <a:latin typeface="Arial"/>
+                <a:ea typeface="Arial"/>
+                <a:cs typeface="Arial"/>
+              </a:defRPr>
+            </a:pPr>
+            <a:r>
+              <a:rPr sz="975" b="0">
+                <a:solidFill>
+                  <a:srgbClr val="777080"/>
+                </a:solidFill>
+                <a:latin typeface="Arial"/>
+                <a:ea typeface="Arial"/>
+                <a:cs typeface="Arial"/>
+              </a:rPr>
+              <a:t>02</a:t>
+            </a:r>
+          </a:p>
+        </p:txBody>
+      </p:sp>
+      <p:sp>
+        <p:nvSpPr>
+          <p:cNvPr id="5" name="method-head-1">
+            <a:extLst xmlns:a="http://schemas.openxmlformats.org/drawingml/2006/main">
+              <a:ext uri="{FF2B5EF4-FFF2-40B4-BE49-F238E27FC236}">
+                <a16:creationId xmlns:a16="http://schemas.microsoft.com/office/drawing/2014/main" id="{5F8AD009-F4F1-4681-B562-6D55F47093FF}"/>
+              </a:ext>
+            </a:extLst>
+          </p:cNvPr>
+          <p:cNvSpPr>
+            <a:spLocks xmlns:a="http://schemas.openxmlformats.org/drawingml/2006/main" noGrp="1"/>
+          </p:cNvSpPr>
+          <p:nvPr/>
+        </p:nvSpPr>
+        <p:spPr>
+          <a:xfrm xmlns:a="http://schemas.openxmlformats.org/drawingml/2006/main">
+            <a:off x="6560000" y="1640000"/>
+            <a:ext cx="4950000" cy="380000"/>
+          </a:xfrm>
+          <a:prstGeom xmlns:a="http://schemas.openxmlformats.org/drawingml/2006/main" prst="rect">
+            <a:avLst/>
+          </a:prstGeom>
+          <a:noFill xmlns:a="http://schemas.openxmlformats.org/drawingml/2006/main"/>
+          <a:ln xmlns:a="http://schemas.openxmlformats.org/drawingml/2006/main" w="0">
+            <a:noFill/>
+            <a:prstDash val="solid"/>
+          </a:ln>
+        </p:spPr>
+        <p:txBody>
+          <a:bodyPr xmlns:a="http://schemas.openxmlformats.org/drawingml/2006/main" wrap="square" lIns="0" tIns="0" rIns="0" bIns="0">
+            <a:noAutofit/>
+          </a:bodyPr>
+          <a:lstStyle xmlns:a="http://schemas.openxmlformats.org/drawingml/2006/main">
+            <a:defPPr>
+              <a:defRPr sz="1950" b="1">
+                <a:solidFill>
+                  <a:srgbClr val="512F8D"/>
+                </a:solidFill>
+                <a:latin typeface="Arial"/>
+                <a:ea typeface="Arial"/>
+                <a:cs typeface="Arial"/>
+              </a:defRPr>
+            </a:defPPr>
+            <a:lvl1pPr>
+              <a:defRPr sz="1950" b="1">
+                <a:solidFill>
+                  <a:srgbClr val="512F8D"/>
+                </a:solidFill>
+                <a:latin typeface="Arial"/>
+                <a:ea typeface="Arial"/>
+                <a:cs typeface="Arial"/>
+              </a:defRPr>
+            </a:lvl1pPr>
+            <a:lvl2pPr>
+              <a:defRPr sz="1950" b="1">
+                <a:solidFill>
+                  <a:srgbClr val="512F8D"/>
+                </a:solidFill>
+                <a:latin typeface="Arial"/>
+                <a:ea typeface="Arial"/>
+                <a:cs typeface="Arial"/>
+              </a:defRPr>
+            </a:lvl2pPr>
+            <a:lvl3pPr>
+              <a:defRPr sz="1950" b="1">
+                <a:solidFill>
+                  <a:srgbClr val="512F8D"/>
+                </a:solidFill>
+                <a:latin typeface="Arial"/>
+                <a:ea typeface="Arial"/>
+                <a:cs typeface="Arial"/>
+              </a:defRPr>
+            </a:lvl3pPr>
+            <a:lvl4pPr>
+              <a:defRPr sz="1950" b="1">
+                <a:solidFill>
+                  <a:srgbClr val="512F8D"/>
+                </a:solidFill>
+                <a:latin typeface="Arial"/>
+                <a:ea typeface="Arial"/>
+                <a:cs typeface="Arial"/>
+              </a:defRPr>
+            </a:lvl4pPr>
+            <a:lvl5pPr>
+              <a:defRPr sz="1950" b="1">
+                <a:solidFill>
+                  <a:srgbClr val="512F8D"/>
+                </a:solidFill>
+                <a:latin typeface="Arial"/>
+                <a:ea typeface="Arial"/>
+                <a:cs typeface="Arial"/>
+              </a:defRPr>
+            </a:lvl5pPr>
+            <a:lvl6pPr>
+              <a:defRPr sz="1950" b="1">
+                <a:solidFill>
+                  <a:srgbClr val="512F8D"/>
+                </a:solidFill>
+                <a:latin typeface="Arial"/>
+                <a:ea typeface="Arial"/>
+                <a:cs typeface="Arial"/>
+              </a:defRPr>
+            </a:lvl6pPr>
+            <a:lvl7pPr>
+              <a:defRPr sz="1950" b="1">
+                <a:solidFill>
+                  <a:srgbClr val="512F8D"/>
+                </a:solidFill>
+                <a:latin typeface="Arial"/>
+                <a:ea typeface="Arial"/>
+                <a:cs typeface="Arial"/>
+              </a:defRPr>
+            </a:lvl7pPr>
+            <a:lvl8pPr>
+              <a:defRPr sz="1950" b="1">
+                <a:solidFill>
+                  <a:srgbClr val="512F8D"/>
+                </a:solidFill>
+                <a:latin typeface="Arial"/>
+                <a:ea typeface="Arial"/>
+                <a:cs typeface="Arial"/>
+              </a:defRPr>
+            </a:lvl8pPr>
+            <a:lvl9pPr>
+              <a:defRPr sz="1950" b="1">
+                <a:solidFill>
+                  <a:srgbClr val="512F8D"/>
+                </a:solidFill>
+                <a:latin typeface="Arial"/>
+                <a:ea typeface="Arial"/>
+                <a:cs typeface="Arial"/>
+              </a:defRPr>
+            </a:lvl9pPr>
+          </a:lstStyle>
+          <a:p xmlns:a="http://schemas.openxmlformats.org/drawingml/2006/main">
+            <a:pPr>
+              <a:defRPr sz="1950" b="1">
+                <a:solidFill>
+                  <a:srgbClr val="512F8D"/>
+                </a:solidFill>
+                <a:latin typeface="Arial"/>
+                <a:ea typeface="Arial"/>
+                <a:cs typeface="Arial"/>
+              </a:defRPr>
+            </a:pPr>
+            <a:r>
+              <a:rPr sz="1950" b="1">
+                <a:solidFill>
+                  <a:srgbClr val="512F8D"/>
+                </a:solidFill>
+                <a:latin typeface="Arial"/>
+                <a:ea typeface="Arial"/>
+                <a:cs typeface="Arial"/>
+              </a:rPr>
+              <a:t>Provincias con mayor cobertura</a:t>
+            </a:r>
+          </a:p>
+        </p:txBody>
+      </p:sp>
+      <p:sp>
+        <p:nvSpPr>
+          <p:cNvPr id="6" name="method-body-1">
+            <a:extLst xmlns:a="http://schemas.openxmlformats.org/drawingml/2006/main">
+              <a:ext uri="{FF2B5EF4-FFF2-40B4-BE49-F238E27FC236}">
+                <a16:creationId xmlns:a16="http://schemas.microsoft.com/office/drawing/2014/main" id="{1660426F-EDEF-4AF7-A845-8FD90D190E4F}"/>
+              </a:ext>
+            </a:extLst>
+          </p:cNvPr>
+          <p:cNvSpPr>
+            <a:spLocks xmlns:a="http://schemas.openxmlformats.org/drawingml/2006/main" noGrp="1"/>
+          </p:cNvSpPr>
+          <p:nvPr/>
+        </p:nvSpPr>
+        <p:spPr>
+          <a:xfrm xmlns:a="http://schemas.openxmlformats.org/drawingml/2006/main">
+            <a:off x="6560000" y="2040000"/>
+            <a:ext cx="4950000" cy="2700000"/>
+          </a:xfrm>
+          <a:prstGeom xmlns:a="http://schemas.openxmlformats.org/drawingml/2006/main" prst="rect">
+            <a:avLst/>
+          </a:prstGeom>
+          <a:noFill xmlns:a="http://schemas.openxmlformats.org/drawingml/2006/main"/>
+          <a:ln xmlns:a="http://schemas.openxmlformats.org/drawingml/2006/main" w="0">
+            <a:noFill/>
+            <a:prstDash val="solid"/>
+          </a:ln>
+        </p:spPr>
+        <p:txBody>
+          <a:bodyPr xmlns:a="http://schemas.openxmlformats.org/drawingml/2006/main" wrap="square" lIns="0" tIns="0" rIns="0" bIns="0">
+            <a:noAutofit/>
+          </a:bodyPr>
+          <a:lstStyle xmlns:a="http://schemas.openxmlformats.org/drawingml/2006/main">
+            <a:defPPr>
+              <a:defRPr sz="1500" b="0">
+                <a:solidFill>
+                  <a:srgbClr val="20202B"/>
+                </a:solidFill>
+                <a:latin typeface="Arial"/>
+                <a:ea typeface="Arial"/>
+                <a:cs typeface="Arial"/>
+              </a:defRPr>
+            </a:defPPr>
+            <a:lvl1pPr>
+              <a:defRPr sz="1500" b="0">
+                <a:solidFill>
+                  <a:srgbClr val="20202B"/>
+                </a:solidFill>
+                <a:latin typeface="Arial"/>
+                <a:ea typeface="Arial"/>
+                <a:cs typeface="Arial"/>
+              </a:defRPr>
+            </a:lvl1pPr>
+            <a:lvl2pPr>
+              <a:defRPr sz="1500" b="0">
+                <a:solidFill>
+                  <a:srgbClr val="20202B"/>
+                </a:solidFill>
+                <a:latin typeface="Arial"/>
+                <a:ea typeface="Arial"/>
+                <a:cs typeface="Arial"/>
+              </a:defRPr>
+            </a:lvl2pPr>
+            <a:lvl3pPr>
+              <a:defRPr sz="1500" b="0">
+                <a:solidFill>
+                  <a:srgbClr val="20202B"/>
+                </a:solidFill>
+                <a:latin typeface="Arial"/>
+                <a:ea typeface="Arial"/>
+                <a:cs typeface="Arial"/>
+              </a:defRPr>
+            </a:lvl3pPr>
+            <a:lvl4pPr>
+              <a:defRPr sz="1500" b="0">
+                <a:solidFill>
+                  <a:srgbClr val="20202B"/>
+                </a:solidFill>
+                <a:latin typeface="Arial"/>
+                <a:ea typeface="Arial"/>
+                <a:cs typeface="Arial"/>
+              </a:defRPr>
+            </a:lvl4pPr>
+            <a:lvl5pPr>
+              <a:defRPr sz="1500" b="0">
+                <a:solidFill>
+                  <a:srgbClr val="20202B"/>
+                </a:solidFill>
+                <a:latin typeface="Arial"/>
+                <a:ea typeface="Arial"/>
+                <a:cs typeface="Arial"/>
+              </a:defRPr>
+            </a:lvl5pPr>
+            <a:lvl6pPr>
+              <a:defRPr sz="1500" b="0">
+                <a:solidFill>
+                  <a:srgbClr val="20202B"/>
+                </a:solidFill>
+                <a:latin typeface="Arial"/>
+                <a:ea typeface="Arial"/>
+                <a:cs typeface="Arial"/>
+              </a:defRPr>
+            </a:lvl6pPr>
+            <a:lvl7pPr>
+              <a:defRPr sz="1500" b="0">
+                <a:solidFill>
+                  <a:srgbClr val="20202B"/>
+                </a:solidFill>
+                <a:latin typeface="Arial"/>
+                <a:ea typeface="Arial"/>
+                <a:cs typeface="Arial"/>
+              </a:defRPr>
+            </a:lvl7pPr>
+            <a:lvl8pPr>
+              <a:defRPr sz="1500" b="0">
+                <a:solidFill>
+                  <a:srgbClr val="20202B"/>
+                </a:solidFill>
+                <a:latin typeface="Arial"/>
+                <a:ea typeface="Arial"/>
+                <a:cs typeface="Arial"/>
+              </a:defRPr>
+            </a:lvl8pPr>
+            <a:lvl9pPr>
+              <a:defRPr sz="1500" b="0">
+                <a:solidFill>
+                  <a:srgbClr val="20202B"/>
+                </a:solidFill>
+                <a:latin typeface="Arial"/>
+                <a:ea typeface="Arial"/>
+                <a:cs typeface="Arial"/>
+              </a:defRPr>
+            </a:lvl9pPr>
+          </a:lstStyle>
+          <a:p xmlns:a="http://schemas.openxmlformats.org/drawingml/2006/main">
+            <a:pPr>
+              <a:defRPr sz="1500" b="0">
+                <a:solidFill>
+                  <a:srgbClr val="20202B"/>
+                </a:solidFill>
+                <a:latin typeface="Arial"/>
+                <a:ea typeface="Arial"/>
+                <a:cs typeface="Arial"/>
+              </a:defRPr>
+            </a:pPr>
+            <a:r>
+              <a:rPr sz="1500" b="0">
+                <a:solidFill>
+                  <a:srgbClr val="20202B"/>
+                </a:solidFill>
+                <a:latin typeface="Arial"/>
+                <a:ea typeface="Arial"/>
+                <a:cs typeface="Arial"/>
+              </a:rPr>
+              <a:t>1.  Guayas: 400.208 (19,7 %)
+2.  Manabí: 271.948 (13,4 %)
+3.  Los Ríos: 151.682 (7,5 %)
+4.  Pichincha: 140.718 (6,9 %)
+5.  Esmeraldas: 127.412 (6,3 %)
+6.  Chimborazo: 88.251 (4,3 %)
+7.  Loja: 84.300 (4,1 %)
+8.  Cotopaxi: 82.242 (4,0 %)</a:t>
+            </a:r>
+          </a:p>
+        </p:txBody>
+      </p:sp>
+      <p:sp>
+        <p:nvSpPr>
+          <p:cNvPr id="7" name="method-head-2">
+            <a:extLst xmlns:a="http://schemas.openxmlformats.org/drawingml/2006/main">
+              <a:ext uri="{FF2B5EF4-FFF2-40B4-BE49-F238E27FC236}">
+                <a16:creationId xmlns:a16="http://schemas.microsoft.com/office/drawing/2014/main" id="{1080B6DF-38E8-4480-BA34-DF1DD6B37BC7}"/>
+              </a:ext>
+            </a:extLst>
+          </p:cNvPr>
+          <p:cNvSpPr>
+            <a:spLocks xmlns:a="http://schemas.openxmlformats.org/drawingml/2006/main" noGrp="1"/>
+          </p:cNvSpPr>
+          <p:nvPr/>
+        </p:nvSpPr>
+        <p:spPr>
+          <a:xfrm xmlns:a="http://schemas.openxmlformats.org/drawingml/2006/main">
+            <a:off x="6560000" y="4880000"/>
+            <a:ext cx="4950000" cy="380000"/>
+          </a:xfrm>
+          <a:prstGeom xmlns:a="http://schemas.openxmlformats.org/drawingml/2006/main" prst="rect">
+            <a:avLst/>
+          </a:prstGeom>
+          <a:noFill xmlns:a="http://schemas.openxmlformats.org/drawingml/2006/main"/>
+          <a:ln xmlns:a="http://schemas.openxmlformats.org/drawingml/2006/main" w="0">
+            <a:noFill/>
+            <a:prstDash val="solid"/>
+          </a:ln>
+        </p:spPr>
+        <p:txBody>
+          <a:bodyPr xmlns:a="http://schemas.openxmlformats.org/drawingml/2006/main" wrap="square" lIns="0" tIns="0" rIns="0" bIns="0">
+            <a:noAutofit/>
+          </a:bodyPr>
+          <a:lstStyle xmlns:a="http://schemas.openxmlformats.org/drawingml/2006/main">
+            <a:defPPr>
+              <a:defRPr sz="1950" b="1">
+                <a:solidFill>
+                  <a:srgbClr val="512F8D"/>
+                </a:solidFill>
+                <a:latin typeface="Arial"/>
+                <a:ea typeface="Arial"/>
+                <a:cs typeface="Arial"/>
+              </a:defRPr>
+            </a:defPPr>
+            <a:lvl1pPr>
+              <a:defRPr sz="1950" b="1">
+                <a:solidFill>
+                  <a:srgbClr val="512F8D"/>
+                </a:solidFill>
+                <a:latin typeface="Arial"/>
+                <a:ea typeface="Arial"/>
+                <a:cs typeface="Arial"/>
+              </a:defRPr>
+            </a:lvl1pPr>
+            <a:lvl2pPr>
+              <a:defRPr sz="1950" b="1">
+                <a:solidFill>
+                  <a:srgbClr val="512F8D"/>
+                </a:solidFill>
+                <a:latin typeface="Arial"/>
+                <a:ea typeface="Arial"/>
+                <a:cs typeface="Arial"/>
+              </a:defRPr>
+            </a:lvl2pPr>
+            <a:lvl3pPr>
+              <a:defRPr sz="1950" b="1">
+                <a:solidFill>
+                  <a:srgbClr val="512F8D"/>
+                </a:solidFill>
+                <a:latin typeface="Arial"/>
+                <a:ea typeface="Arial"/>
+                <a:cs typeface="Arial"/>
+              </a:defRPr>
+            </a:lvl3pPr>
+            <a:lvl4pPr>
+              <a:defRPr sz="1950" b="1">
+                <a:solidFill>
+                  <a:srgbClr val="512F8D"/>
+                </a:solidFill>
+                <a:latin typeface="Arial"/>
+                <a:ea typeface="Arial"/>
+                <a:cs typeface="Arial"/>
+              </a:defRPr>
+            </a:lvl4pPr>
+            <a:lvl5pPr>
+              <a:defRPr sz="1950" b="1">
+                <a:solidFill>
+                  <a:srgbClr val="512F8D"/>
+                </a:solidFill>
+                <a:latin typeface="Arial"/>
+                <a:ea typeface="Arial"/>
+                <a:cs typeface="Arial"/>
+              </a:defRPr>
+            </a:lvl5pPr>
+            <a:lvl6pPr>
+              <a:defRPr sz="1950" b="1">
+                <a:solidFill>
+                  <a:srgbClr val="512F8D"/>
+                </a:solidFill>
+                <a:latin typeface="Arial"/>
+                <a:ea typeface="Arial"/>
+                <a:cs typeface="Arial"/>
+              </a:defRPr>
+            </a:lvl6pPr>
+            <a:lvl7pPr>
+              <a:defRPr sz="1950" b="1">
+                <a:solidFill>
+                  <a:srgbClr val="512F8D"/>
+                </a:solidFill>
+                <a:latin typeface="Arial"/>
+                <a:ea typeface="Arial"/>
+                <a:cs typeface="Arial"/>
+              </a:defRPr>
+            </a:lvl7pPr>
+            <a:lvl8pPr>
+              <a:defRPr sz="1950" b="1">
+                <a:solidFill>
+                  <a:srgbClr val="512F8D"/>
+                </a:solidFill>
+                <a:latin typeface="Arial"/>
+                <a:ea typeface="Arial"/>
+                <a:cs typeface="Arial"/>
+              </a:defRPr>
+            </a:lvl8pPr>
+            <a:lvl9pPr>
+              <a:defRPr sz="1950" b="1">
+                <a:solidFill>
+                  <a:srgbClr val="512F8D"/>
+                </a:solidFill>
+                <a:latin typeface="Arial"/>
+                <a:ea typeface="Arial"/>
+                <a:cs typeface="Arial"/>
+              </a:defRPr>
+            </a:lvl9pPr>
+          </a:lstStyle>
+          <a:p xmlns:a="http://schemas.openxmlformats.org/drawingml/2006/main">
+            <a:pPr>
+              <a:defRPr sz="1950" b="1">
+                <a:solidFill>
+                  <a:srgbClr val="512F8D"/>
+                </a:solidFill>
+                <a:latin typeface="Arial"/>
+                <a:ea typeface="Arial"/>
+                <a:cs typeface="Arial"/>
+              </a:defRPr>
+            </a:pPr>
+            <a:r>
+              <a:rPr sz="1950" b="1">
+                <a:solidFill>
+                  <a:srgbClr val="512F8D"/>
+                </a:solidFill>
+                <a:latin typeface="Arial"/>
+                <a:ea typeface="Arial"/>
+                <a:cs typeface="Arial"/>
+              </a:rPr>
+              <a:t>Lectura territorial</a:t>
+            </a:r>
+          </a:p>
+        </p:txBody>
+      </p:sp>
+      <p:sp>
+        <p:nvSpPr>
+          <p:cNvPr id="8" name="method-body-2">
+            <a:extLst xmlns:a="http://schemas.openxmlformats.org/drawingml/2006/main">
+              <a:ext uri="{FF2B5EF4-FFF2-40B4-BE49-F238E27FC236}">
+                <a16:creationId xmlns:a16="http://schemas.microsoft.com/office/drawing/2014/main" id="{9028004D-0C9E-47A3-962F-A6837C5BCCBB}"/>
+              </a:ext>
+            </a:extLst>
+          </p:cNvPr>
+          <p:cNvSpPr>
+            <a:spLocks xmlns:a="http://schemas.openxmlformats.org/drawingml/2006/main" noGrp="1"/>
+          </p:cNvSpPr>
+          <p:nvPr/>
+        </p:nvSpPr>
+        <p:spPr>
+          <a:xfrm xmlns:a="http://schemas.openxmlformats.org/drawingml/2006/main">
+            <a:off x="6560000" y="5260000"/>
+            <a:ext cx="4950000" cy="900000"/>
+          </a:xfrm>
+          <a:prstGeom xmlns:a="http://schemas.openxmlformats.org/drawingml/2006/main" prst="rect">
+            <a:avLst/>
+          </a:prstGeom>
+          <a:noFill xmlns:a="http://schemas.openxmlformats.org/drawingml/2006/main"/>
+          <a:ln xmlns:a="http://schemas.openxmlformats.org/drawingml/2006/main" w="0">
+            <a:noFill/>
+            <a:prstDash val="solid"/>
+          </a:ln>
+        </p:spPr>
+        <p:txBody>
+          <a:bodyPr xmlns:a="http://schemas.openxmlformats.org/drawingml/2006/main" wrap="square" lIns="0" tIns="0" rIns="0" bIns="0">
+            <a:noAutofit/>
+          </a:bodyPr>
+          <a:lstStyle xmlns:a="http://schemas.openxmlformats.org/drawingml/2006/main">
+            <a:defPPr>
+              <a:defRPr sz="1500" b="0">
+                <a:solidFill>
+                  <a:srgbClr val="20202B"/>
+                </a:solidFill>
+                <a:latin typeface="Arial"/>
+                <a:ea typeface="Arial"/>
+                <a:cs typeface="Arial"/>
+              </a:defRPr>
+            </a:defPPr>
+            <a:lvl1pPr>
+              <a:defRPr sz="1500" b="0">
+                <a:solidFill>
+                  <a:srgbClr val="20202B"/>
+                </a:solidFill>
+                <a:latin typeface="Arial"/>
+                <a:ea typeface="Arial"/>
+                <a:cs typeface="Arial"/>
+              </a:defRPr>
+            </a:lvl1pPr>
+            <a:lvl2pPr>
+              <a:defRPr sz="1500" b="0">
+                <a:solidFill>
+                  <a:srgbClr val="20202B"/>
+                </a:solidFill>
+                <a:latin typeface="Arial"/>
+                <a:ea typeface="Arial"/>
+                <a:cs typeface="Arial"/>
+              </a:defRPr>
+            </a:lvl2pPr>
+            <a:lvl3pPr>
+              <a:defRPr sz="1500" b="0">
+                <a:solidFill>
+                  <a:srgbClr val="20202B"/>
+                </a:solidFill>
+                <a:latin typeface="Arial"/>
+                <a:ea typeface="Arial"/>
+                <a:cs typeface="Arial"/>
+              </a:defRPr>
+            </a:lvl3pPr>
+            <a:lvl4pPr>
+              <a:defRPr sz="1500" b="0">
+                <a:solidFill>
+                  <a:srgbClr val="20202B"/>
+                </a:solidFill>
+                <a:latin typeface="Arial"/>
+                <a:ea typeface="Arial"/>
+                <a:cs typeface="Arial"/>
+              </a:defRPr>
+            </a:lvl4pPr>
+            <a:lvl5pPr>
+              <a:defRPr sz="1500" b="0">
+                <a:solidFill>
+                  <a:srgbClr val="20202B"/>
+                </a:solidFill>
+                <a:latin typeface="Arial"/>
+                <a:ea typeface="Arial"/>
+                <a:cs typeface="Arial"/>
+              </a:defRPr>
+            </a:lvl5pPr>
+            <a:lvl6pPr>
+              <a:defRPr sz="1500" b="0">
+                <a:solidFill>
+                  <a:srgbClr val="20202B"/>
+                </a:solidFill>
+                <a:latin typeface="Arial"/>
+                <a:ea typeface="Arial"/>
+                <a:cs typeface="Arial"/>
+              </a:defRPr>
+            </a:lvl6pPr>
+            <a:lvl7pPr>
+              <a:defRPr sz="1500" b="0">
+                <a:solidFill>
+                  <a:srgbClr val="20202B"/>
+                </a:solidFill>
+                <a:latin typeface="Arial"/>
+                <a:ea typeface="Arial"/>
+                <a:cs typeface="Arial"/>
+              </a:defRPr>
+            </a:lvl7pPr>
+            <a:lvl8pPr>
+              <a:defRPr sz="1500" b="0">
+                <a:solidFill>
+                  <a:srgbClr val="20202B"/>
+                </a:solidFill>
+                <a:latin typeface="Arial"/>
+                <a:ea typeface="Arial"/>
+                <a:cs typeface="Arial"/>
+              </a:defRPr>
+            </a:lvl8pPr>
+            <a:lvl9pPr>
+              <a:defRPr sz="1500" b="0">
+                <a:solidFill>
+                  <a:srgbClr val="20202B"/>
+                </a:solidFill>
+                <a:latin typeface="Arial"/>
+                <a:ea typeface="Arial"/>
+                <a:cs typeface="Arial"/>
+              </a:defRPr>
+            </a:lvl9pPr>
+          </a:lstStyle>
+          <a:p xmlns:a="http://schemas.openxmlformats.org/drawingml/2006/main">
+            <a:pPr>
+              <a:defRPr sz="1500" b="0">
+                <a:solidFill>
+                  <a:srgbClr val="20202B"/>
+                </a:solidFill>
+                <a:latin typeface="Arial"/>
+                <a:ea typeface="Arial"/>
+                <a:cs typeface="Arial"/>
+              </a:defRPr>
+            </a:pPr>
+            <a:r>
+              <a:rPr sz="1500" b="0">
+                <a:solidFill>
+                  <a:srgbClr val="20202B"/>
+                </a:solidFill>
+                <a:latin typeface="Arial"/>
+                <a:ea typeface="Arial"/>
+                <a:cs typeface="Arial"/>
+              </a:rPr>
+              <a:t>Guayas, Manabí y Los Ríos concentran el 40,5 % de la cobertura reportada de la selección.</a:t>
+            </a:r>
+          </a:p>
+        </p:txBody>
+      </p:sp>
+      <p:sp>
+        <p:nvSpPr>
+          <p:cNvPr id="9" name="method-head-3">
+            <a:extLst xmlns:a="http://schemas.openxmlformats.org/drawingml/2006/main">
+              <a:ext uri="{FF2B5EF4-FFF2-40B4-BE49-F238E27FC236}">
+                <a16:creationId xmlns:a16="http://schemas.microsoft.com/office/drawing/2014/main" id="{37A8A915-7ECB-4133-9C46-A14F769A2AA9}"/>
+              </a:ext>
+            </a:extLst>
+          </p:cNvPr>
+          <p:cNvSpPr>
+            <a:spLocks xmlns:a="http://schemas.openxmlformats.org/drawingml/2006/main" noGrp="1"/>
+          </p:cNvSpPr>
+          <p:nvPr/>
+        </p:nvSpPr>
+        <p:spPr>
+          <a:xfrm xmlns:a="http://schemas.openxmlformats.org/drawingml/2006/main">
+            <a:off x="6560000" y="6200000"/>
+            <a:ext cx="4950000" cy="10000"/>
+          </a:xfrm>
+          <a:prstGeom xmlns:a="http://schemas.openxmlformats.org/drawingml/2006/main" prst="rect">
+            <a:avLst/>
+          </a:prstGeom>
+          <a:noFill xmlns:a="http://schemas.openxmlformats.org/drawingml/2006/main"/>
+          <a:ln xmlns:a="http://schemas.openxmlformats.org/drawingml/2006/main" w="0">
+            <a:noFill/>
+            <a:prstDash val="solid"/>
+          </a:ln>
+        </p:spPr>
+        <p:txBody>
+          <a:bodyPr xmlns:a="http://schemas.openxmlformats.org/drawingml/2006/main" wrap="square" lIns="0" tIns="0" rIns="0" bIns="0">
+            <a:noAutofit/>
+          </a:bodyPr>
+          <a:lstStyle xmlns:a="http://schemas.openxmlformats.org/drawingml/2006/main">
+            <a:defPPr>
+              <a:defRPr sz="1950" b="1">
+                <a:solidFill>
+                  <a:srgbClr val="512F8D"/>
+                </a:solidFill>
+                <a:latin typeface="Arial"/>
+                <a:ea typeface="Arial"/>
+                <a:cs typeface="Arial"/>
+              </a:defRPr>
+            </a:defPPr>
+            <a:lvl1pPr>
+              <a:defRPr sz="1950" b="1">
+                <a:solidFill>
+                  <a:srgbClr val="512F8D"/>
+                </a:solidFill>
+                <a:latin typeface="Arial"/>
+                <a:ea typeface="Arial"/>
+                <a:cs typeface="Arial"/>
+              </a:defRPr>
+            </a:lvl1pPr>
+            <a:lvl2pPr>
+              <a:defRPr sz="1950" b="1">
+                <a:solidFill>
+                  <a:srgbClr val="512F8D"/>
+                </a:solidFill>
+                <a:latin typeface="Arial"/>
+                <a:ea typeface="Arial"/>
+                <a:cs typeface="Arial"/>
+              </a:defRPr>
+            </a:lvl2pPr>
+            <a:lvl3pPr>
+              <a:defRPr sz="1950" b="1">
+                <a:solidFill>
+                  <a:srgbClr val="512F8D"/>
+                </a:solidFill>
+                <a:latin typeface="Arial"/>
+                <a:ea typeface="Arial"/>
+                <a:cs typeface="Arial"/>
+              </a:defRPr>
+            </a:lvl3pPr>
+            <a:lvl4pPr>
+              <a:defRPr sz="1950" b="1">
+                <a:solidFill>
+                  <a:srgbClr val="512F8D"/>
+                </a:solidFill>
+                <a:latin typeface="Arial"/>
+                <a:ea typeface="Arial"/>
+                <a:cs typeface="Arial"/>
+              </a:defRPr>
+            </a:lvl4pPr>
+            <a:lvl5pPr>
+              <a:defRPr sz="1950" b="1">
+                <a:solidFill>
+                  <a:srgbClr val="512F8D"/>
+                </a:solidFill>
+                <a:latin typeface="Arial"/>
+                <a:ea typeface="Arial"/>
+                <a:cs typeface="Arial"/>
+              </a:defRPr>
+            </a:lvl5pPr>
+            <a:lvl6pPr>
+              <a:defRPr sz="1950" b="1">
+                <a:solidFill>
+                  <a:srgbClr val="512F8D"/>
+                </a:solidFill>
+                <a:latin typeface="Arial"/>
+                <a:ea typeface="Arial"/>
+                <a:cs typeface="Arial"/>
+              </a:defRPr>
+            </a:lvl6pPr>
+            <a:lvl7pPr>
+              <a:defRPr sz="1950" b="1">
+                <a:solidFill>
+                  <a:srgbClr val="512F8D"/>
+                </a:solidFill>
+                <a:latin typeface="Arial"/>
+                <a:ea typeface="Arial"/>
+                <a:cs typeface="Arial"/>
+              </a:defRPr>
+            </a:lvl7pPr>
+            <a:lvl8pPr>
+              <a:defRPr sz="1950" b="1">
+                <a:solidFill>
+                  <a:srgbClr val="512F8D"/>
+                </a:solidFill>
+                <a:latin typeface="Arial"/>
+                <a:ea typeface="Arial"/>
+                <a:cs typeface="Arial"/>
+              </a:defRPr>
+            </a:lvl8pPr>
+            <a:lvl9pPr>
+              <a:defRPr sz="1950" b="1">
+                <a:solidFill>
+                  <a:srgbClr val="512F8D"/>
+                </a:solidFill>
+                <a:latin typeface="Arial"/>
+                <a:ea typeface="Arial"/>
+                <a:cs typeface="Arial"/>
+              </a:defRPr>
+            </a:lvl9pPr>
+          </a:lstStyle>
+          <a:p xmlns:a="http://schemas.openxmlformats.org/drawingml/2006/main">
+            <a:pPr>
+              <a:defRPr sz="1950" b="1">
+                <a:solidFill>
+                  <a:srgbClr val="512F8D"/>
+                </a:solidFill>
+                <a:latin typeface="Arial"/>
+                <a:ea typeface="Arial"/>
+                <a:cs typeface="Arial"/>
+              </a:defRPr>
+            </a:pPr>
+            <a:r>
+              <a:rPr sz="1950" b="1">
+                <a:solidFill>
+                  <a:srgbClr val="512F8D"/>
+                </a:solidFill>
+                <a:latin typeface="Arial"/>
+                <a:ea typeface="Arial"/>
+                <a:cs typeface="Arial"/>
+              </a:rPr>
+              <a:t/>
+            </a:r>
+          </a:p>
+        </p:txBody>
+      </p:sp>
+      <p:sp>
+        <p:nvSpPr>
+          <p:cNvPr id="10" name="method-body-3">
+            <a:extLst xmlns:a="http://schemas.openxmlformats.org/drawingml/2006/main">
+              <a:ext uri="{FF2B5EF4-FFF2-40B4-BE49-F238E27FC236}">
+                <a16:creationId xmlns:a16="http://schemas.microsoft.com/office/drawing/2014/main" id="{901EA0C3-125D-4A64-9AF6-4784152DE1B0}"/>
+              </a:ext>
+            </a:extLst>
+          </p:cNvPr>
+          <p:cNvSpPr>
+            <a:spLocks xmlns:a="http://schemas.openxmlformats.org/drawingml/2006/main" noGrp="1"/>
+          </p:cNvSpPr>
+          <p:nvPr/>
+        </p:nvSpPr>
+        <p:spPr>
+          <a:xfrm xmlns:a="http://schemas.openxmlformats.org/drawingml/2006/main">
+            <a:off x="6560000" y="6210000"/>
+            <a:ext cx="4950000" cy="10000"/>
+          </a:xfrm>
+          <a:prstGeom xmlns:a="http://schemas.openxmlformats.org/drawingml/2006/main" prst="rect">
+            <a:avLst/>
+          </a:prstGeom>
+          <a:noFill xmlns:a="http://schemas.openxmlformats.org/drawingml/2006/main"/>
+          <a:ln xmlns:a="http://schemas.openxmlformats.org/drawingml/2006/main" w="0">
+            <a:noFill/>
+            <a:prstDash val="solid"/>
+          </a:ln>
+        </p:spPr>
+        <p:txBody>
+          <a:bodyPr xmlns:a="http://schemas.openxmlformats.org/drawingml/2006/main" wrap="square" lIns="0" tIns="0" rIns="0" bIns="0">
+            <a:noAutofit/>
+          </a:bodyPr>
+          <a:lstStyle xmlns:a="http://schemas.openxmlformats.org/drawingml/2006/main">
+            <a:defPPr>
+              <a:defRPr sz="1800" b="0">
+                <a:solidFill>
+                  <a:srgbClr val="20202B"/>
+                </a:solidFill>
+                <a:latin typeface="Arial"/>
+                <a:ea typeface="Arial"/>
+                <a:cs typeface="Arial"/>
+              </a:defRPr>
+            </a:defPPr>
+            <a:lvl1pPr>
+              <a:defRPr sz="1800" b="0">
+                <a:solidFill>
+                  <a:srgbClr val="20202B"/>
+                </a:solidFill>
+                <a:latin typeface="Arial"/>
+                <a:ea typeface="Arial"/>
+                <a:cs typeface="Arial"/>
+              </a:defRPr>
+            </a:lvl1pPr>
+            <a:lvl2pPr>
+              <a:defRPr sz="1800" b="0">
+                <a:solidFill>
+                  <a:srgbClr val="20202B"/>
+                </a:solidFill>
+                <a:latin typeface="Arial"/>
+                <a:ea typeface="Arial"/>
+                <a:cs typeface="Arial"/>
+              </a:defRPr>
+            </a:lvl2pPr>
+            <a:lvl3pPr>
+              <a:defRPr sz="1800" b="0">
+                <a:solidFill>
+                  <a:srgbClr val="20202B"/>
+                </a:solidFill>
+                <a:latin typeface="Arial"/>
+                <a:ea typeface="Arial"/>
+                <a:cs typeface="Arial"/>
+              </a:defRPr>
+            </a:lvl3pPr>
+            <a:lvl4pPr>
+              <a:defRPr sz="1800" b="0">
+                <a:solidFill>
+                  <a:srgbClr val="20202B"/>
+                </a:solidFill>
+                <a:latin typeface="Arial"/>
+                <a:ea typeface="Arial"/>
+                <a:cs typeface="Arial"/>
+              </a:defRPr>
+            </a:lvl4pPr>
+            <a:lvl5pPr>
+              <a:defRPr sz="1800" b="0">
+                <a:solidFill>
+                  <a:srgbClr val="20202B"/>
+                </a:solidFill>
+                <a:latin typeface="Arial"/>
+                <a:ea typeface="Arial"/>
+                <a:cs typeface="Arial"/>
+              </a:defRPr>
+            </a:lvl5pPr>
+            <a:lvl6pPr>
+              <a:defRPr sz="1800" b="0">
+                <a:solidFill>
+                  <a:srgbClr val="20202B"/>
+                </a:solidFill>
+                <a:latin typeface="Arial"/>
+                <a:ea typeface="Arial"/>
+                <a:cs typeface="Arial"/>
+              </a:defRPr>
+            </a:lvl6pPr>
+            <a:lvl7pPr>
+              <a:defRPr sz="1800" b="0">
+                <a:solidFill>
+                  <a:srgbClr val="20202B"/>
+                </a:solidFill>
+                <a:latin typeface="Arial"/>
+                <a:ea typeface="Arial"/>
+                <a:cs typeface="Arial"/>
+              </a:defRPr>
+            </a:lvl7pPr>
+            <a:lvl8pPr>
+              <a:defRPr sz="1800" b="0">
+                <a:solidFill>
+                  <a:srgbClr val="20202B"/>
+                </a:solidFill>
+                <a:latin typeface="Arial"/>
+                <a:ea typeface="Arial"/>
+                <a:cs typeface="Arial"/>
+              </a:defRPr>
+            </a:lvl8pPr>
+            <a:lvl9pPr>
+              <a:defRPr sz="1800" b="0">
+                <a:solidFill>
+                  <a:srgbClr val="20202B"/>
+                </a:solidFill>
+                <a:latin typeface="Arial"/>
+                <a:ea typeface="Arial"/>
+                <a:cs typeface="Arial"/>
+              </a:defRPr>
+            </a:lvl9pPr>
+          </a:lstStyle>
+          <a:p xmlns:a="http://schemas.openxmlformats.org/drawingml/2006/main">
+            <a:pPr>
+              <a:defRPr sz="1800" b="0">
+                <a:solidFill>
+                  <a:srgbClr val="20202B"/>
+                </a:solidFill>
+                <a:latin typeface="Arial"/>
+                <a:ea typeface="Arial"/>
+                <a:cs typeface="Arial"/>
+              </a:defRPr>
+            </a:pPr>
+            <a:r>
+              <a:rPr sz="1800" b="0">
+                <a:solidFill>
+                  <a:srgbClr val="20202B"/>
+                </a:solidFill>
+                <a:latin typeface="Arial"/>
+                <a:ea typeface="Arial"/>
+                <a:cs typeface="Arial"/>
+              </a:rPr>
+              <a:t/>
+            </a:r>
+          </a:p>
+        </p:txBody>
+      </p:sp>
+      <p:pic>
+        <p:nvPicPr>
+          <p:cNvPr id="901" name="Mapa territorial" descr="Mapa coroplético de la cobertura reportada por provincia"/>
+          <p:cNvPicPr>
+            <ns0:picLocks xmlns:ns0="http://schemas.openxmlformats.org/drawingml/2006/main" noChangeAspect="1"/>
+          </p:cNvPicPr>
+          <p:nvPr/>
+        </p:nvPicPr>
+        <p:blipFill>
+          <ns1:blip xmlns:ns1="http://schemas.openxmlformats.org/drawingml/2006/main" xmlns:ns2="http://schemas.openxmlformats.org/officeDocument/2006/relationships" ns2:embed="rIdTerritoryMap"/>
+          <ns3:stretch xmlns:ns3="http://schemas.openxmlformats.org/drawingml/2006/main">
+            <ns3:fillRect/>
+          </ns3:stretch>
+        </p:blipFill>
+        <p:spPr>
+          <ns4:xfrm xmlns:ns4="http://schemas.openxmlformats.org/drawingml/2006/main">
+            <ns4:off x="560000" y="1560000"/>
+            <ns4:ext cx="5620000" cy="4770000"/>
+          </ns4:xfrm>
+          <ns5:prstGeom xmlns:ns5="http://schemas.openxmlformats.org/drawingml/2006/main" prst="rect">
+            <ns5:avLst/>
+          </ns5:prstGeom>
+        </p:spPr>
+      </p:pic>
+    </p:spTree>
+    <p:extLst>
+      <p:ext uri="{BB962C8B-B14F-4D97-AF65-F5344CB8AC3E}">
+        <p14:creationId xmlns:p14="http://schemas.microsoft.com/office/powerpoint/2010/main" val="2108744431"/>
+      </p:ext>
+    </p:extLst>
+  </p:cSld>
+</p:sld>
+</file>
+
+<file path=ppt/slides/slide3.xml><?xml version="1.0" encoding="utf-8"?>
 <p:sld xmlns:p="http://schemas.openxmlformats.org/presentationml/2006/main">
   <p:cSld>
     <p:bg>
@@ -7263,7 +10634,7 @@
                 <a:ea typeface="Arial"/>
                 <a:cs typeface="Arial"/>
               </a:rPr>
-              <a:t>02</a:t>
+              <a:t>03</a:t>
             </a:r>
           </a:p>
         </p:txBody>
@@ -8600,7 +11971,7 @@
 </p:sld>
 </file>
 
-<file path=ppt/slides/slide3.xml><?xml version="1.0" encoding="utf-8"?>
+<file path=ppt/slides/slide4.xml><?xml version="1.0" encoding="utf-8"?>
 <p:sld xmlns:p="http://schemas.openxmlformats.org/presentationml/2006/main">
   <p:cSld>
     <p:bg>
@@ -9250,7 +12621,7 @@
                 <a:ea typeface="Arial"/>
                 <a:cs typeface="Arial"/>
               </a:rPr>
-              <a:t>03</a:t>
+              <a:t>04</a:t>
             </a:r>
           </a:p>
         </p:txBody>
@@ -10687,7 +14058,7 @@
 </p:sld>
 </file>
 
-<file path=ppt/slides/slide4.xml><?xml version="1.0" encoding="utf-8"?>
+<file path=ppt/slides/slide5.xml><?xml version="1.0" encoding="utf-8"?>
 <p:sld xmlns:p="http://schemas.openxmlformats.org/presentationml/2006/main">
   <p:cSld>
     <p:bg>
@@ -11337,7 +14708,7 @@
                 <a:ea typeface="Arial"/>
                 <a:cs typeface="Arial"/>
               </a:rPr>
-              <a:t>04</a:t>
+              <a:t>05</a:t>
             </a:r>
           </a:p>
         </p:txBody>
@@ -12977,1993 +16348,6 @@
 </p:sld>
 </file>
 
-<file path=ppt/slides/slide5.xml><?xml version="1.0" encoding="utf-8"?>
-<p:sld xmlns:p="http://schemas.openxmlformats.org/presentationml/2006/main">
-  <p:cSld>
-    <p:bg>
-      <p:bgPr>
-        <a:solidFill xmlns:a="http://schemas.openxmlformats.org/drawingml/2006/main">
-          <a:srgbClr val="FFFFFF"/>
-        </a:solidFill>
-      </p:bgPr>
-    </p:bg>
-    <p:spTree>
-      <p:nvGrpSpPr>
-        <p:cNvPr id="1" name=""/>
-        <p:cNvGrpSpPr/>
-        <p:nvPr/>
-      </p:nvGrpSpPr>
-      <p:grpSpPr>
-        <a:xfrm xmlns:a="http://schemas.openxmlformats.org/drawingml/2006/main"/>
-      </p:grpSpPr>
-      <p:sp>
-        <p:nvSpPr>
-          <p:cNvPr id="15" name="eyebrow">
-            <a:extLst xmlns:a="http://schemas.openxmlformats.org/drawingml/2006/main">
-              <a:ext uri="{FF2B5EF4-FFF2-40B4-BE49-F238E27FC236}">
-                <a16:creationId xmlns:a16="http://schemas.microsoft.com/office/drawing/2014/main" id="{A2F39FF5-86E4-4158-9343-A95E1D71F4B9}"/>
-              </a:ext>
-            </a:extLst>
-          </p:cNvPr>
-          <p:cNvSpPr>
-            <a:spLocks xmlns:a="http://schemas.openxmlformats.org/drawingml/2006/main" noGrp="1"/>
-          </p:cNvSpPr>
-          <p:nvPr/>
-        </p:nvSpPr>
-        <p:spPr>
-          <a:xfrm xmlns:a="http://schemas.openxmlformats.org/drawingml/2006/main">
-            <a:off x="685800" y="361950"/>
-            <a:ext cx="6858000" cy="238125"/>
-          </a:xfrm>
-          <a:prstGeom xmlns:a="http://schemas.openxmlformats.org/drawingml/2006/main" prst="rect">
-            <a:avLst/>
-          </a:prstGeom>
-          <a:noFill xmlns:a="http://schemas.openxmlformats.org/drawingml/2006/main"/>
-          <a:ln xmlns:a="http://schemas.openxmlformats.org/drawingml/2006/main" w="0">
-            <a:noFill/>
-            <a:prstDash val="solid"/>
-          </a:ln>
-        </p:spPr>
-        <p:txBody>
-          <a:bodyPr xmlns:a="http://schemas.openxmlformats.org/drawingml/2006/main" wrap="square" lIns="0" tIns="0" rIns="0" bIns="0">
-            <a:noAutofit/>
-          </a:bodyPr>
-          <a:lstStyle xmlns:a="http://schemas.openxmlformats.org/drawingml/2006/main">
-            <a:defPPr>
-              <a:defRPr sz="1350" b="1">
-                <a:solidFill>
-                  <a:srgbClr val="512F8D"/>
-                </a:solidFill>
-                <a:latin typeface="Arial"/>
-                <a:ea typeface="Arial"/>
-                <a:cs typeface="Arial"/>
-              </a:defRPr>
-            </a:defPPr>
-            <a:lvl1pPr>
-              <a:defRPr sz="1350" b="1">
-                <a:solidFill>
-                  <a:srgbClr val="512F8D"/>
-                </a:solidFill>
-                <a:latin typeface="Arial"/>
-                <a:ea typeface="Arial"/>
-                <a:cs typeface="Arial"/>
-              </a:defRPr>
-            </a:lvl1pPr>
-            <a:lvl2pPr>
-              <a:defRPr sz="1350" b="1">
-                <a:solidFill>
-                  <a:srgbClr val="512F8D"/>
-                </a:solidFill>
-                <a:latin typeface="Arial"/>
-                <a:ea typeface="Arial"/>
-                <a:cs typeface="Arial"/>
-              </a:defRPr>
-            </a:lvl2pPr>
-            <a:lvl3pPr>
-              <a:defRPr sz="1350" b="1">
-                <a:solidFill>
-                  <a:srgbClr val="512F8D"/>
-                </a:solidFill>
-                <a:latin typeface="Arial"/>
-                <a:ea typeface="Arial"/>
-                <a:cs typeface="Arial"/>
-              </a:defRPr>
-            </a:lvl3pPr>
-            <a:lvl4pPr>
-              <a:defRPr sz="1350" b="1">
-                <a:solidFill>
-                  <a:srgbClr val="512F8D"/>
-                </a:solidFill>
-                <a:latin typeface="Arial"/>
-                <a:ea typeface="Arial"/>
-                <a:cs typeface="Arial"/>
-              </a:defRPr>
-            </a:lvl4pPr>
-            <a:lvl5pPr>
-              <a:defRPr sz="1350" b="1">
-                <a:solidFill>
-                  <a:srgbClr val="512F8D"/>
-                </a:solidFill>
-                <a:latin typeface="Arial"/>
-                <a:ea typeface="Arial"/>
-                <a:cs typeface="Arial"/>
-              </a:defRPr>
-            </a:lvl5pPr>
-            <a:lvl6pPr>
-              <a:defRPr sz="1350" b="1">
-                <a:solidFill>
-                  <a:srgbClr val="512F8D"/>
-                </a:solidFill>
-                <a:latin typeface="Arial"/>
-                <a:ea typeface="Arial"/>
-                <a:cs typeface="Arial"/>
-              </a:defRPr>
-            </a:lvl6pPr>
-            <a:lvl7pPr>
-              <a:defRPr sz="1350" b="1">
-                <a:solidFill>
-                  <a:srgbClr val="512F8D"/>
-                </a:solidFill>
-                <a:latin typeface="Arial"/>
-                <a:ea typeface="Arial"/>
-                <a:cs typeface="Arial"/>
-              </a:defRPr>
-            </a:lvl7pPr>
-            <a:lvl8pPr>
-              <a:defRPr sz="1350" b="1">
-                <a:solidFill>
-                  <a:srgbClr val="512F8D"/>
-                </a:solidFill>
-                <a:latin typeface="Arial"/>
-                <a:ea typeface="Arial"/>
-                <a:cs typeface="Arial"/>
-              </a:defRPr>
-            </a:lvl8pPr>
-            <a:lvl9pPr>
-              <a:defRPr sz="1350" b="1">
-                <a:solidFill>
-                  <a:srgbClr val="512F8D"/>
-                </a:solidFill>
-                <a:latin typeface="Arial"/>
-                <a:ea typeface="Arial"/>
-                <a:cs typeface="Arial"/>
-              </a:defRPr>
-            </a:lvl9pPr>
-          </a:lstStyle>
-          <a:p xmlns:a="http://schemas.openxmlformats.org/drawingml/2006/main">
-            <a:pPr>
-              <a:defRPr sz="1350" b="1">
-                <a:solidFill>
-                  <a:srgbClr val="512F8D"/>
-                </a:solidFill>
-                <a:latin typeface="Arial"/>
-                <a:ea typeface="Arial"/>
-                <a:cs typeface="Arial"/>
-              </a:defRPr>
-            </a:pPr>
-            <a:r>
-              <a:rPr sz="1350" b="1">
-                <a:solidFill>
-                  <a:srgbClr val="512F8D"/>
-                </a:solidFill>
-                <a:latin typeface="Arial"/>
-                <a:ea typeface="Arial"/>
-                <a:cs typeface="Arial"/>
-              </a:rPr>
-              <a:t>Septiembre 2026</a:t>
-            </a:r>
-          </a:p>
-        </p:txBody>
-      </p:sp>
-      <p:sp>
-        <p:nvSpPr>
-          <p:cNvPr id="2" name="title">
-            <a:extLst xmlns:a="http://schemas.openxmlformats.org/drawingml/2006/main">
-              <a:ext uri="{FF2B5EF4-FFF2-40B4-BE49-F238E27FC236}">
-                <a16:creationId xmlns:a16="http://schemas.microsoft.com/office/drawing/2014/main" id="{3E080AA5-C22D-42AD-B299-AAD89EFA7B7E}"/>
-              </a:ext>
-            </a:extLst>
-          </p:cNvPr>
-          <p:cNvSpPr>
-            <a:spLocks xmlns:a="http://schemas.openxmlformats.org/drawingml/2006/main" noGrp="1"/>
-          </p:cNvSpPr>
-          <p:nvPr/>
-        </p:nvSpPr>
-        <p:spPr>
-          <a:xfrm xmlns:a="http://schemas.openxmlformats.org/drawingml/2006/main">
-            <a:off x="685800" y="790575"/>
-            <a:ext cx="10820400" cy="904875"/>
-          </a:xfrm>
-          <a:prstGeom xmlns:a="http://schemas.openxmlformats.org/drawingml/2006/main" prst="rect">
-            <a:avLst/>
-          </a:prstGeom>
-          <a:noFill xmlns:a="http://schemas.openxmlformats.org/drawingml/2006/main"/>
-          <a:ln xmlns:a="http://schemas.openxmlformats.org/drawingml/2006/main" w="0">
-            <a:noFill/>
-            <a:prstDash val="solid"/>
-          </a:ln>
-        </p:spPr>
-        <p:txBody>
-          <a:bodyPr xmlns:a="http://schemas.openxmlformats.org/drawingml/2006/main" wrap="square" lIns="0" tIns="0" rIns="0" bIns="0">
-            <a:noAutofit/>
-          </a:bodyPr>
-          <a:lstStyle xmlns:a="http://schemas.openxmlformats.org/drawingml/2006/main">
-            <a:defPPr>
-              <a:defRPr sz="3300" b="1">
-                <a:solidFill>
-                  <a:srgbClr val="20202B"/>
-                </a:solidFill>
-                <a:latin typeface="Arial"/>
-                <a:ea typeface="Arial"/>
-                <a:cs typeface="Arial"/>
-              </a:defRPr>
-            </a:defPPr>
-            <a:lvl1pPr>
-              <a:defRPr sz="3300" b="1">
-                <a:solidFill>
-                  <a:srgbClr val="20202B"/>
-                </a:solidFill>
-                <a:latin typeface="Arial"/>
-                <a:ea typeface="Arial"/>
-                <a:cs typeface="Arial"/>
-              </a:defRPr>
-            </a:lvl1pPr>
-            <a:lvl2pPr>
-              <a:defRPr sz="3300" b="1">
-                <a:solidFill>
-                  <a:srgbClr val="20202B"/>
-                </a:solidFill>
-                <a:latin typeface="Arial"/>
-                <a:ea typeface="Arial"/>
-                <a:cs typeface="Arial"/>
-              </a:defRPr>
-            </a:lvl2pPr>
-            <a:lvl3pPr>
-              <a:defRPr sz="3300" b="1">
-                <a:solidFill>
-                  <a:srgbClr val="20202B"/>
-                </a:solidFill>
-                <a:latin typeface="Arial"/>
-                <a:ea typeface="Arial"/>
-                <a:cs typeface="Arial"/>
-              </a:defRPr>
-            </a:lvl3pPr>
-            <a:lvl4pPr>
-              <a:defRPr sz="3300" b="1">
-                <a:solidFill>
-                  <a:srgbClr val="20202B"/>
-                </a:solidFill>
-                <a:latin typeface="Arial"/>
-                <a:ea typeface="Arial"/>
-                <a:cs typeface="Arial"/>
-              </a:defRPr>
-            </a:lvl4pPr>
-            <a:lvl5pPr>
-              <a:defRPr sz="3300" b="1">
-                <a:solidFill>
-                  <a:srgbClr val="20202B"/>
-                </a:solidFill>
-                <a:latin typeface="Arial"/>
-                <a:ea typeface="Arial"/>
-                <a:cs typeface="Arial"/>
-              </a:defRPr>
-            </a:lvl5pPr>
-            <a:lvl6pPr>
-              <a:defRPr sz="3300" b="1">
-                <a:solidFill>
-                  <a:srgbClr val="20202B"/>
-                </a:solidFill>
-                <a:latin typeface="Arial"/>
-                <a:ea typeface="Arial"/>
-                <a:cs typeface="Arial"/>
-              </a:defRPr>
-            </a:lvl6pPr>
-            <a:lvl7pPr>
-              <a:defRPr sz="3300" b="1">
-                <a:solidFill>
-                  <a:srgbClr val="20202B"/>
-                </a:solidFill>
-                <a:latin typeface="Arial"/>
-                <a:ea typeface="Arial"/>
-                <a:cs typeface="Arial"/>
-              </a:defRPr>
-            </a:lvl7pPr>
-            <a:lvl8pPr>
-              <a:defRPr sz="3300" b="1">
-                <a:solidFill>
-                  <a:srgbClr val="20202B"/>
-                </a:solidFill>
-                <a:latin typeface="Arial"/>
-                <a:ea typeface="Arial"/>
-                <a:cs typeface="Arial"/>
-              </a:defRPr>
-            </a:lvl8pPr>
-            <a:lvl9pPr>
-              <a:defRPr sz="3300" b="1">
-                <a:solidFill>
-                  <a:srgbClr val="20202B"/>
-                </a:solidFill>
-                <a:latin typeface="Arial"/>
-                <a:ea typeface="Arial"/>
-                <a:cs typeface="Arial"/>
-              </a:defRPr>
-            </a:lvl9pPr>
-          </a:lstStyle>
-          <a:p xmlns:a="http://schemas.openxmlformats.org/drawingml/2006/main">
-            <a:pPr>
-              <a:defRPr sz="3300" b="1">
-                <a:solidFill>
-                  <a:srgbClr val="20202B"/>
-                </a:solidFill>
-                <a:latin typeface="Arial"/>
-                <a:ea typeface="Arial"/>
-                <a:cs typeface="Arial"/>
-              </a:defRPr>
-            </a:pPr>
-            <a:r>
-              <a:rPr sz="3300" b="1">
-                <a:solidFill>
-                  <a:srgbClr val="20202B"/>
-                </a:solidFill>
-                <a:latin typeface="Arial"/>
-                <a:ea typeface="Arial"/>
-                <a:cs typeface="Arial"/>
-              </a:rPr>
-              <a:t>Bonos y pensiones</a:t>
-            </a:r>
-          </a:p>
-        </p:txBody>
-      </p:sp>
-      <p:sp>
-        <p:nvSpPr>
-          <p:cNvPr id="3" name="footer">
-            <a:extLst xmlns:a="http://schemas.openxmlformats.org/drawingml/2006/main">
-              <a:ext uri="{FF2B5EF4-FFF2-40B4-BE49-F238E27FC236}">
-                <a16:creationId xmlns:a16="http://schemas.microsoft.com/office/drawing/2014/main" id="{FAAE6F17-2045-42AD-9C3F-2D16D0BC5549}"/>
-              </a:ext>
-            </a:extLst>
-          </p:cNvPr>
-          <p:cNvSpPr>
-            <a:spLocks xmlns:a="http://schemas.openxmlformats.org/drawingml/2006/main" noGrp="1"/>
-          </p:cNvSpPr>
-          <p:nvPr/>
-        </p:nvSpPr>
-        <p:spPr>
-          <a:xfrm xmlns:a="http://schemas.openxmlformats.org/drawingml/2006/main">
-            <a:off x="685800" y="6457950"/>
-            <a:ext cx="10096500" cy="190500"/>
-          </a:xfrm>
-          <a:prstGeom xmlns:a="http://schemas.openxmlformats.org/drawingml/2006/main" prst="rect">
-            <a:avLst/>
-          </a:prstGeom>
-          <a:noFill xmlns:a="http://schemas.openxmlformats.org/drawingml/2006/main"/>
-          <a:ln xmlns:a="http://schemas.openxmlformats.org/drawingml/2006/main" w="0">
-            <a:noFill/>
-            <a:prstDash val="solid"/>
-          </a:ln>
-        </p:spPr>
-        <p:txBody>
-          <a:bodyPr xmlns:a="http://schemas.openxmlformats.org/drawingml/2006/main" wrap="square" lIns="0" tIns="0" rIns="0" bIns="0">
-            <a:noAutofit/>
-          </a:bodyPr>
-          <a:lstStyle xmlns:a="http://schemas.openxmlformats.org/drawingml/2006/main">
-            <a:defPPr>
-              <a:defRPr sz="975" b="0">
-                <a:solidFill>
-                  <a:srgbClr val="777080"/>
-                </a:solidFill>
-                <a:latin typeface="Arial"/>
-                <a:ea typeface="Arial"/>
-                <a:cs typeface="Arial"/>
-              </a:defRPr>
-            </a:defPPr>
-            <a:lvl1pPr>
-              <a:defRPr sz="975" b="0">
-                <a:solidFill>
-                  <a:srgbClr val="777080"/>
-                </a:solidFill>
-                <a:latin typeface="Arial"/>
-                <a:ea typeface="Arial"/>
-                <a:cs typeface="Arial"/>
-              </a:defRPr>
-            </a:lvl1pPr>
-            <a:lvl2pPr>
-              <a:defRPr sz="975" b="0">
-                <a:solidFill>
-                  <a:srgbClr val="777080"/>
-                </a:solidFill>
-                <a:latin typeface="Arial"/>
-                <a:ea typeface="Arial"/>
-                <a:cs typeface="Arial"/>
-              </a:defRPr>
-            </a:lvl2pPr>
-            <a:lvl3pPr>
-              <a:defRPr sz="975" b="0">
-                <a:solidFill>
-                  <a:srgbClr val="777080"/>
-                </a:solidFill>
-                <a:latin typeface="Arial"/>
-                <a:ea typeface="Arial"/>
-                <a:cs typeface="Arial"/>
-              </a:defRPr>
-            </a:lvl3pPr>
-            <a:lvl4pPr>
-              <a:defRPr sz="975" b="0">
-                <a:solidFill>
-                  <a:srgbClr val="777080"/>
-                </a:solidFill>
-                <a:latin typeface="Arial"/>
-                <a:ea typeface="Arial"/>
-                <a:cs typeface="Arial"/>
-              </a:defRPr>
-            </a:lvl4pPr>
-            <a:lvl5pPr>
-              <a:defRPr sz="975" b="0">
-                <a:solidFill>
-                  <a:srgbClr val="777080"/>
-                </a:solidFill>
-                <a:latin typeface="Arial"/>
-                <a:ea typeface="Arial"/>
-                <a:cs typeface="Arial"/>
-              </a:defRPr>
-            </a:lvl5pPr>
-            <a:lvl6pPr>
-              <a:defRPr sz="975" b="0">
-                <a:solidFill>
-                  <a:srgbClr val="777080"/>
-                </a:solidFill>
-                <a:latin typeface="Arial"/>
-                <a:ea typeface="Arial"/>
-                <a:cs typeface="Arial"/>
-              </a:defRPr>
-            </a:lvl6pPr>
-            <a:lvl7pPr>
-              <a:defRPr sz="975" b="0">
-                <a:solidFill>
-                  <a:srgbClr val="777080"/>
-                </a:solidFill>
-                <a:latin typeface="Arial"/>
-                <a:ea typeface="Arial"/>
-                <a:cs typeface="Arial"/>
-              </a:defRPr>
-            </a:lvl7pPr>
-            <a:lvl8pPr>
-              <a:defRPr sz="975" b="0">
-                <a:solidFill>
-                  <a:srgbClr val="777080"/>
-                </a:solidFill>
-                <a:latin typeface="Arial"/>
-                <a:ea typeface="Arial"/>
-                <a:cs typeface="Arial"/>
-              </a:defRPr>
-            </a:lvl8pPr>
-            <a:lvl9pPr>
-              <a:defRPr sz="975" b="0">
-                <a:solidFill>
-                  <a:srgbClr val="777080"/>
-                </a:solidFill>
-                <a:latin typeface="Arial"/>
-                <a:ea typeface="Arial"/>
-                <a:cs typeface="Arial"/>
-              </a:defRPr>
-            </a:lvl9pPr>
-          </a:lstStyle>
-          <a:p xmlns:a="http://schemas.openxmlformats.org/drawingml/2006/main">
-            <a:pPr>
-              <a:defRPr sz="975" b="0">
-                <a:solidFill>
-                  <a:srgbClr val="777080"/>
-                </a:solidFill>
-                <a:latin typeface="Arial"/>
-                <a:ea typeface="Arial"/>
-                <a:cs typeface="Arial"/>
-              </a:defRPr>
-            </a:pPr>
-            <a:r>
-              <a:rPr sz="975" b="0">
-                <a:solidFill>
-                  <a:srgbClr val="777080"/>
-                </a:solidFill>
-                <a:latin typeface="Arial"/>
-                <a:ea typeface="Arial"/>
-                <a:cs typeface="Arial"/>
-              </a:rPr>
-              <a:t>MTDH   Septiembre 2026   Nacional - 24 provincias y zona en estudio</a:t>
-            </a:r>
-          </a:p>
-        </p:txBody>
-      </p:sp>
-      <p:sp>
-        <p:nvSpPr>
-          <p:cNvPr id="4" name="page">
-            <a:extLst xmlns:a="http://schemas.openxmlformats.org/drawingml/2006/main">
-              <a:ext uri="{FF2B5EF4-FFF2-40B4-BE49-F238E27FC236}">
-                <a16:creationId xmlns:a16="http://schemas.microsoft.com/office/drawing/2014/main" id="{A50823AF-44F3-4A56-9FFD-18615B6EDA5C}"/>
-              </a:ext>
-            </a:extLst>
-          </p:cNvPr>
-          <p:cNvSpPr>
-            <a:spLocks xmlns:a="http://schemas.openxmlformats.org/drawingml/2006/main" noGrp="1"/>
-          </p:cNvSpPr>
-          <p:nvPr/>
-        </p:nvSpPr>
-        <p:spPr>
-          <a:xfrm xmlns:a="http://schemas.openxmlformats.org/drawingml/2006/main">
-            <a:off x="10953750" y="6457950"/>
-            <a:ext cx="552450" cy="190500"/>
-          </a:xfrm>
-          <a:prstGeom xmlns:a="http://schemas.openxmlformats.org/drawingml/2006/main" prst="rect">
-            <a:avLst/>
-          </a:prstGeom>
-          <a:noFill xmlns:a="http://schemas.openxmlformats.org/drawingml/2006/main"/>
-          <a:ln xmlns:a="http://schemas.openxmlformats.org/drawingml/2006/main" w="0">
-            <a:noFill/>
-            <a:prstDash val="solid"/>
-          </a:ln>
-        </p:spPr>
-        <p:txBody>
-          <a:bodyPr xmlns:a="http://schemas.openxmlformats.org/drawingml/2006/main" wrap="square" lIns="0" tIns="0" rIns="0" bIns="0">
-            <a:noAutofit/>
-          </a:bodyPr>
-          <a:lstStyle xmlns:a="http://schemas.openxmlformats.org/drawingml/2006/main">
-            <a:defPPr>
-              <a:defRPr sz="975" b="0">
-                <a:solidFill>
-                  <a:srgbClr val="777080"/>
-                </a:solidFill>
-                <a:latin typeface="Arial"/>
-                <a:ea typeface="Arial"/>
-                <a:cs typeface="Arial"/>
-              </a:defRPr>
-            </a:defPPr>
-            <a:lvl1pPr>
-              <a:defRPr sz="975" b="0">
-                <a:solidFill>
-                  <a:srgbClr val="777080"/>
-                </a:solidFill>
-                <a:latin typeface="Arial"/>
-                <a:ea typeface="Arial"/>
-                <a:cs typeface="Arial"/>
-              </a:defRPr>
-            </a:lvl1pPr>
-            <a:lvl2pPr>
-              <a:defRPr sz="975" b="0">
-                <a:solidFill>
-                  <a:srgbClr val="777080"/>
-                </a:solidFill>
-                <a:latin typeface="Arial"/>
-                <a:ea typeface="Arial"/>
-                <a:cs typeface="Arial"/>
-              </a:defRPr>
-            </a:lvl2pPr>
-            <a:lvl3pPr>
-              <a:defRPr sz="975" b="0">
-                <a:solidFill>
-                  <a:srgbClr val="777080"/>
-                </a:solidFill>
-                <a:latin typeface="Arial"/>
-                <a:ea typeface="Arial"/>
-                <a:cs typeface="Arial"/>
-              </a:defRPr>
-            </a:lvl3pPr>
-            <a:lvl4pPr>
-              <a:defRPr sz="975" b="0">
-                <a:solidFill>
-                  <a:srgbClr val="777080"/>
-                </a:solidFill>
-                <a:latin typeface="Arial"/>
-                <a:ea typeface="Arial"/>
-                <a:cs typeface="Arial"/>
-              </a:defRPr>
-            </a:lvl4pPr>
-            <a:lvl5pPr>
-              <a:defRPr sz="975" b="0">
-                <a:solidFill>
-                  <a:srgbClr val="777080"/>
-                </a:solidFill>
-                <a:latin typeface="Arial"/>
-                <a:ea typeface="Arial"/>
-                <a:cs typeface="Arial"/>
-              </a:defRPr>
-            </a:lvl5pPr>
-            <a:lvl6pPr>
-              <a:defRPr sz="975" b="0">
-                <a:solidFill>
-                  <a:srgbClr val="777080"/>
-                </a:solidFill>
-                <a:latin typeface="Arial"/>
-                <a:ea typeface="Arial"/>
-                <a:cs typeface="Arial"/>
-              </a:defRPr>
-            </a:lvl6pPr>
-            <a:lvl7pPr>
-              <a:defRPr sz="975" b="0">
-                <a:solidFill>
-                  <a:srgbClr val="777080"/>
-                </a:solidFill>
-                <a:latin typeface="Arial"/>
-                <a:ea typeface="Arial"/>
-                <a:cs typeface="Arial"/>
-              </a:defRPr>
-            </a:lvl7pPr>
-            <a:lvl8pPr>
-              <a:defRPr sz="975" b="0">
-                <a:solidFill>
-                  <a:srgbClr val="777080"/>
-                </a:solidFill>
-                <a:latin typeface="Arial"/>
-                <a:ea typeface="Arial"/>
-                <a:cs typeface="Arial"/>
-              </a:defRPr>
-            </a:lvl8pPr>
-            <a:lvl9pPr>
-              <a:defRPr sz="975" b="0">
-                <a:solidFill>
-                  <a:srgbClr val="777080"/>
-                </a:solidFill>
-                <a:latin typeface="Arial"/>
-                <a:ea typeface="Arial"/>
-                <a:cs typeface="Arial"/>
-              </a:defRPr>
-            </a:lvl9pPr>
-          </a:lstStyle>
-          <a:p xmlns:a="http://schemas.openxmlformats.org/drawingml/2006/main">
-            <a:pPr>
-              <a:defRPr sz="975" b="0">
-                <a:solidFill>
-                  <a:srgbClr val="777080"/>
-                </a:solidFill>
-                <a:latin typeface="Arial"/>
-                <a:ea typeface="Arial"/>
-                <a:cs typeface="Arial"/>
-              </a:defRPr>
-            </a:pPr>
-            <a:r>
-              <a:rPr sz="975" b="0">
-                <a:solidFill>
-                  <a:srgbClr val="777080"/>
-                </a:solidFill>
-                <a:latin typeface="Arial"/>
-                <a:ea typeface="Arial"/>
-                <a:cs typeface="Arial"/>
-              </a:rPr>
-              <a:t>05</a:t>
-            </a:r>
-          </a:p>
-        </p:txBody>
-      </p:sp>
-      <p:pic>
-        <p:nvPicPr>
-          <p:cNvPr id="5" name="">
-            <a:extLst xmlns:a="http://schemas.openxmlformats.org/drawingml/2006/main">
-              <a:ext uri="{FF2B5EF4-FFF2-40B4-BE49-F238E27FC236}">
-                <a16:creationId xmlns:a16="http://schemas.microsoft.com/office/drawing/2014/main" id="{F1F6A866-1996-4A9D-ABE8-8D9D454E1454}"/>
-              </a:ext>
-            </a:extLst>
-          </p:cNvPr>
-          <p:cNvPicPr>
-            <a:picLocks xmlns:a="http://schemas.openxmlformats.org/drawingml/2006/main" noChangeAspect="1"/>
-          </p:cNvPicPr>
-          <p:nvPr/>
-        </p:nvPicPr>
-        <p:blipFill>
-          <a:blip xmlns:r="http://schemas.openxmlformats.org/officeDocument/2006/relationships" xmlns:a="http://schemas.openxmlformats.org/drawingml/2006/main" r:embed="Rd08b10a0efa14e3b"/>
-          <a:stretch xmlns:a="http://schemas.openxmlformats.org/drawingml/2006/main"/>
-        </p:blipFill>
-        <p:spPr>
-          <a:xfrm xmlns:a="http://schemas.openxmlformats.org/drawingml/2006/main">
-            <a:off x="685800" y="1600200"/>
-            <a:ext cx="323850" cy="323850"/>
-          </a:xfrm>
-          <a:prstGeom xmlns:a="http://schemas.openxmlformats.org/drawingml/2006/main" prst="rect">
-            <a:avLst/>
-          </a:prstGeom>
-        </p:spPr>
-      </p:pic>
-      <p:sp>
-        <p:nvSpPr>
-          <p:cNvPr id="6" name="chart-subtitle">
-            <a:extLst xmlns:a="http://schemas.openxmlformats.org/drawingml/2006/main">
-              <a:ext uri="{FF2B5EF4-FFF2-40B4-BE49-F238E27FC236}">
-                <a16:creationId xmlns:a16="http://schemas.microsoft.com/office/drawing/2014/main" id="{419D38B1-6BF5-475F-B3A0-D1FCDEBC1D6A}"/>
-              </a:ext>
-            </a:extLst>
-          </p:cNvPr>
-          <p:cNvSpPr>
-            <a:spLocks xmlns:a="http://schemas.openxmlformats.org/drawingml/2006/main" noGrp="1"/>
-          </p:cNvSpPr>
-          <p:nvPr/>
-        </p:nvSpPr>
-        <p:spPr>
-          <a:xfrm xmlns:a="http://schemas.openxmlformats.org/drawingml/2006/main">
-            <a:off x="1152525" y="1657350"/>
-            <a:ext cx="9525000" cy="323850"/>
-          </a:xfrm>
-          <a:prstGeom xmlns:a="http://schemas.openxmlformats.org/drawingml/2006/main" prst="rect">
-            <a:avLst/>
-          </a:prstGeom>
-          <a:noFill xmlns:a="http://schemas.openxmlformats.org/drawingml/2006/main"/>
-          <a:ln xmlns:a="http://schemas.openxmlformats.org/drawingml/2006/main" w="0">
-            <a:noFill/>
-            <a:prstDash val="solid"/>
-          </a:ln>
-        </p:spPr>
-        <p:txBody>
-          <a:bodyPr xmlns:a="http://schemas.openxmlformats.org/drawingml/2006/main" wrap="square" lIns="0" tIns="0" rIns="0" bIns="0">
-            <a:noAutofit/>
-          </a:bodyPr>
-          <a:lstStyle xmlns:a="http://schemas.openxmlformats.org/drawingml/2006/main">
-            <a:defPPr>
-              <a:defRPr sz="1650" b="1">
-                <a:solidFill>
-                  <a:srgbClr val="512F8D"/>
-                </a:solidFill>
-                <a:latin typeface="Arial"/>
-                <a:ea typeface="Arial"/>
-                <a:cs typeface="Arial"/>
-              </a:defRPr>
-            </a:defPPr>
-            <a:lvl1pPr>
-              <a:defRPr sz="1650" b="1">
-                <a:solidFill>
-                  <a:srgbClr val="512F8D"/>
-                </a:solidFill>
-                <a:latin typeface="Arial"/>
-                <a:ea typeface="Arial"/>
-                <a:cs typeface="Arial"/>
-              </a:defRPr>
-            </a:lvl1pPr>
-            <a:lvl2pPr>
-              <a:defRPr sz="1650" b="1">
-                <a:solidFill>
-                  <a:srgbClr val="512F8D"/>
-                </a:solidFill>
-                <a:latin typeface="Arial"/>
-                <a:ea typeface="Arial"/>
-                <a:cs typeface="Arial"/>
-              </a:defRPr>
-            </a:lvl2pPr>
-            <a:lvl3pPr>
-              <a:defRPr sz="1650" b="1">
-                <a:solidFill>
-                  <a:srgbClr val="512F8D"/>
-                </a:solidFill>
-                <a:latin typeface="Arial"/>
-                <a:ea typeface="Arial"/>
-                <a:cs typeface="Arial"/>
-              </a:defRPr>
-            </a:lvl3pPr>
-            <a:lvl4pPr>
-              <a:defRPr sz="1650" b="1">
-                <a:solidFill>
-                  <a:srgbClr val="512F8D"/>
-                </a:solidFill>
-                <a:latin typeface="Arial"/>
-                <a:ea typeface="Arial"/>
-                <a:cs typeface="Arial"/>
-              </a:defRPr>
-            </a:lvl4pPr>
-            <a:lvl5pPr>
-              <a:defRPr sz="1650" b="1">
-                <a:solidFill>
-                  <a:srgbClr val="512F8D"/>
-                </a:solidFill>
-                <a:latin typeface="Arial"/>
-                <a:ea typeface="Arial"/>
-                <a:cs typeface="Arial"/>
-              </a:defRPr>
-            </a:lvl5pPr>
-            <a:lvl6pPr>
-              <a:defRPr sz="1650" b="1">
-                <a:solidFill>
-                  <a:srgbClr val="512F8D"/>
-                </a:solidFill>
-                <a:latin typeface="Arial"/>
-                <a:ea typeface="Arial"/>
-                <a:cs typeface="Arial"/>
-              </a:defRPr>
-            </a:lvl6pPr>
-            <a:lvl7pPr>
-              <a:defRPr sz="1650" b="1">
-                <a:solidFill>
-                  <a:srgbClr val="512F8D"/>
-                </a:solidFill>
-                <a:latin typeface="Arial"/>
-                <a:ea typeface="Arial"/>
-                <a:cs typeface="Arial"/>
-              </a:defRPr>
-            </a:lvl7pPr>
-            <a:lvl8pPr>
-              <a:defRPr sz="1650" b="1">
-                <a:solidFill>
-                  <a:srgbClr val="512F8D"/>
-                </a:solidFill>
-                <a:latin typeface="Arial"/>
-                <a:ea typeface="Arial"/>
-                <a:cs typeface="Arial"/>
-              </a:defRPr>
-            </a:lvl8pPr>
-            <a:lvl9pPr>
-              <a:defRPr sz="1650" b="1">
-                <a:solidFill>
-                  <a:srgbClr val="512F8D"/>
-                </a:solidFill>
-                <a:latin typeface="Arial"/>
-                <a:ea typeface="Arial"/>
-                <a:cs typeface="Arial"/>
-              </a:defRPr>
-            </a:lvl9pPr>
-          </a:lstStyle>
-          <a:p xmlns:a="http://schemas.openxmlformats.org/drawingml/2006/main">
-            <a:pPr>
-              <a:defRPr sz="1650" b="1">
-                <a:solidFill>
-                  <a:srgbClr val="512F8D"/>
-                </a:solidFill>
-                <a:latin typeface="Arial"/>
-                <a:ea typeface="Arial"/>
-                <a:cs typeface="Arial"/>
-              </a:defRPr>
-            </a:pPr>
-            <a:r>
-              <a:rPr sz="1650" b="1">
-                <a:solidFill>
-                  <a:srgbClr val="512F8D"/>
-                </a:solidFill>
-                <a:latin typeface="Arial"/>
-                <a:ea typeface="Arial"/>
-                <a:cs typeface="Arial"/>
-              </a:rPr>
-              <a:t>Los 8 ámbitos territoriales con mayor cobertura</a:t>
-            </a:r>
-          </a:p>
-        </p:txBody>
-      </p:sp>
-      <p:graphicFrame>
-        <p:nvGraphicFramePr>
-          <p:cNvPr id="7" name="Chart">
-            <a:extLst xmlns:a="http://schemas.openxmlformats.org/drawingml/2006/main">
-              <a:ext uri="{FF2B5EF4-FFF2-40B4-BE49-F238E27FC236}">
-                <a16:creationId xmlns:a16="http://schemas.microsoft.com/office/drawing/2014/main" id="{916E42B1-0333-452B-903A-D31420004C67}"/>
-              </a:ext>
-            </a:extLst>
-          </p:cNvPr>
-          <p:cNvGraphicFramePr/>
-          <p:nvPr/>
-        </p:nvGraphicFramePr>
-        <p:xfrm>
-          <a:off xmlns:a="http://schemas.openxmlformats.org/drawingml/2006/main" x="552450" y="2247900"/>
-          <a:ext xmlns:a="http://schemas.openxmlformats.org/drawingml/2006/main" cx="6858000" cy="3524250"/>
-        </p:xfrm>
-        <a:graphic xmlns:a="http://schemas.openxmlformats.org/drawingml/2006/main">
-          <a:graphicData uri="http://schemas.openxmlformats.org/drawingml/2006/chart">
-            <c:chart xmlns:r="http://schemas.openxmlformats.org/officeDocument/2006/relationships" xmlns:c="http://schemas.openxmlformats.org/drawingml/2006/chart" r:id="Rc62a2daff4724717"/>
-          </a:graphicData>
-        </a:graphic>
-      </p:graphicFrame>
-      <p:sp>
-        <p:nvSpPr>
-          <p:cNvPr id="8" name="people">
-            <a:extLst xmlns:a="http://schemas.openxmlformats.org/drawingml/2006/main">
-              <a:ext uri="{FF2B5EF4-FFF2-40B4-BE49-F238E27FC236}">
-                <a16:creationId xmlns:a16="http://schemas.microsoft.com/office/drawing/2014/main" id="{CD4D0C3D-AFF2-478D-BDA0-1BBEF6D7A41E}"/>
-              </a:ext>
-            </a:extLst>
-          </p:cNvPr>
-          <p:cNvSpPr>
-            <a:spLocks xmlns:a="http://schemas.openxmlformats.org/drawingml/2006/main" noGrp="1"/>
-          </p:cNvSpPr>
-          <p:nvPr/>
-        </p:nvSpPr>
-        <p:spPr>
-          <a:xfrm xmlns:a="http://schemas.openxmlformats.org/drawingml/2006/main">
-            <a:off x="8191500" y="2266950"/>
-            <a:ext cx="3333750" cy="762000"/>
-          </a:xfrm>
-          <a:prstGeom xmlns:a="http://schemas.openxmlformats.org/drawingml/2006/main" prst="rect">
-            <a:avLst/>
-          </a:prstGeom>
-          <a:noFill xmlns:a="http://schemas.openxmlformats.org/drawingml/2006/main"/>
-          <a:ln xmlns:a="http://schemas.openxmlformats.org/drawingml/2006/main" w="0">
-            <a:noFill/>
-            <a:prstDash val="solid"/>
-          </a:ln>
-        </p:spPr>
-        <p:txBody>
-          <a:bodyPr xmlns:a="http://schemas.openxmlformats.org/drawingml/2006/main" wrap="square" lIns="0" tIns="0" rIns="0" bIns="0">
-            <a:noAutofit/>
-          </a:bodyPr>
-          <a:lstStyle xmlns:a="http://schemas.openxmlformats.org/drawingml/2006/main">
-            <a:defPPr>
-              <a:defRPr sz="4650" b="1">
-                <a:solidFill>
-                  <a:srgbClr val="512F8D"/>
-                </a:solidFill>
-                <a:latin typeface="Arial"/>
-                <a:ea typeface="Arial"/>
-                <a:cs typeface="Arial"/>
-              </a:defRPr>
-            </a:defPPr>
-            <a:lvl1pPr>
-              <a:defRPr sz="4650" b="1">
-                <a:solidFill>
-                  <a:srgbClr val="512F8D"/>
-                </a:solidFill>
-                <a:latin typeface="Arial"/>
-                <a:ea typeface="Arial"/>
-                <a:cs typeface="Arial"/>
-              </a:defRPr>
-            </a:lvl1pPr>
-            <a:lvl2pPr>
-              <a:defRPr sz="4650" b="1">
-                <a:solidFill>
-                  <a:srgbClr val="512F8D"/>
-                </a:solidFill>
-                <a:latin typeface="Arial"/>
-                <a:ea typeface="Arial"/>
-                <a:cs typeface="Arial"/>
-              </a:defRPr>
-            </a:lvl2pPr>
-            <a:lvl3pPr>
-              <a:defRPr sz="4650" b="1">
-                <a:solidFill>
-                  <a:srgbClr val="512F8D"/>
-                </a:solidFill>
-                <a:latin typeface="Arial"/>
-                <a:ea typeface="Arial"/>
-                <a:cs typeface="Arial"/>
-              </a:defRPr>
-            </a:lvl3pPr>
-            <a:lvl4pPr>
-              <a:defRPr sz="4650" b="1">
-                <a:solidFill>
-                  <a:srgbClr val="512F8D"/>
-                </a:solidFill>
-                <a:latin typeface="Arial"/>
-                <a:ea typeface="Arial"/>
-                <a:cs typeface="Arial"/>
-              </a:defRPr>
-            </a:lvl4pPr>
-            <a:lvl5pPr>
-              <a:defRPr sz="4650" b="1">
-                <a:solidFill>
-                  <a:srgbClr val="512F8D"/>
-                </a:solidFill>
-                <a:latin typeface="Arial"/>
-                <a:ea typeface="Arial"/>
-                <a:cs typeface="Arial"/>
-              </a:defRPr>
-            </a:lvl5pPr>
-            <a:lvl6pPr>
-              <a:defRPr sz="4650" b="1">
-                <a:solidFill>
-                  <a:srgbClr val="512F8D"/>
-                </a:solidFill>
-                <a:latin typeface="Arial"/>
-                <a:ea typeface="Arial"/>
-                <a:cs typeface="Arial"/>
-              </a:defRPr>
-            </a:lvl6pPr>
-            <a:lvl7pPr>
-              <a:defRPr sz="4650" b="1">
-                <a:solidFill>
-                  <a:srgbClr val="512F8D"/>
-                </a:solidFill>
-                <a:latin typeface="Arial"/>
-                <a:ea typeface="Arial"/>
-                <a:cs typeface="Arial"/>
-              </a:defRPr>
-            </a:lvl7pPr>
-            <a:lvl8pPr>
-              <a:defRPr sz="4650" b="1">
-                <a:solidFill>
-                  <a:srgbClr val="512F8D"/>
-                </a:solidFill>
-                <a:latin typeface="Arial"/>
-                <a:ea typeface="Arial"/>
-                <a:cs typeface="Arial"/>
-              </a:defRPr>
-            </a:lvl8pPr>
-            <a:lvl9pPr>
-              <a:defRPr sz="4650" b="1">
-                <a:solidFill>
-                  <a:srgbClr val="512F8D"/>
-                </a:solidFill>
-                <a:latin typeface="Arial"/>
-                <a:ea typeface="Arial"/>
-                <a:cs typeface="Arial"/>
-              </a:defRPr>
-            </a:lvl9pPr>
-          </a:lstStyle>
-          <a:p xmlns:a="http://schemas.openxmlformats.org/drawingml/2006/main">
-            <a:pPr>
-              <a:defRPr sz="4650" b="1">
-                <a:solidFill>
-                  <a:srgbClr val="512F8D"/>
-                </a:solidFill>
-                <a:latin typeface="Arial"/>
-                <a:ea typeface="Arial"/>
-                <a:cs typeface="Arial"/>
-              </a:defRPr>
-            </a:pPr>
-            <a:r>
-              <a:rPr sz="4650" b="1">
-                <a:solidFill>
-                  <a:srgbClr val="512F8D"/>
-                </a:solidFill>
-                <a:latin typeface="Arial"/>
-                <a:ea typeface="Arial"/>
-                <a:cs typeface="Arial"/>
-              </a:rPr>
-              <a:t>1.578.019</a:t>
-            </a:r>
-          </a:p>
-        </p:txBody>
-      </p:sp>
-      <p:sp>
-        <p:nvSpPr>
-          <p:cNvPr id="9" name="people-label">
-            <a:extLst xmlns:a="http://schemas.openxmlformats.org/drawingml/2006/main">
-              <a:ext uri="{FF2B5EF4-FFF2-40B4-BE49-F238E27FC236}">
-                <a16:creationId xmlns:a16="http://schemas.microsoft.com/office/drawing/2014/main" id="{E1CDC408-18C3-430E-B0E3-C7E3892D04D8}"/>
-              </a:ext>
-            </a:extLst>
-          </p:cNvPr>
-          <p:cNvSpPr>
-            <a:spLocks xmlns:a="http://schemas.openxmlformats.org/drawingml/2006/main" noGrp="1"/>
-          </p:cNvSpPr>
-          <p:nvPr/>
-        </p:nvSpPr>
-        <p:spPr>
-          <a:xfrm xmlns:a="http://schemas.openxmlformats.org/drawingml/2006/main">
-            <a:off x="8191500" y="3048000"/>
-            <a:ext cx="3238500" cy="666750"/>
-          </a:xfrm>
-          <a:prstGeom xmlns:a="http://schemas.openxmlformats.org/drawingml/2006/main" prst="rect">
-            <a:avLst/>
-          </a:prstGeom>
-          <a:noFill xmlns:a="http://schemas.openxmlformats.org/drawingml/2006/main"/>
-          <a:ln xmlns:a="http://schemas.openxmlformats.org/drawingml/2006/main" w="0">
-            <a:noFill/>
-            <a:prstDash val="solid"/>
-          </a:ln>
-        </p:spPr>
-        <p:txBody>
-          <a:bodyPr xmlns:a="http://schemas.openxmlformats.org/drawingml/2006/main" wrap="square" lIns="0" tIns="0" rIns="0" bIns="0">
-            <a:noAutofit/>
-          </a:bodyPr>
-          <a:lstStyle xmlns:a="http://schemas.openxmlformats.org/drawingml/2006/main">
-            <a:defPPr>
-              <a:defRPr sz="1800" b="0">
-                <a:solidFill>
-                  <a:srgbClr val="777080"/>
-                </a:solidFill>
-                <a:latin typeface="Arial"/>
-                <a:ea typeface="Arial"/>
-                <a:cs typeface="Arial"/>
-              </a:defRPr>
-            </a:defPPr>
-            <a:lvl1pPr>
-              <a:defRPr sz="1800" b="0">
-                <a:solidFill>
-                  <a:srgbClr val="777080"/>
-                </a:solidFill>
-                <a:latin typeface="Arial"/>
-                <a:ea typeface="Arial"/>
-                <a:cs typeface="Arial"/>
-              </a:defRPr>
-            </a:lvl1pPr>
-            <a:lvl2pPr>
-              <a:defRPr sz="1800" b="0">
-                <a:solidFill>
-                  <a:srgbClr val="777080"/>
-                </a:solidFill>
-                <a:latin typeface="Arial"/>
-                <a:ea typeface="Arial"/>
-                <a:cs typeface="Arial"/>
-              </a:defRPr>
-            </a:lvl2pPr>
-            <a:lvl3pPr>
-              <a:defRPr sz="1800" b="0">
-                <a:solidFill>
-                  <a:srgbClr val="777080"/>
-                </a:solidFill>
-                <a:latin typeface="Arial"/>
-                <a:ea typeface="Arial"/>
-                <a:cs typeface="Arial"/>
-              </a:defRPr>
-            </a:lvl3pPr>
-            <a:lvl4pPr>
-              <a:defRPr sz="1800" b="0">
-                <a:solidFill>
-                  <a:srgbClr val="777080"/>
-                </a:solidFill>
-                <a:latin typeface="Arial"/>
-                <a:ea typeface="Arial"/>
-                <a:cs typeface="Arial"/>
-              </a:defRPr>
-            </a:lvl4pPr>
-            <a:lvl5pPr>
-              <a:defRPr sz="1800" b="0">
-                <a:solidFill>
-                  <a:srgbClr val="777080"/>
-                </a:solidFill>
-                <a:latin typeface="Arial"/>
-                <a:ea typeface="Arial"/>
-                <a:cs typeface="Arial"/>
-              </a:defRPr>
-            </a:lvl5pPr>
-            <a:lvl6pPr>
-              <a:defRPr sz="1800" b="0">
-                <a:solidFill>
-                  <a:srgbClr val="777080"/>
-                </a:solidFill>
-                <a:latin typeface="Arial"/>
-                <a:ea typeface="Arial"/>
-                <a:cs typeface="Arial"/>
-              </a:defRPr>
-            </a:lvl6pPr>
-            <a:lvl7pPr>
-              <a:defRPr sz="1800" b="0">
-                <a:solidFill>
-                  <a:srgbClr val="777080"/>
-                </a:solidFill>
-                <a:latin typeface="Arial"/>
-                <a:ea typeface="Arial"/>
-                <a:cs typeface="Arial"/>
-              </a:defRPr>
-            </a:lvl7pPr>
-            <a:lvl8pPr>
-              <a:defRPr sz="1800" b="0">
-                <a:solidFill>
-                  <a:srgbClr val="777080"/>
-                </a:solidFill>
-                <a:latin typeface="Arial"/>
-                <a:ea typeface="Arial"/>
-                <a:cs typeface="Arial"/>
-              </a:defRPr>
-            </a:lvl8pPr>
-            <a:lvl9pPr>
-              <a:defRPr sz="1800" b="0">
-                <a:solidFill>
-                  <a:srgbClr val="777080"/>
-                </a:solidFill>
-                <a:latin typeface="Arial"/>
-                <a:ea typeface="Arial"/>
-                <a:cs typeface="Arial"/>
-              </a:defRPr>
-            </a:lvl9pPr>
-          </a:lstStyle>
-          <a:p xmlns:a="http://schemas.openxmlformats.org/drawingml/2006/main">
-            <a:pPr>
-              <a:defRPr sz="1800" b="0">
-                <a:solidFill>
-                  <a:srgbClr val="777080"/>
-                </a:solidFill>
-                <a:latin typeface="Arial"/>
-                <a:ea typeface="Arial"/>
-                <a:cs typeface="Arial"/>
-              </a:defRPr>
-            </a:pPr>
-            <a:r>
-              <a:rPr sz="1800" b="0">
-                <a:solidFill>
-                  <a:srgbClr val="777080"/>
-                </a:solidFill>
-                <a:latin typeface="Arial"/>
-                <a:ea typeface="Arial"/>
-                <a:cs typeface="Arial"/>
-              </a:rPr>
-              <a:t>Beneficiarios reportados</a:t>
-            </a:r>
-          </a:p>
-        </p:txBody>
-      </p:sp>
-      <p:sp>
-        <p:nvSpPr>
-          <p:cNvPr id="10" name="fiscal">
-            <a:extLst xmlns:a="http://schemas.openxmlformats.org/drawingml/2006/main">
-              <a:ext uri="{FF2B5EF4-FFF2-40B4-BE49-F238E27FC236}">
-                <a16:creationId xmlns:a16="http://schemas.microsoft.com/office/drawing/2014/main" id="{1445C50D-5EC4-4DB4-896C-8C3309CAD99A}"/>
-              </a:ext>
-            </a:extLst>
-          </p:cNvPr>
-          <p:cNvSpPr>
-            <a:spLocks xmlns:a="http://schemas.openxmlformats.org/drawingml/2006/main" noGrp="1"/>
-          </p:cNvSpPr>
-          <p:nvPr/>
-        </p:nvSpPr>
-        <p:spPr>
-          <a:xfrm xmlns:a="http://schemas.openxmlformats.org/drawingml/2006/main">
-            <a:off x="8191500" y="3876675"/>
-            <a:ext cx="3238500" cy="542925"/>
-          </a:xfrm>
-          <a:prstGeom xmlns:a="http://schemas.openxmlformats.org/drawingml/2006/main" prst="rect">
-            <a:avLst/>
-          </a:prstGeom>
-          <a:noFill xmlns:a="http://schemas.openxmlformats.org/drawingml/2006/main"/>
-          <a:ln xmlns:a="http://schemas.openxmlformats.org/drawingml/2006/main" w="0">
-            <a:noFill/>
-            <a:prstDash val="solid"/>
-          </a:ln>
-        </p:spPr>
-        <p:txBody>
-          <a:bodyPr xmlns:a="http://schemas.openxmlformats.org/drawingml/2006/main" wrap="square" lIns="0" tIns="0" rIns="0" bIns="0">
-            <a:noAutofit/>
-          </a:bodyPr>
-          <a:lstStyle xmlns:a="http://schemas.openxmlformats.org/drawingml/2006/main">
-            <a:defPPr>
-              <a:defRPr sz="3225" b="1">
-                <a:solidFill>
-                  <a:srgbClr val="20202B"/>
-                </a:solidFill>
-                <a:latin typeface="Arial"/>
-                <a:ea typeface="Arial"/>
-                <a:cs typeface="Arial"/>
-              </a:defRPr>
-            </a:defPPr>
-            <a:lvl1pPr>
-              <a:defRPr sz="3225" b="1">
-                <a:solidFill>
-                  <a:srgbClr val="20202B"/>
-                </a:solidFill>
-                <a:latin typeface="Arial"/>
-                <a:ea typeface="Arial"/>
-                <a:cs typeface="Arial"/>
-              </a:defRPr>
-            </a:lvl1pPr>
-            <a:lvl2pPr>
-              <a:defRPr sz="3225" b="1">
-                <a:solidFill>
-                  <a:srgbClr val="20202B"/>
-                </a:solidFill>
-                <a:latin typeface="Arial"/>
-                <a:ea typeface="Arial"/>
-                <a:cs typeface="Arial"/>
-              </a:defRPr>
-            </a:lvl2pPr>
-            <a:lvl3pPr>
-              <a:defRPr sz="3225" b="1">
-                <a:solidFill>
-                  <a:srgbClr val="20202B"/>
-                </a:solidFill>
-                <a:latin typeface="Arial"/>
-                <a:ea typeface="Arial"/>
-                <a:cs typeface="Arial"/>
-              </a:defRPr>
-            </a:lvl3pPr>
-            <a:lvl4pPr>
-              <a:defRPr sz="3225" b="1">
-                <a:solidFill>
-                  <a:srgbClr val="20202B"/>
-                </a:solidFill>
-                <a:latin typeface="Arial"/>
-                <a:ea typeface="Arial"/>
-                <a:cs typeface="Arial"/>
-              </a:defRPr>
-            </a:lvl4pPr>
-            <a:lvl5pPr>
-              <a:defRPr sz="3225" b="1">
-                <a:solidFill>
-                  <a:srgbClr val="20202B"/>
-                </a:solidFill>
-                <a:latin typeface="Arial"/>
-                <a:ea typeface="Arial"/>
-                <a:cs typeface="Arial"/>
-              </a:defRPr>
-            </a:lvl5pPr>
-            <a:lvl6pPr>
-              <a:defRPr sz="3225" b="1">
-                <a:solidFill>
-                  <a:srgbClr val="20202B"/>
-                </a:solidFill>
-                <a:latin typeface="Arial"/>
-                <a:ea typeface="Arial"/>
-                <a:cs typeface="Arial"/>
-              </a:defRPr>
-            </a:lvl6pPr>
-            <a:lvl7pPr>
-              <a:defRPr sz="3225" b="1">
-                <a:solidFill>
-                  <a:srgbClr val="20202B"/>
-                </a:solidFill>
-                <a:latin typeface="Arial"/>
-                <a:ea typeface="Arial"/>
-                <a:cs typeface="Arial"/>
-              </a:defRPr>
-            </a:lvl7pPr>
-            <a:lvl8pPr>
-              <a:defRPr sz="3225" b="1">
-                <a:solidFill>
-                  <a:srgbClr val="20202B"/>
-                </a:solidFill>
-                <a:latin typeface="Arial"/>
-                <a:ea typeface="Arial"/>
-                <a:cs typeface="Arial"/>
-              </a:defRPr>
-            </a:lvl8pPr>
-            <a:lvl9pPr>
-              <a:defRPr sz="3225" b="1">
-                <a:solidFill>
-                  <a:srgbClr val="20202B"/>
-                </a:solidFill>
-                <a:latin typeface="Arial"/>
-                <a:ea typeface="Arial"/>
-                <a:cs typeface="Arial"/>
-              </a:defRPr>
-            </a:lvl9pPr>
-          </a:lstStyle>
-          <a:p xmlns:a="http://schemas.openxmlformats.org/drawingml/2006/main">
-            <a:pPr>
-              <a:defRPr sz="3225" b="1">
-                <a:solidFill>
-                  <a:srgbClr val="20202B"/>
-                </a:solidFill>
-                <a:latin typeface="Arial"/>
-                <a:ea typeface="Arial"/>
-                <a:cs typeface="Arial"/>
-              </a:defRPr>
-            </a:pPr>
-            <a:r>
-              <a:rPr sz="3225" b="1">
-                <a:solidFill>
-                  <a:srgbClr val="20202B"/>
-                </a:solidFill>
-                <a:latin typeface="Arial"/>
-                <a:ea typeface="Arial"/>
-                <a:cs typeface="Arial"/>
-              </a:rPr>
-              <a:t>USD 1.011,25</a:t>
-            </a:r>
-          </a:p>
-        </p:txBody>
-      </p:sp>
-      <p:sp>
-        <p:nvSpPr>
-          <p:cNvPr id="11" name="fiscal-label">
-            <a:extLst xmlns:a="http://schemas.openxmlformats.org/drawingml/2006/main">
-              <a:ext uri="{FF2B5EF4-FFF2-40B4-BE49-F238E27FC236}">
-                <a16:creationId xmlns:a16="http://schemas.microsoft.com/office/drawing/2014/main" id="{AC386503-1134-4017-98DE-7AA63B198C62}"/>
-              </a:ext>
-            </a:extLst>
-          </p:cNvPr>
-          <p:cNvSpPr>
-            <a:spLocks xmlns:a="http://schemas.openxmlformats.org/drawingml/2006/main" noGrp="1"/>
-          </p:cNvSpPr>
-          <p:nvPr/>
-        </p:nvSpPr>
-        <p:spPr>
-          <a:xfrm xmlns:a="http://schemas.openxmlformats.org/drawingml/2006/main">
-            <a:off x="8191500" y="4438650"/>
-            <a:ext cx="3238500" cy="552450"/>
-          </a:xfrm>
-          <a:prstGeom xmlns:a="http://schemas.openxmlformats.org/drawingml/2006/main" prst="rect">
-            <a:avLst/>
-          </a:prstGeom>
-          <a:noFill xmlns:a="http://schemas.openxmlformats.org/drawingml/2006/main"/>
-          <a:ln xmlns:a="http://schemas.openxmlformats.org/drawingml/2006/main" w="0">
-            <a:noFill/>
-            <a:prstDash val="solid"/>
-          </a:ln>
-        </p:spPr>
-        <p:txBody>
-          <a:bodyPr xmlns:a="http://schemas.openxmlformats.org/drawingml/2006/main" wrap="square" lIns="0" tIns="0" rIns="0" bIns="0">
-            <a:noAutofit/>
-          </a:bodyPr>
-          <a:lstStyle xmlns:a="http://schemas.openxmlformats.org/drawingml/2006/main">
-            <a:defPPr>
-              <a:defRPr sz="1575" b="0">
-                <a:solidFill>
-                  <a:srgbClr val="777080"/>
-                </a:solidFill>
-                <a:latin typeface="Arial"/>
-                <a:ea typeface="Arial"/>
-                <a:cs typeface="Arial"/>
-              </a:defRPr>
-            </a:defPPr>
-            <a:lvl1pPr>
-              <a:defRPr sz="1575" b="0">
-                <a:solidFill>
-                  <a:srgbClr val="777080"/>
-                </a:solidFill>
-                <a:latin typeface="Arial"/>
-                <a:ea typeface="Arial"/>
-                <a:cs typeface="Arial"/>
-              </a:defRPr>
-            </a:lvl1pPr>
-            <a:lvl2pPr>
-              <a:defRPr sz="1575" b="0">
-                <a:solidFill>
-                  <a:srgbClr val="777080"/>
-                </a:solidFill>
-                <a:latin typeface="Arial"/>
-                <a:ea typeface="Arial"/>
-                <a:cs typeface="Arial"/>
-              </a:defRPr>
-            </a:lvl2pPr>
-            <a:lvl3pPr>
-              <a:defRPr sz="1575" b="0">
-                <a:solidFill>
-                  <a:srgbClr val="777080"/>
-                </a:solidFill>
-                <a:latin typeface="Arial"/>
-                <a:ea typeface="Arial"/>
-                <a:cs typeface="Arial"/>
-              </a:defRPr>
-            </a:lvl3pPr>
-            <a:lvl4pPr>
-              <a:defRPr sz="1575" b="0">
-                <a:solidFill>
-                  <a:srgbClr val="777080"/>
-                </a:solidFill>
-                <a:latin typeface="Arial"/>
-                <a:ea typeface="Arial"/>
-                <a:cs typeface="Arial"/>
-              </a:defRPr>
-            </a:lvl4pPr>
-            <a:lvl5pPr>
-              <a:defRPr sz="1575" b="0">
-                <a:solidFill>
-                  <a:srgbClr val="777080"/>
-                </a:solidFill>
-                <a:latin typeface="Arial"/>
-                <a:ea typeface="Arial"/>
-                <a:cs typeface="Arial"/>
-              </a:defRPr>
-            </a:lvl5pPr>
-            <a:lvl6pPr>
-              <a:defRPr sz="1575" b="0">
-                <a:solidFill>
-                  <a:srgbClr val="777080"/>
-                </a:solidFill>
-                <a:latin typeface="Arial"/>
-                <a:ea typeface="Arial"/>
-                <a:cs typeface="Arial"/>
-              </a:defRPr>
-            </a:lvl6pPr>
-            <a:lvl7pPr>
-              <a:defRPr sz="1575" b="0">
-                <a:solidFill>
-                  <a:srgbClr val="777080"/>
-                </a:solidFill>
-                <a:latin typeface="Arial"/>
-                <a:ea typeface="Arial"/>
-                <a:cs typeface="Arial"/>
-              </a:defRPr>
-            </a:lvl7pPr>
-            <a:lvl8pPr>
-              <a:defRPr sz="1575" b="0">
-                <a:solidFill>
-                  <a:srgbClr val="777080"/>
-                </a:solidFill>
-                <a:latin typeface="Arial"/>
-                <a:ea typeface="Arial"/>
-                <a:cs typeface="Arial"/>
-              </a:defRPr>
-            </a:lvl8pPr>
-            <a:lvl9pPr>
-              <a:defRPr sz="1575" b="0">
-                <a:solidFill>
-                  <a:srgbClr val="777080"/>
-                </a:solidFill>
-                <a:latin typeface="Arial"/>
-                <a:ea typeface="Arial"/>
-                <a:cs typeface="Arial"/>
-              </a:defRPr>
-            </a:lvl9pPr>
-          </a:lstStyle>
-          <a:p xmlns:a="http://schemas.openxmlformats.org/drawingml/2006/main">
-            <a:pPr>
-              <a:defRPr sz="1575" b="0">
-                <a:solidFill>
-                  <a:srgbClr val="777080"/>
-                </a:solidFill>
-                <a:latin typeface="Arial"/>
-                <a:ea typeface="Arial"/>
-                <a:cs typeface="Arial"/>
-              </a:defRPr>
-            </a:pPr>
-            <a:r>
-              <a:rPr sz="1575" b="0">
-                <a:solidFill>
-                  <a:srgbClr val="777080"/>
-                </a:solidFill>
-                <a:latin typeface="Arial"/>
-                <a:ea typeface="Arial"/>
-                <a:cs typeface="Arial"/>
-              </a:rPr>
-              <a:t>millones en el acumulado fiscal 2026</a:t>
-            </a:r>
-          </a:p>
-        </p:txBody>
-      </p:sp>
-      <p:sp>
-        <p:nvSpPr>
-          <p:cNvPr id="12" name="extra-value">
-            <a:extLst xmlns:a="http://schemas.openxmlformats.org/drawingml/2006/main">
-              <a:ext uri="{FF2B5EF4-FFF2-40B4-BE49-F238E27FC236}">
-                <a16:creationId xmlns:a16="http://schemas.microsoft.com/office/drawing/2014/main" id="{2F36CA4E-C032-43B3-8BB7-AD21BF2E68C4}"/>
-              </a:ext>
-            </a:extLst>
-          </p:cNvPr>
-          <p:cNvSpPr>
-            <a:spLocks xmlns:a="http://schemas.openxmlformats.org/drawingml/2006/main" noGrp="1"/>
-          </p:cNvSpPr>
-          <p:nvPr/>
-        </p:nvSpPr>
-        <p:spPr>
-          <a:xfrm xmlns:a="http://schemas.openxmlformats.org/drawingml/2006/main">
-            <a:off x="8191500" y="5095875"/>
-            <a:ext cx="3238500" cy="476250"/>
-          </a:xfrm>
-          <a:prstGeom xmlns:a="http://schemas.openxmlformats.org/drawingml/2006/main" prst="rect">
-            <a:avLst/>
-          </a:prstGeom>
-          <a:noFill xmlns:a="http://schemas.openxmlformats.org/drawingml/2006/main"/>
-          <a:ln xmlns:a="http://schemas.openxmlformats.org/drawingml/2006/main" w="0">
-            <a:noFill/>
-            <a:prstDash val="solid"/>
-          </a:ln>
-        </p:spPr>
-        <p:txBody>
-          <a:bodyPr xmlns:a="http://schemas.openxmlformats.org/drawingml/2006/main" wrap="square" lIns="0" tIns="0" rIns="0" bIns="0">
-            <a:noAutofit/>
-          </a:bodyPr>
-          <a:lstStyle xmlns:a="http://schemas.openxmlformats.org/drawingml/2006/main">
-            <a:defPPr>
-              <a:defRPr sz="2850" b="1">
-                <a:solidFill>
-                  <a:srgbClr val="20202B"/>
-                </a:solidFill>
-                <a:latin typeface="Arial"/>
-                <a:ea typeface="Arial"/>
-                <a:cs typeface="Arial"/>
-              </a:defRPr>
-            </a:defPPr>
-            <a:lvl1pPr>
-              <a:defRPr sz="2850" b="1">
-                <a:solidFill>
-                  <a:srgbClr val="20202B"/>
-                </a:solidFill>
-                <a:latin typeface="Arial"/>
-                <a:ea typeface="Arial"/>
-                <a:cs typeface="Arial"/>
-              </a:defRPr>
-            </a:lvl1pPr>
-            <a:lvl2pPr>
-              <a:defRPr sz="2850" b="1">
-                <a:solidFill>
-                  <a:srgbClr val="20202B"/>
-                </a:solidFill>
-                <a:latin typeface="Arial"/>
-                <a:ea typeface="Arial"/>
-                <a:cs typeface="Arial"/>
-              </a:defRPr>
-            </a:lvl2pPr>
-            <a:lvl3pPr>
-              <a:defRPr sz="2850" b="1">
-                <a:solidFill>
-                  <a:srgbClr val="20202B"/>
-                </a:solidFill>
-                <a:latin typeface="Arial"/>
-                <a:ea typeface="Arial"/>
-                <a:cs typeface="Arial"/>
-              </a:defRPr>
-            </a:lvl3pPr>
-            <a:lvl4pPr>
-              <a:defRPr sz="2850" b="1">
-                <a:solidFill>
-                  <a:srgbClr val="20202B"/>
-                </a:solidFill>
-                <a:latin typeface="Arial"/>
-                <a:ea typeface="Arial"/>
-                <a:cs typeface="Arial"/>
-              </a:defRPr>
-            </a:lvl4pPr>
-            <a:lvl5pPr>
-              <a:defRPr sz="2850" b="1">
-                <a:solidFill>
-                  <a:srgbClr val="20202B"/>
-                </a:solidFill>
-                <a:latin typeface="Arial"/>
-                <a:ea typeface="Arial"/>
-                <a:cs typeface="Arial"/>
-              </a:defRPr>
-            </a:lvl5pPr>
-            <a:lvl6pPr>
-              <a:defRPr sz="2850" b="1">
-                <a:solidFill>
-                  <a:srgbClr val="20202B"/>
-                </a:solidFill>
-                <a:latin typeface="Arial"/>
-                <a:ea typeface="Arial"/>
-                <a:cs typeface="Arial"/>
-              </a:defRPr>
-            </a:lvl6pPr>
-            <a:lvl7pPr>
-              <a:defRPr sz="2850" b="1">
-                <a:solidFill>
-                  <a:srgbClr val="20202B"/>
-                </a:solidFill>
-                <a:latin typeface="Arial"/>
-                <a:ea typeface="Arial"/>
-                <a:cs typeface="Arial"/>
-              </a:defRPr>
-            </a:lvl7pPr>
-            <a:lvl8pPr>
-              <a:defRPr sz="2850" b="1">
-                <a:solidFill>
-                  <a:srgbClr val="20202B"/>
-                </a:solidFill>
-                <a:latin typeface="Arial"/>
-                <a:ea typeface="Arial"/>
-                <a:cs typeface="Arial"/>
-              </a:defRPr>
-            </a:lvl8pPr>
-            <a:lvl9pPr>
-              <a:defRPr sz="2850" b="1">
-                <a:solidFill>
-                  <a:srgbClr val="20202B"/>
-                </a:solidFill>
-                <a:latin typeface="Arial"/>
-                <a:ea typeface="Arial"/>
-                <a:cs typeface="Arial"/>
-              </a:defRPr>
-            </a:lvl9pPr>
-          </a:lstStyle>
-          <a:p xmlns:a="http://schemas.openxmlformats.org/drawingml/2006/main">
-            <a:pPr>
-              <a:defRPr sz="2850" b="1">
-                <a:solidFill>
-                  <a:srgbClr val="20202B"/>
-                </a:solidFill>
-                <a:latin typeface="Arial"/>
-                <a:ea typeface="Arial"/>
-                <a:cs typeface="Arial"/>
-              </a:defRPr>
-            </a:pPr>
-            <a:r>
-              <a:rPr sz="2850" b="1">
-                <a:solidFill>
-                  <a:srgbClr val="20202B"/>
-                </a:solidFill>
-                <a:latin typeface="Arial"/>
-                <a:ea typeface="Arial"/>
-                <a:cs typeface="Arial"/>
-              </a:rPr>
-              <a:t>USD 3.758,99</a:t>
-            </a:r>
-          </a:p>
-        </p:txBody>
-      </p:sp>
-      <p:sp>
-        <p:nvSpPr>
-          <p:cNvPr id="13" name="extra-label">
-            <a:extLst xmlns:a="http://schemas.openxmlformats.org/drawingml/2006/main">
-              <a:ext uri="{FF2B5EF4-FFF2-40B4-BE49-F238E27FC236}">
-                <a16:creationId xmlns:a16="http://schemas.microsoft.com/office/drawing/2014/main" id="{00D39701-90F9-451C-897F-269ABB662A43}"/>
-              </a:ext>
-            </a:extLst>
-          </p:cNvPr>
-          <p:cNvSpPr>
-            <a:spLocks xmlns:a="http://schemas.openxmlformats.org/drawingml/2006/main" noGrp="1"/>
-          </p:cNvSpPr>
-          <p:nvPr/>
-        </p:nvSpPr>
-        <p:spPr>
-          <a:xfrm xmlns:a="http://schemas.openxmlformats.org/drawingml/2006/main">
-            <a:off x="8191500" y="5581650"/>
-            <a:ext cx="3238500" cy="495300"/>
-          </a:xfrm>
-          <a:prstGeom xmlns:a="http://schemas.openxmlformats.org/drawingml/2006/main" prst="rect">
-            <a:avLst/>
-          </a:prstGeom>
-          <a:noFill xmlns:a="http://schemas.openxmlformats.org/drawingml/2006/main"/>
-          <a:ln xmlns:a="http://schemas.openxmlformats.org/drawingml/2006/main" w="0">
-            <a:noFill/>
-            <a:prstDash val="solid"/>
-          </a:ln>
-        </p:spPr>
-        <p:txBody>
-          <a:bodyPr xmlns:a="http://schemas.openxmlformats.org/drawingml/2006/main" wrap="square" lIns="0" tIns="0" rIns="0" bIns="0">
-            <a:noAutofit/>
-          </a:bodyPr>
-          <a:lstStyle xmlns:a="http://schemas.openxmlformats.org/drawingml/2006/main">
-            <a:defPPr>
-              <a:defRPr sz="1500" b="0">
-                <a:solidFill>
-                  <a:srgbClr val="777080"/>
-                </a:solidFill>
-                <a:latin typeface="Arial"/>
-                <a:ea typeface="Arial"/>
-                <a:cs typeface="Arial"/>
-              </a:defRPr>
-            </a:defPPr>
-            <a:lvl1pPr>
-              <a:defRPr sz="1500" b="0">
-                <a:solidFill>
-                  <a:srgbClr val="777080"/>
-                </a:solidFill>
-                <a:latin typeface="Arial"/>
-                <a:ea typeface="Arial"/>
-                <a:cs typeface="Arial"/>
-              </a:defRPr>
-            </a:lvl1pPr>
-            <a:lvl2pPr>
-              <a:defRPr sz="1500" b="0">
-                <a:solidFill>
-                  <a:srgbClr val="777080"/>
-                </a:solidFill>
-                <a:latin typeface="Arial"/>
-                <a:ea typeface="Arial"/>
-                <a:cs typeface="Arial"/>
-              </a:defRPr>
-            </a:lvl2pPr>
-            <a:lvl3pPr>
-              <a:defRPr sz="1500" b="0">
-                <a:solidFill>
-                  <a:srgbClr val="777080"/>
-                </a:solidFill>
-                <a:latin typeface="Arial"/>
-                <a:ea typeface="Arial"/>
-                <a:cs typeface="Arial"/>
-              </a:defRPr>
-            </a:lvl3pPr>
-            <a:lvl4pPr>
-              <a:defRPr sz="1500" b="0">
-                <a:solidFill>
-                  <a:srgbClr val="777080"/>
-                </a:solidFill>
-                <a:latin typeface="Arial"/>
-                <a:ea typeface="Arial"/>
-                <a:cs typeface="Arial"/>
-              </a:defRPr>
-            </a:lvl4pPr>
-            <a:lvl5pPr>
-              <a:defRPr sz="1500" b="0">
-                <a:solidFill>
-                  <a:srgbClr val="777080"/>
-                </a:solidFill>
-                <a:latin typeface="Arial"/>
-                <a:ea typeface="Arial"/>
-                <a:cs typeface="Arial"/>
-              </a:defRPr>
-            </a:lvl5pPr>
-            <a:lvl6pPr>
-              <a:defRPr sz="1500" b="0">
-                <a:solidFill>
-                  <a:srgbClr val="777080"/>
-                </a:solidFill>
-                <a:latin typeface="Arial"/>
-                <a:ea typeface="Arial"/>
-                <a:cs typeface="Arial"/>
-              </a:defRPr>
-            </a:lvl6pPr>
-            <a:lvl7pPr>
-              <a:defRPr sz="1500" b="0">
-                <a:solidFill>
-                  <a:srgbClr val="777080"/>
-                </a:solidFill>
-                <a:latin typeface="Arial"/>
-                <a:ea typeface="Arial"/>
-                <a:cs typeface="Arial"/>
-              </a:defRPr>
-            </a:lvl7pPr>
-            <a:lvl8pPr>
-              <a:defRPr sz="1500" b="0">
-                <a:solidFill>
-                  <a:srgbClr val="777080"/>
-                </a:solidFill>
-                <a:latin typeface="Arial"/>
-                <a:ea typeface="Arial"/>
-                <a:cs typeface="Arial"/>
-              </a:defRPr>
-            </a:lvl8pPr>
-            <a:lvl9pPr>
-              <a:defRPr sz="1500" b="0">
-                <a:solidFill>
-                  <a:srgbClr val="777080"/>
-                </a:solidFill>
-                <a:latin typeface="Arial"/>
-                <a:ea typeface="Arial"/>
-                <a:cs typeface="Arial"/>
-              </a:defRPr>
-            </a:lvl9pPr>
-          </a:lstStyle>
-          <a:p xmlns:a="http://schemas.openxmlformats.org/drawingml/2006/main">
-            <a:pPr>
-              <a:defRPr sz="1500" b="0">
-                <a:solidFill>
-                  <a:srgbClr val="777080"/>
-                </a:solidFill>
-                <a:latin typeface="Arial"/>
-                <a:ea typeface="Arial"/>
-                <a:cs typeface="Arial"/>
-              </a:defRPr>
-            </a:pPr>
-            <a:r>
-              <a:rPr sz="1500" b="0">
-                <a:solidFill>
-                  <a:srgbClr val="777080"/>
-                </a:solidFill>
-                <a:latin typeface="Arial"/>
-                <a:ea typeface="Arial"/>
-                <a:cs typeface="Arial"/>
-              </a:rPr>
-              <a:t>millones en el acumulado de gobierno</a:t>
-            </a:r>
-          </a:p>
-        </p:txBody>
-      </p:sp>
-      <p:sp>
-        <p:nvSpPr>
-          <p:cNvPr id="14" name="count-note">
-            <a:extLst xmlns:a="http://schemas.openxmlformats.org/drawingml/2006/main">
-              <a:ext uri="{FF2B5EF4-FFF2-40B4-BE49-F238E27FC236}">
-                <a16:creationId xmlns:a16="http://schemas.microsoft.com/office/drawing/2014/main" id="{9FD4FD76-6F72-4B1E-B4E6-FA703ABFDAFF}"/>
-              </a:ext>
-            </a:extLst>
-          </p:cNvPr>
-          <p:cNvSpPr>
-            <a:spLocks xmlns:a="http://schemas.openxmlformats.org/drawingml/2006/main" noGrp="1"/>
-          </p:cNvSpPr>
-          <p:nvPr/>
-        </p:nvSpPr>
-        <p:spPr>
-          <a:xfrm xmlns:a="http://schemas.openxmlformats.org/drawingml/2006/main">
-            <a:off x="685800" y="5953125"/>
-            <a:ext cx="6953250" cy="361950"/>
-          </a:xfrm>
-          <a:prstGeom xmlns:a="http://schemas.openxmlformats.org/drawingml/2006/main" prst="rect">
-            <a:avLst/>
-          </a:prstGeom>
-          <a:noFill xmlns:a="http://schemas.openxmlformats.org/drawingml/2006/main"/>
-          <a:ln xmlns:a="http://schemas.openxmlformats.org/drawingml/2006/main" w="0">
-            <a:noFill/>
-            <a:prstDash val="solid"/>
-          </a:ln>
-        </p:spPr>
-        <p:txBody>
-          <a:bodyPr xmlns:a="http://schemas.openxmlformats.org/drawingml/2006/main" wrap="square" lIns="0" tIns="0" rIns="0" bIns="0">
-            <a:noAutofit/>
-          </a:bodyPr>
-          <a:lstStyle xmlns:a="http://schemas.openxmlformats.org/drawingml/2006/main">
-            <a:defPPr>
-              <a:defRPr sz="1275" b="0">
-                <a:solidFill>
-                  <a:srgbClr val="777080"/>
-                </a:solidFill>
-                <a:latin typeface="Arial"/>
-                <a:ea typeface="Arial"/>
-                <a:cs typeface="Arial"/>
-              </a:defRPr>
-            </a:defPPr>
-            <a:lvl1pPr>
-              <a:defRPr sz="1275" b="0">
-                <a:solidFill>
-                  <a:srgbClr val="777080"/>
-                </a:solidFill>
-                <a:latin typeface="Arial"/>
-                <a:ea typeface="Arial"/>
-                <a:cs typeface="Arial"/>
-              </a:defRPr>
-            </a:lvl1pPr>
-            <a:lvl2pPr>
-              <a:defRPr sz="1275" b="0">
-                <a:solidFill>
-                  <a:srgbClr val="777080"/>
-                </a:solidFill>
-                <a:latin typeface="Arial"/>
-                <a:ea typeface="Arial"/>
-                <a:cs typeface="Arial"/>
-              </a:defRPr>
-            </a:lvl2pPr>
-            <a:lvl3pPr>
-              <a:defRPr sz="1275" b="0">
-                <a:solidFill>
-                  <a:srgbClr val="777080"/>
-                </a:solidFill>
-                <a:latin typeface="Arial"/>
-                <a:ea typeface="Arial"/>
-                <a:cs typeface="Arial"/>
-              </a:defRPr>
-            </a:lvl3pPr>
-            <a:lvl4pPr>
-              <a:defRPr sz="1275" b="0">
-                <a:solidFill>
-                  <a:srgbClr val="777080"/>
-                </a:solidFill>
-                <a:latin typeface="Arial"/>
-                <a:ea typeface="Arial"/>
-                <a:cs typeface="Arial"/>
-              </a:defRPr>
-            </a:lvl4pPr>
-            <a:lvl5pPr>
-              <a:defRPr sz="1275" b="0">
-                <a:solidFill>
-                  <a:srgbClr val="777080"/>
-                </a:solidFill>
-                <a:latin typeface="Arial"/>
-                <a:ea typeface="Arial"/>
-                <a:cs typeface="Arial"/>
-              </a:defRPr>
-            </a:lvl5pPr>
-            <a:lvl6pPr>
-              <a:defRPr sz="1275" b="0">
-                <a:solidFill>
-                  <a:srgbClr val="777080"/>
-                </a:solidFill>
-                <a:latin typeface="Arial"/>
-                <a:ea typeface="Arial"/>
-                <a:cs typeface="Arial"/>
-              </a:defRPr>
-            </a:lvl6pPr>
-            <a:lvl7pPr>
-              <a:defRPr sz="1275" b="0">
-                <a:solidFill>
-                  <a:srgbClr val="777080"/>
-                </a:solidFill>
-                <a:latin typeface="Arial"/>
-                <a:ea typeface="Arial"/>
-                <a:cs typeface="Arial"/>
-              </a:defRPr>
-            </a:lvl7pPr>
-            <a:lvl8pPr>
-              <a:defRPr sz="1275" b="0">
-                <a:solidFill>
-                  <a:srgbClr val="777080"/>
-                </a:solidFill>
-                <a:latin typeface="Arial"/>
-                <a:ea typeface="Arial"/>
-                <a:cs typeface="Arial"/>
-              </a:defRPr>
-            </a:lvl8pPr>
-            <a:lvl9pPr>
-              <a:defRPr sz="1275" b="0">
-                <a:solidFill>
-                  <a:srgbClr val="777080"/>
-                </a:solidFill>
-                <a:latin typeface="Arial"/>
-                <a:ea typeface="Arial"/>
-                <a:cs typeface="Arial"/>
-              </a:defRPr>
-            </a:lvl9pPr>
-          </a:lstStyle>
-          <a:p xmlns:a="http://schemas.openxmlformats.org/drawingml/2006/main">
-            <a:pPr>
-              <a:defRPr sz="1275" b="0">
-                <a:solidFill>
-                  <a:srgbClr val="777080"/>
-                </a:solidFill>
-                <a:latin typeface="Arial"/>
-                <a:ea typeface="Arial"/>
-                <a:cs typeface="Arial"/>
-              </a:defRPr>
-            </a:pPr>
-            <a:r>
-              <a:rPr sz="1275" b="0">
-                <a:solidFill>
-                  <a:srgbClr val="777080"/>
-                </a:solidFill>
-                <a:latin typeface="Arial"/>
-                <a:ea typeface="Arial"/>
-                <a:cs typeface="Arial"/>
-              </a:rPr>
-              <a:t>El gráfico muestra los ámbitos seleccionados con mayor conteo reportado.</a:t>
-            </a:r>
-          </a:p>
-        </p:txBody>
-      </p:sp>
-    </p:spTree>
-    <p:extLst>
-      <p:ext uri="{BB962C8B-B14F-4D97-AF65-F5344CB8AC3E}">
-        <p14:creationId xmlns:p14="http://schemas.microsoft.com/office/powerpoint/2010/main" val="1830354645"/>
-      </p:ext>
-    </p:extLst>
-  </p:cSld>
-</p:sld>
-</file>
-
 <file path=ppt/slides/slide6.xml><?xml version="1.0" encoding="utf-8"?>
 <p:sld xmlns:p="http://schemas.openxmlformats.org/presentationml/2006/main">
   <p:cSld>
@@ -15296,7 +16680,7 @@
                 <a:ea typeface="Arial"/>
                 <a:cs typeface="Arial"/>
               </a:rPr>
-              <a:t>Servicios de protección integral</a:t>
+              <a:t>Bonos y pensiones</a:t>
             </a:r>
           </a:p>
         </p:txBody>
@@ -15801,6 +17185,1993 @@
                 <a:ea typeface="Arial"/>
                 <a:cs typeface="Arial"/>
               </a:rPr>
+              <a:t>Las 8 provincias con mayor cobertura</a:t>
+            </a:r>
+          </a:p>
+        </p:txBody>
+      </p:sp>
+      <p:graphicFrame>
+        <p:nvGraphicFramePr>
+          <p:cNvPr id="7" name="Chart">
+            <a:extLst xmlns:a="http://schemas.openxmlformats.org/drawingml/2006/main">
+              <a:ext uri="{FF2B5EF4-FFF2-40B4-BE49-F238E27FC236}">
+                <a16:creationId xmlns:a16="http://schemas.microsoft.com/office/drawing/2014/main" id="{916E42B1-0333-452B-903A-D31420004C67}"/>
+              </a:ext>
+            </a:extLst>
+          </p:cNvPr>
+          <p:cNvGraphicFramePr/>
+          <p:nvPr/>
+        </p:nvGraphicFramePr>
+        <p:xfrm>
+          <a:off xmlns:a="http://schemas.openxmlformats.org/drawingml/2006/main" x="552450" y="2247900"/>
+          <a:ext xmlns:a="http://schemas.openxmlformats.org/drawingml/2006/main" cx="6858000" cy="3524250"/>
+        </p:xfrm>
+        <a:graphic xmlns:a="http://schemas.openxmlformats.org/drawingml/2006/main">
+          <a:graphicData uri="http://schemas.openxmlformats.org/drawingml/2006/chart">
+            <c:chart xmlns:r="http://schemas.openxmlformats.org/officeDocument/2006/relationships" xmlns:c="http://schemas.openxmlformats.org/drawingml/2006/chart" r:id="Rc62a2daff4724717"/>
+          </a:graphicData>
+        </a:graphic>
+      </p:graphicFrame>
+      <p:sp>
+        <p:nvSpPr>
+          <p:cNvPr id="8" name="people">
+            <a:extLst xmlns:a="http://schemas.openxmlformats.org/drawingml/2006/main">
+              <a:ext uri="{FF2B5EF4-FFF2-40B4-BE49-F238E27FC236}">
+                <a16:creationId xmlns:a16="http://schemas.microsoft.com/office/drawing/2014/main" id="{CD4D0C3D-AFF2-478D-BDA0-1BBEF6D7A41E}"/>
+              </a:ext>
+            </a:extLst>
+          </p:cNvPr>
+          <p:cNvSpPr>
+            <a:spLocks xmlns:a="http://schemas.openxmlformats.org/drawingml/2006/main" noGrp="1"/>
+          </p:cNvSpPr>
+          <p:nvPr/>
+        </p:nvSpPr>
+        <p:spPr>
+          <a:xfrm xmlns:a="http://schemas.openxmlformats.org/drawingml/2006/main">
+            <a:off x="8191500" y="2266950"/>
+            <a:ext cx="3333750" cy="762000"/>
+          </a:xfrm>
+          <a:prstGeom xmlns:a="http://schemas.openxmlformats.org/drawingml/2006/main" prst="rect">
+            <a:avLst/>
+          </a:prstGeom>
+          <a:noFill xmlns:a="http://schemas.openxmlformats.org/drawingml/2006/main"/>
+          <a:ln xmlns:a="http://schemas.openxmlformats.org/drawingml/2006/main" w="0">
+            <a:noFill/>
+            <a:prstDash val="solid"/>
+          </a:ln>
+        </p:spPr>
+        <p:txBody>
+          <a:bodyPr xmlns:a="http://schemas.openxmlformats.org/drawingml/2006/main" wrap="square" lIns="0" tIns="0" rIns="0" bIns="0">
+            <a:noAutofit/>
+          </a:bodyPr>
+          <a:lstStyle xmlns:a="http://schemas.openxmlformats.org/drawingml/2006/main">
+            <a:defPPr>
+              <a:defRPr sz="4650" b="1">
+                <a:solidFill>
+                  <a:srgbClr val="512F8D"/>
+                </a:solidFill>
+                <a:latin typeface="Arial"/>
+                <a:ea typeface="Arial"/>
+                <a:cs typeface="Arial"/>
+              </a:defRPr>
+            </a:defPPr>
+            <a:lvl1pPr>
+              <a:defRPr sz="4650" b="1">
+                <a:solidFill>
+                  <a:srgbClr val="512F8D"/>
+                </a:solidFill>
+                <a:latin typeface="Arial"/>
+                <a:ea typeface="Arial"/>
+                <a:cs typeface="Arial"/>
+              </a:defRPr>
+            </a:lvl1pPr>
+            <a:lvl2pPr>
+              <a:defRPr sz="4650" b="1">
+                <a:solidFill>
+                  <a:srgbClr val="512F8D"/>
+                </a:solidFill>
+                <a:latin typeface="Arial"/>
+                <a:ea typeface="Arial"/>
+                <a:cs typeface="Arial"/>
+              </a:defRPr>
+            </a:lvl2pPr>
+            <a:lvl3pPr>
+              <a:defRPr sz="4650" b="1">
+                <a:solidFill>
+                  <a:srgbClr val="512F8D"/>
+                </a:solidFill>
+                <a:latin typeface="Arial"/>
+                <a:ea typeface="Arial"/>
+                <a:cs typeface="Arial"/>
+              </a:defRPr>
+            </a:lvl3pPr>
+            <a:lvl4pPr>
+              <a:defRPr sz="4650" b="1">
+                <a:solidFill>
+                  <a:srgbClr val="512F8D"/>
+                </a:solidFill>
+                <a:latin typeface="Arial"/>
+                <a:ea typeface="Arial"/>
+                <a:cs typeface="Arial"/>
+              </a:defRPr>
+            </a:lvl4pPr>
+            <a:lvl5pPr>
+              <a:defRPr sz="4650" b="1">
+                <a:solidFill>
+                  <a:srgbClr val="512F8D"/>
+                </a:solidFill>
+                <a:latin typeface="Arial"/>
+                <a:ea typeface="Arial"/>
+                <a:cs typeface="Arial"/>
+              </a:defRPr>
+            </a:lvl5pPr>
+            <a:lvl6pPr>
+              <a:defRPr sz="4650" b="1">
+                <a:solidFill>
+                  <a:srgbClr val="512F8D"/>
+                </a:solidFill>
+                <a:latin typeface="Arial"/>
+                <a:ea typeface="Arial"/>
+                <a:cs typeface="Arial"/>
+              </a:defRPr>
+            </a:lvl6pPr>
+            <a:lvl7pPr>
+              <a:defRPr sz="4650" b="1">
+                <a:solidFill>
+                  <a:srgbClr val="512F8D"/>
+                </a:solidFill>
+                <a:latin typeface="Arial"/>
+                <a:ea typeface="Arial"/>
+                <a:cs typeface="Arial"/>
+              </a:defRPr>
+            </a:lvl7pPr>
+            <a:lvl8pPr>
+              <a:defRPr sz="4650" b="1">
+                <a:solidFill>
+                  <a:srgbClr val="512F8D"/>
+                </a:solidFill>
+                <a:latin typeface="Arial"/>
+                <a:ea typeface="Arial"/>
+                <a:cs typeface="Arial"/>
+              </a:defRPr>
+            </a:lvl8pPr>
+            <a:lvl9pPr>
+              <a:defRPr sz="4650" b="1">
+                <a:solidFill>
+                  <a:srgbClr val="512F8D"/>
+                </a:solidFill>
+                <a:latin typeface="Arial"/>
+                <a:ea typeface="Arial"/>
+                <a:cs typeface="Arial"/>
+              </a:defRPr>
+            </a:lvl9pPr>
+          </a:lstStyle>
+          <a:p xmlns:a="http://schemas.openxmlformats.org/drawingml/2006/main">
+            <a:pPr>
+              <a:defRPr sz="4650" b="1">
+                <a:solidFill>
+                  <a:srgbClr val="512F8D"/>
+                </a:solidFill>
+                <a:latin typeface="Arial"/>
+                <a:ea typeface="Arial"/>
+                <a:cs typeface="Arial"/>
+              </a:defRPr>
+            </a:pPr>
+            <a:r>
+              <a:rPr sz="4650" b="1">
+                <a:solidFill>
+                  <a:srgbClr val="512F8D"/>
+                </a:solidFill>
+                <a:latin typeface="Arial"/>
+                <a:ea typeface="Arial"/>
+                <a:cs typeface="Arial"/>
+              </a:rPr>
+              <a:t>1.578.019</a:t>
+            </a:r>
+          </a:p>
+        </p:txBody>
+      </p:sp>
+      <p:sp>
+        <p:nvSpPr>
+          <p:cNvPr id="9" name="people-label">
+            <a:extLst xmlns:a="http://schemas.openxmlformats.org/drawingml/2006/main">
+              <a:ext uri="{FF2B5EF4-FFF2-40B4-BE49-F238E27FC236}">
+                <a16:creationId xmlns:a16="http://schemas.microsoft.com/office/drawing/2014/main" id="{E1CDC408-18C3-430E-B0E3-C7E3892D04D8}"/>
+              </a:ext>
+            </a:extLst>
+          </p:cNvPr>
+          <p:cNvSpPr>
+            <a:spLocks xmlns:a="http://schemas.openxmlformats.org/drawingml/2006/main" noGrp="1"/>
+          </p:cNvSpPr>
+          <p:nvPr/>
+        </p:nvSpPr>
+        <p:spPr>
+          <a:xfrm xmlns:a="http://schemas.openxmlformats.org/drawingml/2006/main">
+            <a:off x="8191500" y="3048000"/>
+            <a:ext cx="3238500" cy="666750"/>
+          </a:xfrm>
+          <a:prstGeom xmlns:a="http://schemas.openxmlformats.org/drawingml/2006/main" prst="rect">
+            <a:avLst/>
+          </a:prstGeom>
+          <a:noFill xmlns:a="http://schemas.openxmlformats.org/drawingml/2006/main"/>
+          <a:ln xmlns:a="http://schemas.openxmlformats.org/drawingml/2006/main" w="0">
+            <a:noFill/>
+            <a:prstDash val="solid"/>
+          </a:ln>
+        </p:spPr>
+        <p:txBody>
+          <a:bodyPr xmlns:a="http://schemas.openxmlformats.org/drawingml/2006/main" wrap="square" lIns="0" tIns="0" rIns="0" bIns="0">
+            <a:noAutofit/>
+          </a:bodyPr>
+          <a:lstStyle xmlns:a="http://schemas.openxmlformats.org/drawingml/2006/main">
+            <a:defPPr>
+              <a:defRPr sz="1800" b="0">
+                <a:solidFill>
+                  <a:srgbClr val="777080"/>
+                </a:solidFill>
+                <a:latin typeface="Arial"/>
+                <a:ea typeface="Arial"/>
+                <a:cs typeface="Arial"/>
+              </a:defRPr>
+            </a:defPPr>
+            <a:lvl1pPr>
+              <a:defRPr sz="1800" b="0">
+                <a:solidFill>
+                  <a:srgbClr val="777080"/>
+                </a:solidFill>
+                <a:latin typeface="Arial"/>
+                <a:ea typeface="Arial"/>
+                <a:cs typeface="Arial"/>
+              </a:defRPr>
+            </a:lvl1pPr>
+            <a:lvl2pPr>
+              <a:defRPr sz="1800" b="0">
+                <a:solidFill>
+                  <a:srgbClr val="777080"/>
+                </a:solidFill>
+                <a:latin typeface="Arial"/>
+                <a:ea typeface="Arial"/>
+                <a:cs typeface="Arial"/>
+              </a:defRPr>
+            </a:lvl2pPr>
+            <a:lvl3pPr>
+              <a:defRPr sz="1800" b="0">
+                <a:solidFill>
+                  <a:srgbClr val="777080"/>
+                </a:solidFill>
+                <a:latin typeface="Arial"/>
+                <a:ea typeface="Arial"/>
+                <a:cs typeface="Arial"/>
+              </a:defRPr>
+            </a:lvl3pPr>
+            <a:lvl4pPr>
+              <a:defRPr sz="1800" b="0">
+                <a:solidFill>
+                  <a:srgbClr val="777080"/>
+                </a:solidFill>
+                <a:latin typeface="Arial"/>
+                <a:ea typeface="Arial"/>
+                <a:cs typeface="Arial"/>
+              </a:defRPr>
+            </a:lvl4pPr>
+            <a:lvl5pPr>
+              <a:defRPr sz="1800" b="0">
+                <a:solidFill>
+                  <a:srgbClr val="777080"/>
+                </a:solidFill>
+                <a:latin typeface="Arial"/>
+                <a:ea typeface="Arial"/>
+                <a:cs typeface="Arial"/>
+              </a:defRPr>
+            </a:lvl5pPr>
+            <a:lvl6pPr>
+              <a:defRPr sz="1800" b="0">
+                <a:solidFill>
+                  <a:srgbClr val="777080"/>
+                </a:solidFill>
+                <a:latin typeface="Arial"/>
+                <a:ea typeface="Arial"/>
+                <a:cs typeface="Arial"/>
+              </a:defRPr>
+            </a:lvl6pPr>
+            <a:lvl7pPr>
+              <a:defRPr sz="1800" b="0">
+                <a:solidFill>
+                  <a:srgbClr val="777080"/>
+                </a:solidFill>
+                <a:latin typeface="Arial"/>
+                <a:ea typeface="Arial"/>
+                <a:cs typeface="Arial"/>
+              </a:defRPr>
+            </a:lvl7pPr>
+            <a:lvl8pPr>
+              <a:defRPr sz="1800" b="0">
+                <a:solidFill>
+                  <a:srgbClr val="777080"/>
+                </a:solidFill>
+                <a:latin typeface="Arial"/>
+                <a:ea typeface="Arial"/>
+                <a:cs typeface="Arial"/>
+              </a:defRPr>
+            </a:lvl8pPr>
+            <a:lvl9pPr>
+              <a:defRPr sz="1800" b="0">
+                <a:solidFill>
+                  <a:srgbClr val="777080"/>
+                </a:solidFill>
+                <a:latin typeface="Arial"/>
+                <a:ea typeface="Arial"/>
+                <a:cs typeface="Arial"/>
+              </a:defRPr>
+            </a:lvl9pPr>
+          </a:lstStyle>
+          <a:p xmlns:a="http://schemas.openxmlformats.org/drawingml/2006/main">
+            <a:pPr>
+              <a:defRPr sz="1800" b="0">
+                <a:solidFill>
+                  <a:srgbClr val="777080"/>
+                </a:solidFill>
+                <a:latin typeface="Arial"/>
+                <a:ea typeface="Arial"/>
+                <a:cs typeface="Arial"/>
+              </a:defRPr>
+            </a:pPr>
+            <a:r>
+              <a:rPr sz="1800" b="0">
+                <a:solidFill>
+                  <a:srgbClr val="777080"/>
+                </a:solidFill>
+                <a:latin typeface="Arial"/>
+                <a:ea typeface="Arial"/>
+                <a:cs typeface="Arial"/>
+              </a:rPr>
+              <a:t>Beneficiarios reportados</a:t>
+            </a:r>
+          </a:p>
+        </p:txBody>
+      </p:sp>
+      <p:sp>
+        <p:nvSpPr>
+          <p:cNvPr id="10" name="fiscal">
+            <a:extLst xmlns:a="http://schemas.openxmlformats.org/drawingml/2006/main">
+              <a:ext uri="{FF2B5EF4-FFF2-40B4-BE49-F238E27FC236}">
+                <a16:creationId xmlns:a16="http://schemas.microsoft.com/office/drawing/2014/main" id="{1445C50D-5EC4-4DB4-896C-8C3309CAD99A}"/>
+              </a:ext>
+            </a:extLst>
+          </p:cNvPr>
+          <p:cNvSpPr>
+            <a:spLocks xmlns:a="http://schemas.openxmlformats.org/drawingml/2006/main" noGrp="1"/>
+          </p:cNvSpPr>
+          <p:nvPr/>
+        </p:nvSpPr>
+        <p:spPr>
+          <a:xfrm xmlns:a="http://schemas.openxmlformats.org/drawingml/2006/main">
+            <a:off x="8191500" y="3876675"/>
+            <a:ext cx="3238500" cy="542925"/>
+          </a:xfrm>
+          <a:prstGeom xmlns:a="http://schemas.openxmlformats.org/drawingml/2006/main" prst="rect">
+            <a:avLst/>
+          </a:prstGeom>
+          <a:noFill xmlns:a="http://schemas.openxmlformats.org/drawingml/2006/main"/>
+          <a:ln xmlns:a="http://schemas.openxmlformats.org/drawingml/2006/main" w="0">
+            <a:noFill/>
+            <a:prstDash val="solid"/>
+          </a:ln>
+        </p:spPr>
+        <p:txBody>
+          <a:bodyPr xmlns:a="http://schemas.openxmlformats.org/drawingml/2006/main" wrap="square" lIns="0" tIns="0" rIns="0" bIns="0">
+            <a:noAutofit/>
+          </a:bodyPr>
+          <a:lstStyle xmlns:a="http://schemas.openxmlformats.org/drawingml/2006/main">
+            <a:defPPr>
+              <a:defRPr sz="3225" b="1">
+                <a:solidFill>
+                  <a:srgbClr val="20202B"/>
+                </a:solidFill>
+                <a:latin typeface="Arial"/>
+                <a:ea typeface="Arial"/>
+                <a:cs typeface="Arial"/>
+              </a:defRPr>
+            </a:defPPr>
+            <a:lvl1pPr>
+              <a:defRPr sz="3225" b="1">
+                <a:solidFill>
+                  <a:srgbClr val="20202B"/>
+                </a:solidFill>
+                <a:latin typeface="Arial"/>
+                <a:ea typeface="Arial"/>
+                <a:cs typeface="Arial"/>
+              </a:defRPr>
+            </a:lvl1pPr>
+            <a:lvl2pPr>
+              <a:defRPr sz="3225" b="1">
+                <a:solidFill>
+                  <a:srgbClr val="20202B"/>
+                </a:solidFill>
+                <a:latin typeface="Arial"/>
+                <a:ea typeface="Arial"/>
+                <a:cs typeface="Arial"/>
+              </a:defRPr>
+            </a:lvl2pPr>
+            <a:lvl3pPr>
+              <a:defRPr sz="3225" b="1">
+                <a:solidFill>
+                  <a:srgbClr val="20202B"/>
+                </a:solidFill>
+                <a:latin typeface="Arial"/>
+                <a:ea typeface="Arial"/>
+                <a:cs typeface="Arial"/>
+              </a:defRPr>
+            </a:lvl3pPr>
+            <a:lvl4pPr>
+              <a:defRPr sz="3225" b="1">
+                <a:solidFill>
+                  <a:srgbClr val="20202B"/>
+                </a:solidFill>
+                <a:latin typeface="Arial"/>
+                <a:ea typeface="Arial"/>
+                <a:cs typeface="Arial"/>
+              </a:defRPr>
+            </a:lvl4pPr>
+            <a:lvl5pPr>
+              <a:defRPr sz="3225" b="1">
+                <a:solidFill>
+                  <a:srgbClr val="20202B"/>
+                </a:solidFill>
+                <a:latin typeface="Arial"/>
+                <a:ea typeface="Arial"/>
+                <a:cs typeface="Arial"/>
+              </a:defRPr>
+            </a:lvl5pPr>
+            <a:lvl6pPr>
+              <a:defRPr sz="3225" b="1">
+                <a:solidFill>
+                  <a:srgbClr val="20202B"/>
+                </a:solidFill>
+                <a:latin typeface="Arial"/>
+                <a:ea typeface="Arial"/>
+                <a:cs typeface="Arial"/>
+              </a:defRPr>
+            </a:lvl6pPr>
+            <a:lvl7pPr>
+              <a:defRPr sz="3225" b="1">
+                <a:solidFill>
+                  <a:srgbClr val="20202B"/>
+                </a:solidFill>
+                <a:latin typeface="Arial"/>
+                <a:ea typeface="Arial"/>
+                <a:cs typeface="Arial"/>
+              </a:defRPr>
+            </a:lvl7pPr>
+            <a:lvl8pPr>
+              <a:defRPr sz="3225" b="1">
+                <a:solidFill>
+                  <a:srgbClr val="20202B"/>
+                </a:solidFill>
+                <a:latin typeface="Arial"/>
+                <a:ea typeface="Arial"/>
+                <a:cs typeface="Arial"/>
+              </a:defRPr>
+            </a:lvl8pPr>
+            <a:lvl9pPr>
+              <a:defRPr sz="3225" b="1">
+                <a:solidFill>
+                  <a:srgbClr val="20202B"/>
+                </a:solidFill>
+                <a:latin typeface="Arial"/>
+                <a:ea typeface="Arial"/>
+                <a:cs typeface="Arial"/>
+              </a:defRPr>
+            </a:lvl9pPr>
+          </a:lstStyle>
+          <a:p xmlns:a="http://schemas.openxmlformats.org/drawingml/2006/main">
+            <a:pPr>
+              <a:defRPr sz="3225" b="1">
+                <a:solidFill>
+                  <a:srgbClr val="20202B"/>
+                </a:solidFill>
+                <a:latin typeface="Arial"/>
+                <a:ea typeface="Arial"/>
+                <a:cs typeface="Arial"/>
+              </a:defRPr>
+            </a:pPr>
+            <a:r>
+              <a:rPr sz="3225" b="1">
+                <a:solidFill>
+                  <a:srgbClr val="20202B"/>
+                </a:solidFill>
+                <a:latin typeface="Arial"/>
+                <a:ea typeface="Arial"/>
+                <a:cs typeface="Arial"/>
+              </a:rPr>
+              <a:t>USD 1.011,25</a:t>
+            </a:r>
+          </a:p>
+        </p:txBody>
+      </p:sp>
+      <p:sp>
+        <p:nvSpPr>
+          <p:cNvPr id="11" name="fiscal-label">
+            <a:extLst xmlns:a="http://schemas.openxmlformats.org/drawingml/2006/main">
+              <a:ext uri="{FF2B5EF4-FFF2-40B4-BE49-F238E27FC236}">
+                <a16:creationId xmlns:a16="http://schemas.microsoft.com/office/drawing/2014/main" id="{AC386503-1134-4017-98DE-7AA63B198C62}"/>
+              </a:ext>
+            </a:extLst>
+          </p:cNvPr>
+          <p:cNvSpPr>
+            <a:spLocks xmlns:a="http://schemas.openxmlformats.org/drawingml/2006/main" noGrp="1"/>
+          </p:cNvSpPr>
+          <p:nvPr/>
+        </p:nvSpPr>
+        <p:spPr>
+          <a:xfrm xmlns:a="http://schemas.openxmlformats.org/drawingml/2006/main">
+            <a:off x="8191500" y="4438650"/>
+            <a:ext cx="3238500" cy="552450"/>
+          </a:xfrm>
+          <a:prstGeom xmlns:a="http://schemas.openxmlformats.org/drawingml/2006/main" prst="rect">
+            <a:avLst/>
+          </a:prstGeom>
+          <a:noFill xmlns:a="http://schemas.openxmlformats.org/drawingml/2006/main"/>
+          <a:ln xmlns:a="http://schemas.openxmlformats.org/drawingml/2006/main" w="0">
+            <a:noFill/>
+            <a:prstDash val="solid"/>
+          </a:ln>
+        </p:spPr>
+        <p:txBody>
+          <a:bodyPr xmlns:a="http://schemas.openxmlformats.org/drawingml/2006/main" wrap="square" lIns="0" tIns="0" rIns="0" bIns="0">
+            <a:noAutofit/>
+          </a:bodyPr>
+          <a:lstStyle xmlns:a="http://schemas.openxmlformats.org/drawingml/2006/main">
+            <a:defPPr>
+              <a:defRPr sz="1575" b="0">
+                <a:solidFill>
+                  <a:srgbClr val="777080"/>
+                </a:solidFill>
+                <a:latin typeface="Arial"/>
+                <a:ea typeface="Arial"/>
+                <a:cs typeface="Arial"/>
+              </a:defRPr>
+            </a:defPPr>
+            <a:lvl1pPr>
+              <a:defRPr sz="1575" b="0">
+                <a:solidFill>
+                  <a:srgbClr val="777080"/>
+                </a:solidFill>
+                <a:latin typeface="Arial"/>
+                <a:ea typeface="Arial"/>
+                <a:cs typeface="Arial"/>
+              </a:defRPr>
+            </a:lvl1pPr>
+            <a:lvl2pPr>
+              <a:defRPr sz="1575" b="0">
+                <a:solidFill>
+                  <a:srgbClr val="777080"/>
+                </a:solidFill>
+                <a:latin typeface="Arial"/>
+                <a:ea typeface="Arial"/>
+                <a:cs typeface="Arial"/>
+              </a:defRPr>
+            </a:lvl2pPr>
+            <a:lvl3pPr>
+              <a:defRPr sz="1575" b="0">
+                <a:solidFill>
+                  <a:srgbClr val="777080"/>
+                </a:solidFill>
+                <a:latin typeface="Arial"/>
+                <a:ea typeface="Arial"/>
+                <a:cs typeface="Arial"/>
+              </a:defRPr>
+            </a:lvl3pPr>
+            <a:lvl4pPr>
+              <a:defRPr sz="1575" b="0">
+                <a:solidFill>
+                  <a:srgbClr val="777080"/>
+                </a:solidFill>
+                <a:latin typeface="Arial"/>
+                <a:ea typeface="Arial"/>
+                <a:cs typeface="Arial"/>
+              </a:defRPr>
+            </a:lvl4pPr>
+            <a:lvl5pPr>
+              <a:defRPr sz="1575" b="0">
+                <a:solidFill>
+                  <a:srgbClr val="777080"/>
+                </a:solidFill>
+                <a:latin typeface="Arial"/>
+                <a:ea typeface="Arial"/>
+                <a:cs typeface="Arial"/>
+              </a:defRPr>
+            </a:lvl5pPr>
+            <a:lvl6pPr>
+              <a:defRPr sz="1575" b="0">
+                <a:solidFill>
+                  <a:srgbClr val="777080"/>
+                </a:solidFill>
+                <a:latin typeface="Arial"/>
+                <a:ea typeface="Arial"/>
+                <a:cs typeface="Arial"/>
+              </a:defRPr>
+            </a:lvl6pPr>
+            <a:lvl7pPr>
+              <a:defRPr sz="1575" b="0">
+                <a:solidFill>
+                  <a:srgbClr val="777080"/>
+                </a:solidFill>
+                <a:latin typeface="Arial"/>
+                <a:ea typeface="Arial"/>
+                <a:cs typeface="Arial"/>
+              </a:defRPr>
+            </a:lvl7pPr>
+            <a:lvl8pPr>
+              <a:defRPr sz="1575" b="0">
+                <a:solidFill>
+                  <a:srgbClr val="777080"/>
+                </a:solidFill>
+                <a:latin typeface="Arial"/>
+                <a:ea typeface="Arial"/>
+                <a:cs typeface="Arial"/>
+              </a:defRPr>
+            </a:lvl8pPr>
+            <a:lvl9pPr>
+              <a:defRPr sz="1575" b="0">
+                <a:solidFill>
+                  <a:srgbClr val="777080"/>
+                </a:solidFill>
+                <a:latin typeface="Arial"/>
+                <a:ea typeface="Arial"/>
+                <a:cs typeface="Arial"/>
+              </a:defRPr>
+            </a:lvl9pPr>
+          </a:lstStyle>
+          <a:p xmlns:a="http://schemas.openxmlformats.org/drawingml/2006/main">
+            <a:pPr>
+              <a:defRPr sz="1575" b="0">
+                <a:solidFill>
+                  <a:srgbClr val="777080"/>
+                </a:solidFill>
+                <a:latin typeface="Arial"/>
+                <a:ea typeface="Arial"/>
+                <a:cs typeface="Arial"/>
+              </a:defRPr>
+            </a:pPr>
+            <a:r>
+              <a:rPr sz="1575" b="0">
+                <a:solidFill>
+                  <a:srgbClr val="777080"/>
+                </a:solidFill>
+                <a:latin typeface="Arial"/>
+                <a:ea typeface="Arial"/>
+                <a:cs typeface="Arial"/>
+              </a:rPr>
+              <a:t>millones en el acumulado fiscal 2026</a:t>
+            </a:r>
+          </a:p>
+        </p:txBody>
+      </p:sp>
+      <p:sp>
+        <p:nvSpPr>
+          <p:cNvPr id="12" name="extra-value">
+            <a:extLst xmlns:a="http://schemas.openxmlformats.org/drawingml/2006/main">
+              <a:ext uri="{FF2B5EF4-FFF2-40B4-BE49-F238E27FC236}">
+                <a16:creationId xmlns:a16="http://schemas.microsoft.com/office/drawing/2014/main" id="{2F36CA4E-C032-43B3-8BB7-AD21BF2E68C4}"/>
+              </a:ext>
+            </a:extLst>
+          </p:cNvPr>
+          <p:cNvSpPr>
+            <a:spLocks xmlns:a="http://schemas.openxmlformats.org/drawingml/2006/main" noGrp="1"/>
+          </p:cNvSpPr>
+          <p:nvPr/>
+        </p:nvSpPr>
+        <p:spPr>
+          <a:xfrm xmlns:a="http://schemas.openxmlformats.org/drawingml/2006/main">
+            <a:off x="8191500" y="5095875"/>
+            <a:ext cx="3238500" cy="476250"/>
+          </a:xfrm>
+          <a:prstGeom xmlns:a="http://schemas.openxmlformats.org/drawingml/2006/main" prst="rect">
+            <a:avLst/>
+          </a:prstGeom>
+          <a:noFill xmlns:a="http://schemas.openxmlformats.org/drawingml/2006/main"/>
+          <a:ln xmlns:a="http://schemas.openxmlformats.org/drawingml/2006/main" w="0">
+            <a:noFill/>
+            <a:prstDash val="solid"/>
+          </a:ln>
+        </p:spPr>
+        <p:txBody>
+          <a:bodyPr xmlns:a="http://schemas.openxmlformats.org/drawingml/2006/main" wrap="square" lIns="0" tIns="0" rIns="0" bIns="0">
+            <a:noAutofit/>
+          </a:bodyPr>
+          <a:lstStyle xmlns:a="http://schemas.openxmlformats.org/drawingml/2006/main">
+            <a:defPPr>
+              <a:defRPr sz="2850" b="1">
+                <a:solidFill>
+                  <a:srgbClr val="20202B"/>
+                </a:solidFill>
+                <a:latin typeface="Arial"/>
+                <a:ea typeface="Arial"/>
+                <a:cs typeface="Arial"/>
+              </a:defRPr>
+            </a:defPPr>
+            <a:lvl1pPr>
+              <a:defRPr sz="2850" b="1">
+                <a:solidFill>
+                  <a:srgbClr val="20202B"/>
+                </a:solidFill>
+                <a:latin typeface="Arial"/>
+                <a:ea typeface="Arial"/>
+                <a:cs typeface="Arial"/>
+              </a:defRPr>
+            </a:lvl1pPr>
+            <a:lvl2pPr>
+              <a:defRPr sz="2850" b="1">
+                <a:solidFill>
+                  <a:srgbClr val="20202B"/>
+                </a:solidFill>
+                <a:latin typeface="Arial"/>
+                <a:ea typeface="Arial"/>
+                <a:cs typeface="Arial"/>
+              </a:defRPr>
+            </a:lvl2pPr>
+            <a:lvl3pPr>
+              <a:defRPr sz="2850" b="1">
+                <a:solidFill>
+                  <a:srgbClr val="20202B"/>
+                </a:solidFill>
+                <a:latin typeface="Arial"/>
+                <a:ea typeface="Arial"/>
+                <a:cs typeface="Arial"/>
+              </a:defRPr>
+            </a:lvl3pPr>
+            <a:lvl4pPr>
+              <a:defRPr sz="2850" b="1">
+                <a:solidFill>
+                  <a:srgbClr val="20202B"/>
+                </a:solidFill>
+                <a:latin typeface="Arial"/>
+                <a:ea typeface="Arial"/>
+                <a:cs typeface="Arial"/>
+              </a:defRPr>
+            </a:lvl4pPr>
+            <a:lvl5pPr>
+              <a:defRPr sz="2850" b="1">
+                <a:solidFill>
+                  <a:srgbClr val="20202B"/>
+                </a:solidFill>
+                <a:latin typeface="Arial"/>
+                <a:ea typeface="Arial"/>
+                <a:cs typeface="Arial"/>
+              </a:defRPr>
+            </a:lvl5pPr>
+            <a:lvl6pPr>
+              <a:defRPr sz="2850" b="1">
+                <a:solidFill>
+                  <a:srgbClr val="20202B"/>
+                </a:solidFill>
+                <a:latin typeface="Arial"/>
+                <a:ea typeface="Arial"/>
+                <a:cs typeface="Arial"/>
+              </a:defRPr>
+            </a:lvl6pPr>
+            <a:lvl7pPr>
+              <a:defRPr sz="2850" b="1">
+                <a:solidFill>
+                  <a:srgbClr val="20202B"/>
+                </a:solidFill>
+                <a:latin typeface="Arial"/>
+                <a:ea typeface="Arial"/>
+                <a:cs typeface="Arial"/>
+              </a:defRPr>
+            </a:lvl7pPr>
+            <a:lvl8pPr>
+              <a:defRPr sz="2850" b="1">
+                <a:solidFill>
+                  <a:srgbClr val="20202B"/>
+                </a:solidFill>
+                <a:latin typeface="Arial"/>
+                <a:ea typeface="Arial"/>
+                <a:cs typeface="Arial"/>
+              </a:defRPr>
+            </a:lvl8pPr>
+            <a:lvl9pPr>
+              <a:defRPr sz="2850" b="1">
+                <a:solidFill>
+                  <a:srgbClr val="20202B"/>
+                </a:solidFill>
+                <a:latin typeface="Arial"/>
+                <a:ea typeface="Arial"/>
+                <a:cs typeface="Arial"/>
+              </a:defRPr>
+            </a:lvl9pPr>
+          </a:lstStyle>
+          <a:p xmlns:a="http://schemas.openxmlformats.org/drawingml/2006/main">
+            <a:pPr>
+              <a:defRPr sz="2850" b="1">
+                <a:solidFill>
+                  <a:srgbClr val="20202B"/>
+                </a:solidFill>
+                <a:latin typeface="Arial"/>
+                <a:ea typeface="Arial"/>
+                <a:cs typeface="Arial"/>
+              </a:defRPr>
+            </a:pPr>
+            <a:r>
+              <a:rPr sz="2850" b="1">
+                <a:solidFill>
+                  <a:srgbClr val="20202B"/>
+                </a:solidFill>
+                <a:latin typeface="Arial"/>
+                <a:ea typeface="Arial"/>
+                <a:cs typeface="Arial"/>
+              </a:rPr>
+              <a:t>USD 3.758,99</a:t>
+            </a:r>
+          </a:p>
+        </p:txBody>
+      </p:sp>
+      <p:sp>
+        <p:nvSpPr>
+          <p:cNvPr id="13" name="extra-label">
+            <a:extLst xmlns:a="http://schemas.openxmlformats.org/drawingml/2006/main">
+              <a:ext uri="{FF2B5EF4-FFF2-40B4-BE49-F238E27FC236}">
+                <a16:creationId xmlns:a16="http://schemas.microsoft.com/office/drawing/2014/main" id="{00D39701-90F9-451C-897F-269ABB662A43}"/>
+              </a:ext>
+            </a:extLst>
+          </p:cNvPr>
+          <p:cNvSpPr>
+            <a:spLocks xmlns:a="http://schemas.openxmlformats.org/drawingml/2006/main" noGrp="1"/>
+          </p:cNvSpPr>
+          <p:nvPr/>
+        </p:nvSpPr>
+        <p:spPr>
+          <a:xfrm xmlns:a="http://schemas.openxmlformats.org/drawingml/2006/main">
+            <a:off x="8191500" y="5581650"/>
+            <a:ext cx="3238500" cy="495300"/>
+          </a:xfrm>
+          <a:prstGeom xmlns:a="http://schemas.openxmlformats.org/drawingml/2006/main" prst="rect">
+            <a:avLst/>
+          </a:prstGeom>
+          <a:noFill xmlns:a="http://schemas.openxmlformats.org/drawingml/2006/main"/>
+          <a:ln xmlns:a="http://schemas.openxmlformats.org/drawingml/2006/main" w="0">
+            <a:noFill/>
+            <a:prstDash val="solid"/>
+          </a:ln>
+        </p:spPr>
+        <p:txBody>
+          <a:bodyPr xmlns:a="http://schemas.openxmlformats.org/drawingml/2006/main" wrap="square" lIns="0" tIns="0" rIns="0" bIns="0">
+            <a:noAutofit/>
+          </a:bodyPr>
+          <a:lstStyle xmlns:a="http://schemas.openxmlformats.org/drawingml/2006/main">
+            <a:defPPr>
+              <a:defRPr sz="1500" b="0">
+                <a:solidFill>
+                  <a:srgbClr val="777080"/>
+                </a:solidFill>
+                <a:latin typeface="Arial"/>
+                <a:ea typeface="Arial"/>
+                <a:cs typeface="Arial"/>
+              </a:defRPr>
+            </a:defPPr>
+            <a:lvl1pPr>
+              <a:defRPr sz="1500" b="0">
+                <a:solidFill>
+                  <a:srgbClr val="777080"/>
+                </a:solidFill>
+                <a:latin typeface="Arial"/>
+                <a:ea typeface="Arial"/>
+                <a:cs typeface="Arial"/>
+              </a:defRPr>
+            </a:lvl1pPr>
+            <a:lvl2pPr>
+              <a:defRPr sz="1500" b="0">
+                <a:solidFill>
+                  <a:srgbClr val="777080"/>
+                </a:solidFill>
+                <a:latin typeface="Arial"/>
+                <a:ea typeface="Arial"/>
+                <a:cs typeface="Arial"/>
+              </a:defRPr>
+            </a:lvl2pPr>
+            <a:lvl3pPr>
+              <a:defRPr sz="1500" b="0">
+                <a:solidFill>
+                  <a:srgbClr val="777080"/>
+                </a:solidFill>
+                <a:latin typeface="Arial"/>
+                <a:ea typeface="Arial"/>
+                <a:cs typeface="Arial"/>
+              </a:defRPr>
+            </a:lvl3pPr>
+            <a:lvl4pPr>
+              <a:defRPr sz="1500" b="0">
+                <a:solidFill>
+                  <a:srgbClr val="777080"/>
+                </a:solidFill>
+                <a:latin typeface="Arial"/>
+                <a:ea typeface="Arial"/>
+                <a:cs typeface="Arial"/>
+              </a:defRPr>
+            </a:lvl4pPr>
+            <a:lvl5pPr>
+              <a:defRPr sz="1500" b="0">
+                <a:solidFill>
+                  <a:srgbClr val="777080"/>
+                </a:solidFill>
+                <a:latin typeface="Arial"/>
+                <a:ea typeface="Arial"/>
+                <a:cs typeface="Arial"/>
+              </a:defRPr>
+            </a:lvl5pPr>
+            <a:lvl6pPr>
+              <a:defRPr sz="1500" b="0">
+                <a:solidFill>
+                  <a:srgbClr val="777080"/>
+                </a:solidFill>
+                <a:latin typeface="Arial"/>
+                <a:ea typeface="Arial"/>
+                <a:cs typeface="Arial"/>
+              </a:defRPr>
+            </a:lvl6pPr>
+            <a:lvl7pPr>
+              <a:defRPr sz="1500" b="0">
+                <a:solidFill>
+                  <a:srgbClr val="777080"/>
+                </a:solidFill>
+                <a:latin typeface="Arial"/>
+                <a:ea typeface="Arial"/>
+                <a:cs typeface="Arial"/>
+              </a:defRPr>
+            </a:lvl7pPr>
+            <a:lvl8pPr>
+              <a:defRPr sz="1500" b="0">
+                <a:solidFill>
+                  <a:srgbClr val="777080"/>
+                </a:solidFill>
+                <a:latin typeface="Arial"/>
+                <a:ea typeface="Arial"/>
+                <a:cs typeface="Arial"/>
+              </a:defRPr>
+            </a:lvl8pPr>
+            <a:lvl9pPr>
+              <a:defRPr sz="1500" b="0">
+                <a:solidFill>
+                  <a:srgbClr val="777080"/>
+                </a:solidFill>
+                <a:latin typeface="Arial"/>
+                <a:ea typeface="Arial"/>
+                <a:cs typeface="Arial"/>
+              </a:defRPr>
+            </a:lvl9pPr>
+          </a:lstStyle>
+          <a:p xmlns:a="http://schemas.openxmlformats.org/drawingml/2006/main">
+            <a:pPr>
+              <a:defRPr sz="1500" b="0">
+                <a:solidFill>
+                  <a:srgbClr val="777080"/>
+                </a:solidFill>
+                <a:latin typeface="Arial"/>
+                <a:ea typeface="Arial"/>
+                <a:cs typeface="Arial"/>
+              </a:defRPr>
+            </a:pPr>
+            <a:r>
+              <a:rPr sz="1500" b="0">
+                <a:solidFill>
+                  <a:srgbClr val="777080"/>
+                </a:solidFill>
+                <a:latin typeface="Arial"/>
+                <a:ea typeface="Arial"/>
+                <a:cs typeface="Arial"/>
+              </a:rPr>
+              <a:t>millones en el acumulado de gobierno</a:t>
+            </a:r>
+          </a:p>
+        </p:txBody>
+      </p:sp>
+      <p:sp>
+        <p:nvSpPr>
+          <p:cNvPr id="14" name="count-note">
+            <a:extLst xmlns:a="http://schemas.openxmlformats.org/drawingml/2006/main">
+              <a:ext uri="{FF2B5EF4-FFF2-40B4-BE49-F238E27FC236}">
+                <a16:creationId xmlns:a16="http://schemas.microsoft.com/office/drawing/2014/main" id="{9FD4FD76-6F72-4B1E-B4E6-FA703ABFDAFF}"/>
+              </a:ext>
+            </a:extLst>
+          </p:cNvPr>
+          <p:cNvSpPr>
+            <a:spLocks xmlns:a="http://schemas.openxmlformats.org/drawingml/2006/main" noGrp="1"/>
+          </p:cNvSpPr>
+          <p:nvPr/>
+        </p:nvSpPr>
+        <p:spPr>
+          <a:xfrm xmlns:a="http://schemas.openxmlformats.org/drawingml/2006/main">
+            <a:off x="685800" y="5953125"/>
+            <a:ext cx="6953250" cy="361950"/>
+          </a:xfrm>
+          <a:prstGeom xmlns:a="http://schemas.openxmlformats.org/drawingml/2006/main" prst="rect">
+            <a:avLst/>
+          </a:prstGeom>
+          <a:noFill xmlns:a="http://schemas.openxmlformats.org/drawingml/2006/main"/>
+          <a:ln xmlns:a="http://schemas.openxmlformats.org/drawingml/2006/main" w="0">
+            <a:noFill/>
+            <a:prstDash val="solid"/>
+          </a:ln>
+        </p:spPr>
+        <p:txBody>
+          <a:bodyPr xmlns:a="http://schemas.openxmlformats.org/drawingml/2006/main" wrap="square" lIns="0" tIns="0" rIns="0" bIns="0">
+            <a:noAutofit/>
+          </a:bodyPr>
+          <a:lstStyle xmlns:a="http://schemas.openxmlformats.org/drawingml/2006/main">
+            <a:defPPr>
+              <a:defRPr sz="1275" b="0">
+                <a:solidFill>
+                  <a:srgbClr val="777080"/>
+                </a:solidFill>
+                <a:latin typeface="Arial"/>
+                <a:ea typeface="Arial"/>
+                <a:cs typeface="Arial"/>
+              </a:defRPr>
+            </a:defPPr>
+            <a:lvl1pPr>
+              <a:defRPr sz="1275" b="0">
+                <a:solidFill>
+                  <a:srgbClr val="777080"/>
+                </a:solidFill>
+                <a:latin typeface="Arial"/>
+                <a:ea typeface="Arial"/>
+                <a:cs typeface="Arial"/>
+              </a:defRPr>
+            </a:lvl1pPr>
+            <a:lvl2pPr>
+              <a:defRPr sz="1275" b="0">
+                <a:solidFill>
+                  <a:srgbClr val="777080"/>
+                </a:solidFill>
+                <a:latin typeface="Arial"/>
+                <a:ea typeface="Arial"/>
+                <a:cs typeface="Arial"/>
+              </a:defRPr>
+            </a:lvl2pPr>
+            <a:lvl3pPr>
+              <a:defRPr sz="1275" b="0">
+                <a:solidFill>
+                  <a:srgbClr val="777080"/>
+                </a:solidFill>
+                <a:latin typeface="Arial"/>
+                <a:ea typeface="Arial"/>
+                <a:cs typeface="Arial"/>
+              </a:defRPr>
+            </a:lvl3pPr>
+            <a:lvl4pPr>
+              <a:defRPr sz="1275" b="0">
+                <a:solidFill>
+                  <a:srgbClr val="777080"/>
+                </a:solidFill>
+                <a:latin typeface="Arial"/>
+                <a:ea typeface="Arial"/>
+                <a:cs typeface="Arial"/>
+              </a:defRPr>
+            </a:lvl4pPr>
+            <a:lvl5pPr>
+              <a:defRPr sz="1275" b="0">
+                <a:solidFill>
+                  <a:srgbClr val="777080"/>
+                </a:solidFill>
+                <a:latin typeface="Arial"/>
+                <a:ea typeface="Arial"/>
+                <a:cs typeface="Arial"/>
+              </a:defRPr>
+            </a:lvl5pPr>
+            <a:lvl6pPr>
+              <a:defRPr sz="1275" b="0">
+                <a:solidFill>
+                  <a:srgbClr val="777080"/>
+                </a:solidFill>
+                <a:latin typeface="Arial"/>
+                <a:ea typeface="Arial"/>
+                <a:cs typeface="Arial"/>
+              </a:defRPr>
+            </a:lvl6pPr>
+            <a:lvl7pPr>
+              <a:defRPr sz="1275" b="0">
+                <a:solidFill>
+                  <a:srgbClr val="777080"/>
+                </a:solidFill>
+                <a:latin typeface="Arial"/>
+                <a:ea typeface="Arial"/>
+                <a:cs typeface="Arial"/>
+              </a:defRPr>
+            </a:lvl7pPr>
+            <a:lvl8pPr>
+              <a:defRPr sz="1275" b="0">
+                <a:solidFill>
+                  <a:srgbClr val="777080"/>
+                </a:solidFill>
+                <a:latin typeface="Arial"/>
+                <a:ea typeface="Arial"/>
+                <a:cs typeface="Arial"/>
+              </a:defRPr>
+            </a:lvl8pPr>
+            <a:lvl9pPr>
+              <a:defRPr sz="1275" b="0">
+                <a:solidFill>
+                  <a:srgbClr val="777080"/>
+                </a:solidFill>
+                <a:latin typeface="Arial"/>
+                <a:ea typeface="Arial"/>
+                <a:cs typeface="Arial"/>
+              </a:defRPr>
+            </a:lvl9pPr>
+          </a:lstStyle>
+          <a:p xmlns:a="http://schemas.openxmlformats.org/drawingml/2006/main">
+            <a:pPr>
+              <a:defRPr sz="1275" b="0">
+                <a:solidFill>
+                  <a:srgbClr val="777080"/>
+                </a:solidFill>
+                <a:latin typeface="Arial"/>
+                <a:ea typeface="Arial"/>
+                <a:cs typeface="Arial"/>
+              </a:defRPr>
+            </a:pPr>
+            <a:r>
+              <a:rPr sz="1275" b="0">
+                <a:solidFill>
+                  <a:srgbClr val="777080"/>
+                </a:solidFill>
+                <a:latin typeface="Arial"/>
+                <a:ea typeface="Arial"/>
+                <a:cs typeface="Arial"/>
+              </a:rPr>
+              <a:t>El gráfico muestra las provincias seleccionadas con mayor conteo reportado.</a:t>
+            </a:r>
+          </a:p>
+        </p:txBody>
+      </p:sp>
+    </p:spTree>
+    <p:extLst>
+      <p:ext uri="{BB962C8B-B14F-4D97-AF65-F5344CB8AC3E}">
+        <p14:creationId xmlns:p14="http://schemas.microsoft.com/office/powerpoint/2010/main" val="1830354645"/>
+      </p:ext>
+    </p:extLst>
+  </p:cSld>
+</p:sld>
+</file>
+
+<file path=ppt/slides/slide7.xml><?xml version="1.0" encoding="utf-8"?>
+<p:sld xmlns:p="http://schemas.openxmlformats.org/presentationml/2006/main">
+  <p:cSld>
+    <p:bg>
+      <p:bgPr>
+        <a:solidFill xmlns:a="http://schemas.openxmlformats.org/drawingml/2006/main">
+          <a:srgbClr val="FFFFFF"/>
+        </a:solidFill>
+      </p:bgPr>
+    </p:bg>
+    <p:spTree>
+      <p:nvGrpSpPr>
+        <p:cNvPr id="1" name=""/>
+        <p:cNvGrpSpPr/>
+        <p:nvPr/>
+      </p:nvGrpSpPr>
+      <p:grpSpPr>
+        <a:xfrm xmlns:a="http://schemas.openxmlformats.org/drawingml/2006/main"/>
+      </p:grpSpPr>
+      <p:sp>
+        <p:nvSpPr>
+          <p:cNvPr id="15" name="eyebrow">
+            <a:extLst xmlns:a="http://schemas.openxmlformats.org/drawingml/2006/main">
+              <a:ext uri="{FF2B5EF4-FFF2-40B4-BE49-F238E27FC236}">
+                <a16:creationId xmlns:a16="http://schemas.microsoft.com/office/drawing/2014/main" id="{A2F39FF5-86E4-4158-9343-A95E1D71F4B9}"/>
+              </a:ext>
+            </a:extLst>
+          </p:cNvPr>
+          <p:cNvSpPr>
+            <a:spLocks xmlns:a="http://schemas.openxmlformats.org/drawingml/2006/main" noGrp="1"/>
+          </p:cNvSpPr>
+          <p:nvPr/>
+        </p:nvSpPr>
+        <p:spPr>
+          <a:xfrm xmlns:a="http://schemas.openxmlformats.org/drawingml/2006/main">
+            <a:off x="685800" y="361950"/>
+            <a:ext cx="6858000" cy="238125"/>
+          </a:xfrm>
+          <a:prstGeom xmlns:a="http://schemas.openxmlformats.org/drawingml/2006/main" prst="rect">
+            <a:avLst/>
+          </a:prstGeom>
+          <a:noFill xmlns:a="http://schemas.openxmlformats.org/drawingml/2006/main"/>
+          <a:ln xmlns:a="http://schemas.openxmlformats.org/drawingml/2006/main" w="0">
+            <a:noFill/>
+            <a:prstDash val="solid"/>
+          </a:ln>
+        </p:spPr>
+        <p:txBody>
+          <a:bodyPr xmlns:a="http://schemas.openxmlformats.org/drawingml/2006/main" wrap="square" lIns="0" tIns="0" rIns="0" bIns="0">
+            <a:noAutofit/>
+          </a:bodyPr>
+          <a:lstStyle xmlns:a="http://schemas.openxmlformats.org/drawingml/2006/main">
+            <a:defPPr>
+              <a:defRPr sz="1350" b="1">
+                <a:solidFill>
+                  <a:srgbClr val="512F8D"/>
+                </a:solidFill>
+                <a:latin typeface="Arial"/>
+                <a:ea typeface="Arial"/>
+                <a:cs typeface="Arial"/>
+              </a:defRPr>
+            </a:defPPr>
+            <a:lvl1pPr>
+              <a:defRPr sz="1350" b="1">
+                <a:solidFill>
+                  <a:srgbClr val="512F8D"/>
+                </a:solidFill>
+                <a:latin typeface="Arial"/>
+                <a:ea typeface="Arial"/>
+                <a:cs typeface="Arial"/>
+              </a:defRPr>
+            </a:lvl1pPr>
+            <a:lvl2pPr>
+              <a:defRPr sz="1350" b="1">
+                <a:solidFill>
+                  <a:srgbClr val="512F8D"/>
+                </a:solidFill>
+                <a:latin typeface="Arial"/>
+                <a:ea typeface="Arial"/>
+                <a:cs typeface="Arial"/>
+              </a:defRPr>
+            </a:lvl2pPr>
+            <a:lvl3pPr>
+              <a:defRPr sz="1350" b="1">
+                <a:solidFill>
+                  <a:srgbClr val="512F8D"/>
+                </a:solidFill>
+                <a:latin typeface="Arial"/>
+                <a:ea typeface="Arial"/>
+                <a:cs typeface="Arial"/>
+              </a:defRPr>
+            </a:lvl3pPr>
+            <a:lvl4pPr>
+              <a:defRPr sz="1350" b="1">
+                <a:solidFill>
+                  <a:srgbClr val="512F8D"/>
+                </a:solidFill>
+                <a:latin typeface="Arial"/>
+                <a:ea typeface="Arial"/>
+                <a:cs typeface="Arial"/>
+              </a:defRPr>
+            </a:lvl4pPr>
+            <a:lvl5pPr>
+              <a:defRPr sz="1350" b="1">
+                <a:solidFill>
+                  <a:srgbClr val="512F8D"/>
+                </a:solidFill>
+                <a:latin typeface="Arial"/>
+                <a:ea typeface="Arial"/>
+                <a:cs typeface="Arial"/>
+              </a:defRPr>
+            </a:lvl5pPr>
+            <a:lvl6pPr>
+              <a:defRPr sz="1350" b="1">
+                <a:solidFill>
+                  <a:srgbClr val="512F8D"/>
+                </a:solidFill>
+                <a:latin typeface="Arial"/>
+                <a:ea typeface="Arial"/>
+                <a:cs typeface="Arial"/>
+              </a:defRPr>
+            </a:lvl6pPr>
+            <a:lvl7pPr>
+              <a:defRPr sz="1350" b="1">
+                <a:solidFill>
+                  <a:srgbClr val="512F8D"/>
+                </a:solidFill>
+                <a:latin typeface="Arial"/>
+                <a:ea typeface="Arial"/>
+                <a:cs typeface="Arial"/>
+              </a:defRPr>
+            </a:lvl7pPr>
+            <a:lvl8pPr>
+              <a:defRPr sz="1350" b="1">
+                <a:solidFill>
+                  <a:srgbClr val="512F8D"/>
+                </a:solidFill>
+                <a:latin typeface="Arial"/>
+                <a:ea typeface="Arial"/>
+                <a:cs typeface="Arial"/>
+              </a:defRPr>
+            </a:lvl8pPr>
+            <a:lvl9pPr>
+              <a:defRPr sz="1350" b="1">
+                <a:solidFill>
+                  <a:srgbClr val="512F8D"/>
+                </a:solidFill>
+                <a:latin typeface="Arial"/>
+                <a:ea typeface="Arial"/>
+                <a:cs typeface="Arial"/>
+              </a:defRPr>
+            </a:lvl9pPr>
+          </a:lstStyle>
+          <a:p xmlns:a="http://schemas.openxmlformats.org/drawingml/2006/main">
+            <a:pPr>
+              <a:defRPr sz="1350" b="1">
+                <a:solidFill>
+                  <a:srgbClr val="512F8D"/>
+                </a:solidFill>
+                <a:latin typeface="Arial"/>
+                <a:ea typeface="Arial"/>
+                <a:cs typeface="Arial"/>
+              </a:defRPr>
+            </a:pPr>
+            <a:r>
+              <a:rPr sz="1350" b="1">
+                <a:solidFill>
+                  <a:srgbClr val="512F8D"/>
+                </a:solidFill>
+                <a:latin typeface="Arial"/>
+                <a:ea typeface="Arial"/>
+                <a:cs typeface="Arial"/>
+              </a:rPr>
+              <a:t>Septiembre 2026</a:t>
+            </a:r>
+          </a:p>
+        </p:txBody>
+      </p:sp>
+      <p:sp>
+        <p:nvSpPr>
+          <p:cNvPr id="2" name="title">
+            <a:extLst xmlns:a="http://schemas.openxmlformats.org/drawingml/2006/main">
+              <a:ext uri="{FF2B5EF4-FFF2-40B4-BE49-F238E27FC236}">
+                <a16:creationId xmlns:a16="http://schemas.microsoft.com/office/drawing/2014/main" id="{3E080AA5-C22D-42AD-B299-AAD89EFA7B7E}"/>
+              </a:ext>
+            </a:extLst>
+          </p:cNvPr>
+          <p:cNvSpPr>
+            <a:spLocks xmlns:a="http://schemas.openxmlformats.org/drawingml/2006/main" noGrp="1"/>
+          </p:cNvSpPr>
+          <p:nvPr/>
+        </p:nvSpPr>
+        <p:spPr>
+          <a:xfrm xmlns:a="http://schemas.openxmlformats.org/drawingml/2006/main">
+            <a:off x="685800" y="790575"/>
+            <a:ext cx="10820400" cy="904875"/>
+          </a:xfrm>
+          <a:prstGeom xmlns:a="http://schemas.openxmlformats.org/drawingml/2006/main" prst="rect">
+            <a:avLst/>
+          </a:prstGeom>
+          <a:noFill xmlns:a="http://schemas.openxmlformats.org/drawingml/2006/main"/>
+          <a:ln xmlns:a="http://schemas.openxmlformats.org/drawingml/2006/main" w="0">
+            <a:noFill/>
+            <a:prstDash val="solid"/>
+          </a:ln>
+        </p:spPr>
+        <p:txBody>
+          <a:bodyPr xmlns:a="http://schemas.openxmlformats.org/drawingml/2006/main" wrap="square" lIns="0" tIns="0" rIns="0" bIns="0">
+            <a:noAutofit/>
+          </a:bodyPr>
+          <a:lstStyle xmlns:a="http://schemas.openxmlformats.org/drawingml/2006/main">
+            <a:defPPr>
+              <a:defRPr sz="3300" b="1">
+                <a:solidFill>
+                  <a:srgbClr val="20202B"/>
+                </a:solidFill>
+                <a:latin typeface="Arial"/>
+                <a:ea typeface="Arial"/>
+                <a:cs typeface="Arial"/>
+              </a:defRPr>
+            </a:defPPr>
+            <a:lvl1pPr>
+              <a:defRPr sz="3300" b="1">
+                <a:solidFill>
+                  <a:srgbClr val="20202B"/>
+                </a:solidFill>
+                <a:latin typeface="Arial"/>
+                <a:ea typeface="Arial"/>
+                <a:cs typeface="Arial"/>
+              </a:defRPr>
+            </a:lvl1pPr>
+            <a:lvl2pPr>
+              <a:defRPr sz="3300" b="1">
+                <a:solidFill>
+                  <a:srgbClr val="20202B"/>
+                </a:solidFill>
+                <a:latin typeface="Arial"/>
+                <a:ea typeface="Arial"/>
+                <a:cs typeface="Arial"/>
+              </a:defRPr>
+            </a:lvl2pPr>
+            <a:lvl3pPr>
+              <a:defRPr sz="3300" b="1">
+                <a:solidFill>
+                  <a:srgbClr val="20202B"/>
+                </a:solidFill>
+                <a:latin typeface="Arial"/>
+                <a:ea typeface="Arial"/>
+                <a:cs typeface="Arial"/>
+              </a:defRPr>
+            </a:lvl3pPr>
+            <a:lvl4pPr>
+              <a:defRPr sz="3300" b="1">
+                <a:solidFill>
+                  <a:srgbClr val="20202B"/>
+                </a:solidFill>
+                <a:latin typeface="Arial"/>
+                <a:ea typeface="Arial"/>
+                <a:cs typeface="Arial"/>
+              </a:defRPr>
+            </a:lvl4pPr>
+            <a:lvl5pPr>
+              <a:defRPr sz="3300" b="1">
+                <a:solidFill>
+                  <a:srgbClr val="20202B"/>
+                </a:solidFill>
+                <a:latin typeface="Arial"/>
+                <a:ea typeface="Arial"/>
+                <a:cs typeface="Arial"/>
+              </a:defRPr>
+            </a:lvl5pPr>
+            <a:lvl6pPr>
+              <a:defRPr sz="3300" b="1">
+                <a:solidFill>
+                  <a:srgbClr val="20202B"/>
+                </a:solidFill>
+                <a:latin typeface="Arial"/>
+                <a:ea typeface="Arial"/>
+                <a:cs typeface="Arial"/>
+              </a:defRPr>
+            </a:lvl6pPr>
+            <a:lvl7pPr>
+              <a:defRPr sz="3300" b="1">
+                <a:solidFill>
+                  <a:srgbClr val="20202B"/>
+                </a:solidFill>
+                <a:latin typeface="Arial"/>
+                <a:ea typeface="Arial"/>
+                <a:cs typeface="Arial"/>
+              </a:defRPr>
+            </a:lvl7pPr>
+            <a:lvl8pPr>
+              <a:defRPr sz="3300" b="1">
+                <a:solidFill>
+                  <a:srgbClr val="20202B"/>
+                </a:solidFill>
+                <a:latin typeface="Arial"/>
+                <a:ea typeface="Arial"/>
+                <a:cs typeface="Arial"/>
+              </a:defRPr>
+            </a:lvl8pPr>
+            <a:lvl9pPr>
+              <a:defRPr sz="3300" b="1">
+                <a:solidFill>
+                  <a:srgbClr val="20202B"/>
+                </a:solidFill>
+                <a:latin typeface="Arial"/>
+                <a:ea typeface="Arial"/>
+                <a:cs typeface="Arial"/>
+              </a:defRPr>
+            </a:lvl9pPr>
+          </a:lstStyle>
+          <a:p xmlns:a="http://schemas.openxmlformats.org/drawingml/2006/main">
+            <a:pPr>
+              <a:defRPr sz="3300" b="1">
+                <a:solidFill>
+                  <a:srgbClr val="20202B"/>
+                </a:solidFill>
+                <a:latin typeface="Arial"/>
+                <a:ea typeface="Arial"/>
+                <a:cs typeface="Arial"/>
+              </a:defRPr>
+            </a:pPr>
+            <a:r>
+              <a:rPr sz="3300" b="1">
+                <a:solidFill>
+                  <a:srgbClr val="20202B"/>
+                </a:solidFill>
+                <a:latin typeface="Arial"/>
+                <a:ea typeface="Arial"/>
+                <a:cs typeface="Arial"/>
+              </a:rPr>
+              <a:t>Servicios de protección integral</a:t>
+            </a:r>
+          </a:p>
+        </p:txBody>
+      </p:sp>
+      <p:sp>
+        <p:nvSpPr>
+          <p:cNvPr id="3" name="footer">
+            <a:extLst xmlns:a="http://schemas.openxmlformats.org/drawingml/2006/main">
+              <a:ext uri="{FF2B5EF4-FFF2-40B4-BE49-F238E27FC236}">
+                <a16:creationId xmlns:a16="http://schemas.microsoft.com/office/drawing/2014/main" id="{FAAE6F17-2045-42AD-9C3F-2D16D0BC5549}"/>
+              </a:ext>
+            </a:extLst>
+          </p:cNvPr>
+          <p:cNvSpPr>
+            <a:spLocks xmlns:a="http://schemas.openxmlformats.org/drawingml/2006/main" noGrp="1"/>
+          </p:cNvSpPr>
+          <p:nvPr/>
+        </p:nvSpPr>
+        <p:spPr>
+          <a:xfrm xmlns:a="http://schemas.openxmlformats.org/drawingml/2006/main">
+            <a:off x="685800" y="6457950"/>
+            <a:ext cx="10096500" cy="190500"/>
+          </a:xfrm>
+          <a:prstGeom xmlns:a="http://schemas.openxmlformats.org/drawingml/2006/main" prst="rect">
+            <a:avLst/>
+          </a:prstGeom>
+          <a:noFill xmlns:a="http://schemas.openxmlformats.org/drawingml/2006/main"/>
+          <a:ln xmlns:a="http://schemas.openxmlformats.org/drawingml/2006/main" w="0">
+            <a:noFill/>
+            <a:prstDash val="solid"/>
+          </a:ln>
+        </p:spPr>
+        <p:txBody>
+          <a:bodyPr xmlns:a="http://schemas.openxmlformats.org/drawingml/2006/main" wrap="square" lIns="0" tIns="0" rIns="0" bIns="0">
+            <a:noAutofit/>
+          </a:bodyPr>
+          <a:lstStyle xmlns:a="http://schemas.openxmlformats.org/drawingml/2006/main">
+            <a:defPPr>
+              <a:defRPr sz="975" b="0">
+                <a:solidFill>
+                  <a:srgbClr val="777080"/>
+                </a:solidFill>
+                <a:latin typeface="Arial"/>
+                <a:ea typeface="Arial"/>
+                <a:cs typeface="Arial"/>
+              </a:defRPr>
+            </a:defPPr>
+            <a:lvl1pPr>
+              <a:defRPr sz="975" b="0">
+                <a:solidFill>
+                  <a:srgbClr val="777080"/>
+                </a:solidFill>
+                <a:latin typeface="Arial"/>
+                <a:ea typeface="Arial"/>
+                <a:cs typeface="Arial"/>
+              </a:defRPr>
+            </a:lvl1pPr>
+            <a:lvl2pPr>
+              <a:defRPr sz="975" b="0">
+                <a:solidFill>
+                  <a:srgbClr val="777080"/>
+                </a:solidFill>
+                <a:latin typeface="Arial"/>
+                <a:ea typeface="Arial"/>
+                <a:cs typeface="Arial"/>
+              </a:defRPr>
+            </a:lvl2pPr>
+            <a:lvl3pPr>
+              <a:defRPr sz="975" b="0">
+                <a:solidFill>
+                  <a:srgbClr val="777080"/>
+                </a:solidFill>
+                <a:latin typeface="Arial"/>
+                <a:ea typeface="Arial"/>
+                <a:cs typeface="Arial"/>
+              </a:defRPr>
+            </a:lvl3pPr>
+            <a:lvl4pPr>
+              <a:defRPr sz="975" b="0">
+                <a:solidFill>
+                  <a:srgbClr val="777080"/>
+                </a:solidFill>
+                <a:latin typeface="Arial"/>
+                <a:ea typeface="Arial"/>
+                <a:cs typeface="Arial"/>
+              </a:defRPr>
+            </a:lvl4pPr>
+            <a:lvl5pPr>
+              <a:defRPr sz="975" b="0">
+                <a:solidFill>
+                  <a:srgbClr val="777080"/>
+                </a:solidFill>
+                <a:latin typeface="Arial"/>
+                <a:ea typeface="Arial"/>
+                <a:cs typeface="Arial"/>
+              </a:defRPr>
+            </a:lvl5pPr>
+            <a:lvl6pPr>
+              <a:defRPr sz="975" b="0">
+                <a:solidFill>
+                  <a:srgbClr val="777080"/>
+                </a:solidFill>
+                <a:latin typeface="Arial"/>
+                <a:ea typeface="Arial"/>
+                <a:cs typeface="Arial"/>
+              </a:defRPr>
+            </a:lvl6pPr>
+            <a:lvl7pPr>
+              <a:defRPr sz="975" b="0">
+                <a:solidFill>
+                  <a:srgbClr val="777080"/>
+                </a:solidFill>
+                <a:latin typeface="Arial"/>
+                <a:ea typeface="Arial"/>
+                <a:cs typeface="Arial"/>
+              </a:defRPr>
+            </a:lvl7pPr>
+            <a:lvl8pPr>
+              <a:defRPr sz="975" b="0">
+                <a:solidFill>
+                  <a:srgbClr val="777080"/>
+                </a:solidFill>
+                <a:latin typeface="Arial"/>
+                <a:ea typeface="Arial"/>
+                <a:cs typeface="Arial"/>
+              </a:defRPr>
+            </a:lvl8pPr>
+            <a:lvl9pPr>
+              <a:defRPr sz="975" b="0">
+                <a:solidFill>
+                  <a:srgbClr val="777080"/>
+                </a:solidFill>
+                <a:latin typeface="Arial"/>
+                <a:ea typeface="Arial"/>
+                <a:cs typeface="Arial"/>
+              </a:defRPr>
+            </a:lvl9pPr>
+          </a:lstStyle>
+          <a:p xmlns:a="http://schemas.openxmlformats.org/drawingml/2006/main">
+            <a:pPr>
+              <a:defRPr sz="975" b="0">
+                <a:solidFill>
+                  <a:srgbClr val="777080"/>
+                </a:solidFill>
+                <a:latin typeface="Arial"/>
+                <a:ea typeface="Arial"/>
+                <a:cs typeface="Arial"/>
+              </a:defRPr>
+            </a:pPr>
+            <a:r>
+              <a:rPr sz="975" b="0">
+                <a:solidFill>
+                  <a:srgbClr val="777080"/>
+                </a:solidFill>
+                <a:latin typeface="Arial"/>
+                <a:ea typeface="Arial"/>
+                <a:cs typeface="Arial"/>
+              </a:rPr>
+              <a:t>MTDH   Septiembre 2026   Nacional - 24 provincias y zona en estudio</a:t>
+            </a:r>
+          </a:p>
+        </p:txBody>
+      </p:sp>
+      <p:sp>
+        <p:nvSpPr>
+          <p:cNvPr id="4" name="page">
+            <a:extLst xmlns:a="http://schemas.openxmlformats.org/drawingml/2006/main">
+              <a:ext uri="{FF2B5EF4-FFF2-40B4-BE49-F238E27FC236}">
+                <a16:creationId xmlns:a16="http://schemas.microsoft.com/office/drawing/2014/main" id="{A50823AF-44F3-4A56-9FFD-18615B6EDA5C}"/>
+              </a:ext>
+            </a:extLst>
+          </p:cNvPr>
+          <p:cNvSpPr>
+            <a:spLocks xmlns:a="http://schemas.openxmlformats.org/drawingml/2006/main" noGrp="1"/>
+          </p:cNvSpPr>
+          <p:nvPr/>
+        </p:nvSpPr>
+        <p:spPr>
+          <a:xfrm xmlns:a="http://schemas.openxmlformats.org/drawingml/2006/main">
+            <a:off x="10953750" y="6457950"/>
+            <a:ext cx="552450" cy="190500"/>
+          </a:xfrm>
+          <a:prstGeom xmlns:a="http://schemas.openxmlformats.org/drawingml/2006/main" prst="rect">
+            <a:avLst/>
+          </a:prstGeom>
+          <a:noFill xmlns:a="http://schemas.openxmlformats.org/drawingml/2006/main"/>
+          <a:ln xmlns:a="http://schemas.openxmlformats.org/drawingml/2006/main" w="0">
+            <a:noFill/>
+            <a:prstDash val="solid"/>
+          </a:ln>
+        </p:spPr>
+        <p:txBody>
+          <a:bodyPr xmlns:a="http://schemas.openxmlformats.org/drawingml/2006/main" wrap="square" lIns="0" tIns="0" rIns="0" bIns="0">
+            <a:noAutofit/>
+          </a:bodyPr>
+          <a:lstStyle xmlns:a="http://schemas.openxmlformats.org/drawingml/2006/main">
+            <a:defPPr>
+              <a:defRPr sz="975" b="0">
+                <a:solidFill>
+                  <a:srgbClr val="777080"/>
+                </a:solidFill>
+                <a:latin typeface="Arial"/>
+                <a:ea typeface="Arial"/>
+                <a:cs typeface="Arial"/>
+              </a:defRPr>
+            </a:defPPr>
+            <a:lvl1pPr>
+              <a:defRPr sz="975" b="0">
+                <a:solidFill>
+                  <a:srgbClr val="777080"/>
+                </a:solidFill>
+                <a:latin typeface="Arial"/>
+                <a:ea typeface="Arial"/>
+                <a:cs typeface="Arial"/>
+              </a:defRPr>
+            </a:lvl1pPr>
+            <a:lvl2pPr>
+              <a:defRPr sz="975" b="0">
+                <a:solidFill>
+                  <a:srgbClr val="777080"/>
+                </a:solidFill>
+                <a:latin typeface="Arial"/>
+                <a:ea typeface="Arial"/>
+                <a:cs typeface="Arial"/>
+              </a:defRPr>
+            </a:lvl2pPr>
+            <a:lvl3pPr>
+              <a:defRPr sz="975" b="0">
+                <a:solidFill>
+                  <a:srgbClr val="777080"/>
+                </a:solidFill>
+                <a:latin typeface="Arial"/>
+                <a:ea typeface="Arial"/>
+                <a:cs typeface="Arial"/>
+              </a:defRPr>
+            </a:lvl3pPr>
+            <a:lvl4pPr>
+              <a:defRPr sz="975" b="0">
+                <a:solidFill>
+                  <a:srgbClr val="777080"/>
+                </a:solidFill>
+                <a:latin typeface="Arial"/>
+                <a:ea typeface="Arial"/>
+                <a:cs typeface="Arial"/>
+              </a:defRPr>
+            </a:lvl4pPr>
+            <a:lvl5pPr>
+              <a:defRPr sz="975" b="0">
+                <a:solidFill>
+                  <a:srgbClr val="777080"/>
+                </a:solidFill>
+                <a:latin typeface="Arial"/>
+                <a:ea typeface="Arial"/>
+                <a:cs typeface="Arial"/>
+              </a:defRPr>
+            </a:lvl5pPr>
+            <a:lvl6pPr>
+              <a:defRPr sz="975" b="0">
+                <a:solidFill>
+                  <a:srgbClr val="777080"/>
+                </a:solidFill>
+                <a:latin typeface="Arial"/>
+                <a:ea typeface="Arial"/>
+                <a:cs typeface="Arial"/>
+              </a:defRPr>
+            </a:lvl6pPr>
+            <a:lvl7pPr>
+              <a:defRPr sz="975" b="0">
+                <a:solidFill>
+                  <a:srgbClr val="777080"/>
+                </a:solidFill>
+                <a:latin typeface="Arial"/>
+                <a:ea typeface="Arial"/>
+                <a:cs typeface="Arial"/>
+              </a:defRPr>
+            </a:lvl7pPr>
+            <a:lvl8pPr>
+              <a:defRPr sz="975" b="0">
+                <a:solidFill>
+                  <a:srgbClr val="777080"/>
+                </a:solidFill>
+                <a:latin typeface="Arial"/>
+                <a:ea typeface="Arial"/>
+                <a:cs typeface="Arial"/>
+              </a:defRPr>
+            </a:lvl8pPr>
+            <a:lvl9pPr>
+              <a:defRPr sz="975" b="0">
+                <a:solidFill>
+                  <a:srgbClr val="777080"/>
+                </a:solidFill>
+                <a:latin typeface="Arial"/>
+                <a:ea typeface="Arial"/>
+                <a:cs typeface="Arial"/>
+              </a:defRPr>
+            </a:lvl9pPr>
+          </a:lstStyle>
+          <a:p xmlns:a="http://schemas.openxmlformats.org/drawingml/2006/main">
+            <a:pPr>
+              <a:defRPr sz="975" b="0">
+                <a:solidFill>
+                  <a:srgbClr val="777080"/>
+                </a:solidFill>
+                <a:latin typeface="Arial"/>
+                <a:ea typeface="Arial"/>
+                <a:cs typeface="Arial"/>
+              </a:defRPr>
+            </a:pPr>
+            <a:r>
+              <a:rPr sz="975" b="0">
+                <a:solidFill>
+                  <a:srgbClr val="777080"/>
+                </a:solidFill>
+                <a:latin typeface="Arial"/>
+                <a:ea typeface="Arial"/>
+                <a:cs typeface="Arial"/>
+              </a:rPr>
+              <a:t>07</a:t>
+            </a:r>
+          </a:p>
+        </p:txBody>
+      </p:sp>
+      <p:pic>
+        <p:nvPicPr>
+          <p:cNvPr id="5" name="">
+            <a:extLst xmlns:a="http://schemas.openxmlformats.org/drawingml/2006/main">
+              <a:ext uri="{FF2B5EF4-FFF2-40B4-BE49-F238E27FC236}">
+                <a16:creationId xmlns:a16="http://schemas.microsoft.com/office/drawing/2014/main" id="{F1F6A866-1996-4A9D-ABE8-8D9D454E1454}"/>
+              </a:ext>
+            </a:extLst>
+          </p:cNvPr>
+          <p:cNvPicPr>
+            <a:picLocks xmlns:a="http://schemas.openxmlformats.org/drawingml/2006/main" noChangeAspect="1"/>
+          </p:cNvPicPr>
+          <p:nvPr/>
+        </p:nvPicPr>
+        <p:blipFill>
+          <a:blip xmlns:r="http://schemas.openxmlformats.org/officeDocument/2006/relationships" xmlns:a="http://schemas.openxmlformats.org/drawingml/2006/main" r:embed="Rd08b10a0efa14e3b"/>
+          <a:stretch xmlns:a="http://schemas.openxmlformats.org/drawingml/2006/main"/>
+        </p:blipFill>
+        <p:spPr>
+          <a:xfrm xmlns:a="http://schemas.openxmlformats.org/drawingml/2006/main">
+            <a:off x="685800" y="1600200"/>
+            <a:ext cx="323850" cy="323850"/>
+          </a:xfrm>
+          <a:prstGeom xmlns:a="http://schemas.openxmlformats.org/drawingml/2006/main" prst="rect">
+            <a:avLst/>
+          </a:prstGeom>
+        </p:spPr>
+      </p:pic>
+      <p:sp>
+        <p:nvSpPr>
+          <p:cNvPr id="6" name="chart-subtitle">
+            <a:extLst xmlns:a="http://schemas.openxmlformats.org/drawingml/2006/main">
+              <a:ext uri="{FF2B5EF4-FFF2-40B4-BE49-F238E27FC236}">
+                <a16:creationId xmlns:a16="http://schemas.microsoft.com/office/drawing/2014/main" id="{419D38B1-6BF5-475F-B3A0-D1FCDEBC1D6A}"/>
+              </a:ext>
+            </a:extLst>
+          </p:cNvPr>
+          <p:cNvSpPr>
+            <a:spLocks xmlns:a="http://schemas.openxmlformats.org/drawingml/2006/main" noGrp="1"/>
+          </p:cNvSpPr>
+          <p:nvPr/>
+        </p:nvSpPr>
+        <p:spPr>
+          <a:xfrm xmlns:a="http://schemas.openxmlformats.org/drawingml/2006/main">
+            <a:off x="1152525" y="1657350"/>
+            <a:ext cx="9525000" cy="323850"/>
+          </a:xfrm>
+          <a:prstGeom xmlns:a="http://schemas.openxmlformats.org/drawingml/2006/main" prst="rect">
+            <a:avLst/>
+          </a:prstGeom>
+          <a:noFill xmlns:a="http://schemas.openxmlformats.org/drawingml/2006/main"/>
+          <a:ln xmlns:a="http://schemas.openxmlformats.org/drawingml/2006/main" w="0">
+            <a:noFill/>
+            <a:prstDash val="solid"/>
+          </a:ln>
+        </p:spPr>
+        <p:txBody>
+          <a:bodyPr xmlns:a="http://schemas.openxmlformats.org/drawingml/2006/main" wrap="square" lIns="0" tIns="0" rIns="0" bIns="0">
+            <a:noAutofit/>
+          </a:bodyPr>
+          <a:lstStyle xmlns:a="http://schemas.openxmlformats.org/drawingml/2006/main">
+            <a:defPPr>
+              <a:defRPr sz="1650" b="1">
+                <a:solidFill>
+                  <a:srgbClr val="512F8D"/>
+                </a:solidFill>
+                <a:latin typeface="Arial"/>
+                <a:ea typeface="Arial"/>
+                <a:cs typeface="Arial"/>
+              </a:defRPr>
+            </a:defPPr>
+            <a:lvl1pPr>
+              <a:defRPr sz="1650" b="1">
+                <a:solidFill>
+                  <a:srgbClr val="512F8D"/>
+                </a:solidFill>
+                <a:latin typeface="Arial"/>
+                <a:ea typeface="Arial"/>
+                <a:cs typeface="Arial"/>
+              </a:defRPr>
+            </a:lvl1pPr>
+            <a:lvl2pPr>
+              <a:defRPr sz="1650" b="1">
+                <a:solidFill>
+                  <a:srgbClr val="512F8D"/>
+                </a:solidFill>
+                <a:latin typeface="Arial"/>
+                <a:ea typeface="Arial"/>
+                <a:cs typeface="Arial"/>
+              </a:defRPr>
+            </a:lvl2pPr>
+            <a:lvl3pPr>
+              <a:defRPr sz="1650" b="1">
+                <a:solidFill>
+                  <a:srgbClr val="512F8D"/>
+                </a:solidFill>
+                <a:latin typeface="Arial"/>
+                <a:ea typeface="Arial"/>
+                <a:cs typeface="Arial"/>
+              </a:defRPr>
+            </a:lvl3pPr>
+            <a:lvl4pPr>
+              <a:defRPr sz="1650" b="1">
+                <a:solidFill>
+                  <a:srgbClr val="512F8D"/>
+                </a:solidFill>
+                <a:latin typeface="Arial"/>
+                <a:ea typeface="Arial"/>
+                <a:cs typeface="Arial"/>
+              </a:defRPr>
+            </a:lvl4pPr>
+            <a:lvl5pPr>
+              <a:defRPr sz="1650" b="1">
+                <a:solidFill>
+                  <a:srgbClr val="512F8D"/>
+                </a:solidFill>
+                <a:latin typeface="Arial"/>
+                <a:ea typeface="Arial"/>
+                <a:cs typeface="Arial"/>
+              </a:defRPr>
+            </a:lvl5pPr>
+            <a:lvl6pPr>
+              <a:defRPr sz="1650" b="1">
+                <a:solidFill>
+                  <a:srgbClr val="512F8D"/>
+                </a:solidFill>
+                <a:latin typeface="Arial"/>
+                <a:ea typeface="Arial"/>
+                <a:cs typeface="Arial"/>
+              </a:defRPr>
+            </a:lvl6pPr>
+            <a:lvl7pPr>
+              <a:defRPr sz="1650" b="1">
+                <a:solidFill>
+                  <a:srgbClr val="512F8D"/>
+                </a:solidFill>
+                <a:latin typeface="Arial"/>
+                <a:ea typeface="Arial"/>
+                <a:cs typeface="Arial"/>
+              </a:defRPr>
+            </a:lvl7pPr>
+            <a:lvl8pPr>
+              <a:defRPr sz="1650" b="1">
+                <a:solidFill>
+                  <a:srgbClr val="512F8D"/>
+                </a:solidFill>
+                <a:latin typeface="Arial"/>
+                <a:ea typeface="Arial"/>
+                <a:cs typeface="Arial"/>
+              </a:defRPr>
+            </a:lvl8pPr>
+            <a:lvl9pPr>
+              <a:defRPr sz="1650" b="1">
+                <a:solidFill>
+                  <a:srgbClr val="512F8D"/>
+                </a:solidFill>
+                <a:latin typeface="Arial"/>
+                <a:ea typeface="Arial"/>
+                <a:cs typeface="Arial"/>
+              </a:defRPr>
+            </a:lvl9pPr>
+          </a:lstStyle>
+          <a:p xmlns:a="http://schemas.openxmlformats.org/drawingml/2006/main">
+            <a:pPr>
+              <a:defRPr sz="1650" b="1">
+                <a:solidFill>
+                  <a:srgbClr val="512F8D"/>
+                </a:solidFill>
+                <a:latin typeface="Arial"/>
+                <a:ea typeface="Arial"/>
+                <a:cs typeface="Arial"/>
+              </a:defRPr>
+            </a:pPr>
+            <a:r>
+              <a:rPr sz="1650" b="1">
+                <a:solidFill>
+                  <a:srgbClr val="512F8D"/>
+                </a:solidFill>
+                <a:latin typeface="Arial"/>
+                <a:ea typeface="Arial"/>
+                <a:cs typeface="Arial"/>
+              </a:rPr>
               <a:t>Distribución por servicio</a:t>
             </a:r>
           </a:p>
@@ -16951,7 +20322,7 @@
 </p:sld>
 </file>
 
-<file path=ppt/slides/slide7.xml><?xml version="1.0" encoding="utf-8"?>
+<file path=ppt/slides/slide8.xml><?xml version="1.0" encoding="utf-8"?>
 <p:sld xmlns:p="http://schemas.openxmlformats.org/presentationml/2006/main">
   <p:cSld>
     <p:bg>
@@ -17601,7 +20972,7 @@
                 <a:ea typeface="Arial"/>
                 <a:cs typeface="Arial"/>
               </a:rPr>
-              <a:t>07</a:t>
+              <a:t>08</a:t>
             </a:r>
           </a:p>
         </p:txBody>
@@ -19241,7 +22612,7 @@
 </p:sld>
 </file>
 
-<file path=ppt/slides/slide8.xml><?xml version="1.0" encoding="utf-8"?>
+<file path=ppt/slides/slide9.xml><?xml version="1.0" encoding="utf-8"?>
 <p:sld xmlns:p="http://schemas.openxmlformats.org/presentationml/2006/main">
   <p:cSld>
     <p:bg>
@@ -19891,7 +23262,7 @@
                 <a:ea typeface="Arial"/>
                 <a:cs typeface="Arial"/>
               </a:rPr>
-              <a:t>08</a:t>
+              <a:t>09</a:t>
             </a:r>
           </a:p>
         </p:txBody>
@@ -20078,7 +23449,7 @@
                 <a:ea typeface="Arial"/>
                 <a:cs typeface="Arial"/>
               </a:rPr>
-              <a:t>Los 8 ámbitos territoriales con mayor cobertura</a:t>
+              <a:t>Las 8 provincias con mayor cobertura</a:t>
             </a:r>
           </a:p>
         </p:txBody>
@@ -21213,7 +24584,7 @@
                 <a:ea typeface="Arial"/>
                 <a:cs typeface="Arial"/>
               </a:rPr>
-              <a:t>El gráfico muestra los ámbitos seleccionados con mayor conteo reportado.</a:t>
+              <a:t>El gráfico muestra las provincias seleccionadas con mayor conteo reportado.</a:t>
             </a:r>
           </a:p>
         </p:txBody>
@@ -21222,1625 +24593,6 @@
     <p:extLst>
       <p:ext uri="{BB962C8B-B14F-4D97-AF65-F5344CB8AC3E}">
         <p14:creationId xmlns:p14="http://schemas.microsoft.com/office/powerpoint/2010/main" val="1830354645"/>
-      </p:ext>
-    </p:extLst>
-  </p:cSld>
-</p:sld>
-</file>
-
-<file path=ppt/slides/slide9.xml><?xml version="1.0" encoding="utf-8"?>
-<p:sld xmlns:p="http://schemas.openxmlformats.org/presentationml/2006/main">
-  <p:cSld>
-    <p:bg>
-      <p:bgPr>
-        <a:solidFill xmlns:a="http://schemas.openxmlformats.org/drawingml/2006/main">
-          <a:srgbClr val="FFFFFF"/>
-        </a:solidFill>
-      </p:bgPr>
-    </p:bg>
-    <p:spTree>
-      <p:nvGrpSpPr>
-        <p:cNvPr id="1" name=""/>
-        <p:cNvGrpSpPr/>
-        <p:nvPr/>
-      </p:nvGrpSpPr>
-      <p:grpSpPr>
-        <a:xfrm xmlns:a="http://schemas.openxmlformats.org/drawingml/2006/main"/>
-      </p:grpSpPr>
-      <p:sp>
-        <p:nvSpPr>
-          <p:cNvPr id="11" name="eyebrow">
-            <a:extLst xmlns:a="http://schemas.openxmlformats.org/drawingml/2006/main">
-              <a:ext uri="{FF2B5EF4-FFF2-40B4-BE49-F238E27FC236}">
-                <a16:creationId xmlns:a16="http://schemas.microsoft.com/office/drawing/2014/main" id="{4EB87881-4BD7-4CC1-A478-5E402BABBE84}"/>
-              </a:ext>
-            </a:extLst>
-          </p:cNvPr>
-          <p:cNvSpPr>
-            <a:spLocks xmlns:a="http://schemas.openxmlformats.org/drawingml/2006/main" noGrp="1"/>
-          </p:cNvSpPr>
-          <p:nvPr/>
-        </p:nvSpPr>
-        <p:spPr>
-          <a:xfrm xmlns:a="http://schemas.openxmlformats.org/drawingml/2006/main">
-            <a:off x="685800" y="361950"/>
-            <a:ext cx="6858000" cy="238125"/>
-          </a:xfrm>
-          <a:prstGeom xmlns:a="http://schemas.openxmlformats.org/drawingml/2006/main" prst="rect">
-            <a:avLst/>
-          </a:prstGeom>
-          <a:noFill xmlns:a="http://schemas.openxmlformats.org/drawingml/2006/main"/>
-          <a:ln xmlns:a="http://schemas.openxmlformats.org/drawingml/2006/main" w="0">
-            <a:noFill/>
-            <a:prstDash val="solid"/>
-          </a:ln>
-        </p:spPr>
-        <p:txBody>
-          <a:bodyPr xmlns:a="http://schemas.openxmlformats.org/drawingml/2006/main" wrap="square" lIns="0" tIns="0" rIns="0" bIns="0">
-            <a:noAutofit/>
-          </a:bodyPr>
-          <a:lstStyle xmlns:a="http://schemas.openxmlformats.org/drawingml/2006/main">
-            <a:defPPr>
-              <a:defRPr sz="1350" b="1">
-                <a:solidFill>
-                  <a:srgbClr val="512F8D"/>
-                </a:solidFill>
-                <a:latin typeface="Arial"/>
-                <a:ea typeface="Arial"/>
-                <a:cs typeface="Arial"/>
-              </a:defRPr>
-            </a:defPPr>
-            <a:lvl1pPr>
-              <a:defRPr sz="1350" b="1">
-                <a:solidFill>
-                  <a:srgbClr val="512F8D"/>
-                </a:solidFill>
-                <a:latin typeface="Arial"/>
-                <a:ea typeface="Arial"/>
-                <a:cs typeface="Arial"/>
-              </a:defRPr>
-            </a:lvl1pPr>
-            <a:lvl2pPr>
-              <a:defRPr sz="1350" b="1">
-                <a:solidFill>
-                  <a:srgbClr val="512F8D"/>
-                </a:solidFill>
-                <a:latin typeface="Arial"/>
-                <a:ea typeface="Arial"/>
-                <a:cs typeface="Arial"/>
-              </a:defRPr>
-            </a:lvl2pPr>
-            <a:lvl3pPr>
-              <a:defRPr sz="1350" b="1">
-                <a:solidFill>
-                  <a:srgbClr val="512F8D"/>
-                </a:solidFill>
-                <a:latin typeface="Arial"/>
-                <a:ea typeface="Arial"/>
-                <a:cs typeface="Arial"/>
-              </a:defRPr>
-            </a:lvl3pPr>
-            <a:lvl4pPr>
-              <a:defRPr sz="1350" b="1">
-                <a:solidFill>
-                  <a:srgbClr val="512F8D"/>
-                </a:solidFill>
-                <a:latin typeface="Arial"/>
-                <a:ea typeface="Arial"/>
-                <a:cs typeface="Arial"/>
-              </a:defRPr>
-            </a:lvl4pPr>
-            <a:lvl5pPr>
-              <a:defRPr sz="1350" b="1">
-                <a:solidFill>
-                  <a:srgbClr val="512F8D"/>
-                </a:solidFill>
-                <a:latin typeface="Arial"/>
-                <a:ea typeface="Arial"/>
-                <a:cs typeface="Arial"/>
-              </a:defRPr>
-            </a:lvl5pPr>
-            <a:lvl6pPr>
-              <a:defRPr sz="1350" b="1">
-                <a:solidFill>
-                  <a:srgbClr val="512F8D"/>
-                </a:solidFill>
-                <a:latin typeface="Arial"/>
-                <a:ea typeface="Arial"/>
-                <a:cs typeface="Arial"/>
-              </a:defRPr>
-            </a:lvl6pPr>
-            <a:lvl7pPr>
-              <a:defRPr sz="1350" b="1">
-                <a:solidFill>
-                  <a:srgbClr val="512F8D"/>
-                </a:solidFill>
-                <a:latin typeface="Arial"/>
-                <a:ea typeface="Arial"/>
-                <a:cs typeface="Arial"/>
-              </a:defRPr>
-            </a:lvl7pPr>
-            <a:lvl8pPr>
-              <a:defRPr sz="1350" b="1">
-                <a:solidFill>
-                  <a:srgbClr val="512F8D"/>
-                </a:solidFill>
-                <a:latin typeface="Arial"/>
-                <a:ea typeface="Arial"/>
-                <a:cs typeface="Arial"/>
-              </a:defRPr>
-            </a:lvl8pPr>
-            <a:lvl9pPr>
-              <a:defRPr sz="1350" b="1">
-                <a:solidFill>
-                  <a:srgbClr val="512F8D"/>
-                </a:solidFill>
-                <a:latin typeface="Arial"/>
-                <a:ea typeface="Arial"/>
-                <a:cs typeface="Arial"/>
-              </a:defRPr>
-            </a:lvl9pPr>
-          </a:lstStyle>
-          <a:p xmlns:a="http://schemas.openxmlformats.org/drawingml/2006/main">
-            <a:pPr>
-              <a:defRPr sz="1350" b="1">
-                <a:solidFill>
-                  <a:srgbClr val="512F8D"/>
-                </a:solidFill>
-                <a:latin typeface="Arial"/>
-                <a:ea typeface="Arial"/>
-                <a:cs typeface="Arial"/>
-              </a:defRPr>
-            </a:pPr>
-            <a:r>
-              <a:rPr sz="1350" b="1">
-                <a:solidFill>
-                  <a:srgbClr val="512F8D"/>
-                </a:solidFill>
-                <a:latin typeface="Arial"/>
-                <a:ea typeface="Arial"/>
-                <a:cs typeface="Arial"/>
-              </a:rPr>
-              <a:t>Septiembre 2026</a:t>
-            </a:r>
-          </a:p>
-        </p:txBody>
-      </p:sp>
-      <p:sp>
-        <p:nvSpPr>
-          <p:cNvPr id="2" name="title">
-            <a:extLst xmlns:a="http://schemas.openxmlformats.org/drawingml/2006/main">
-              <a:ext uri="{FF2B5EF4-FFF2-40B4-BE49-F238E27FC236}">
-                <a16:creationId xmlns:a16="http://schemas.microsoft.com/office/drawing/2014/main" id="{37EAA87D-ACA3-4949-A403-118B30B6B6E9}"/>
-              </a:ext>
-            </a:extLst>
-          </p:cNvPr>
-          <p:cNvSpPr>
-            <a:spLocks xmlns:a="http://schemas.openxmlformats.org/drawingml/2006/main" noGrp="1"/>
-          </p:cNvSpPr>
-          <p:nvPr/>
-        </p:nvSpPr>
-        <p:spPr>
-          <a:xfrm xmlns:a="http://schemas.openxmlformats.org/drawingml/2006/main">
-            <a:off x="685800" y="790575"/>
-            <a:ext cx="10820400" cy="904875"/>
-          </a:xfrm>
-          <a:prstGeom xmlns:a="http://schemas.openxmlformats.org/drawingml/2006/main" prst="rect">
-            <a:avLst/>
-          </a:prstGeom>
-          <a:noFill xmlns:a="http://schemas.openxmlformats.org/drawingml/2006/main"/>
-          <a:ln xmlns:a="http://schemas.openxmlformats.org/drawingml/2006/main" w="0">
-            <a:noFill/>
-            <a:prstDash val="solid"/>
-          </a:ln>
-        </p:spPr>
-        <p:txBody>
-          <a:bodyPr xmlns:a="http://schemas.openxmlformats.org/drawingml/2006/main" wrap="square" lIns="0" tIns="0" rIns="0" bIns="0">
-            <a:noAutofit/>
-          </a:bodyPr>
-          <a:lstStyle xmlns:a="http://schemas.openxmlformats.org/drawingml/2006/main">
-            <a:defPPr>
-              <a:defRPr sz="3300" b="1">
-                <a:solidFill>
-                  <a:srgbClr val="20202B"/>
-                </a:solidFill>
-                <a:latin typeface="Arial"/>
-                <a:ea typeface="Arial"/>
-                <a:cs typeface="Arial"/>
-              </a:defRPr>
-            </a:defPPr>
-            <a:lvl1pPr>
-              <a:defRPr sz="3300" b="1">
-                <a:solidFill>
-                  <a:srgbClr val="20202B"/>
-                </a:solidFill>
-                <a:latin typeface="Arial"/>
-                <a:ea typeface="Arial"/>
-                <a:cs typeface="Arial"/>
-              </a:defRPr>
-            </a:lvl1pPr>
-            <a:lvl2pPr>
-              <a:defRPr sz="3300" b="1">
-                <a:solidFill>
-                  <a:srgbClr val="20202B"/>
-                </a:solidFill>
-                <a:latin typeface="Arial"/>
-                <a:ea typeface="Arial"/>
-                <a:cs typeface="Arial"/>
-              </a:defRPr>
-            </a:lvl2pPr>
-            <a:lvl3pPr>
-              <a:defRPr sz="3300" b="1">
-                <a:solidFill>
-                  <a:srgbClr val="20202B"/>
-                </a:solidFill>
-                <a:latin typeface="Arial"/>
-                <a:ea typeface="Arial"/>
-                <a:cs typeface="Arial"/>
-              </a:defRPr>
-            </a:lvl3pPr>
-            <a:lvl4pPr>
-              <a:defRPr sz="3300" b="1">
-                <a:solidFill>
-                  <a:srgbClr val="20202B"/>
-                </a:solidFill>
-                <a:latin typeface="Arial"/>
-                <a:ea typeface="Arial"/>
-                <a:cs typeface="Arial"/>
-              </a:defRPr>
-            </a:lvl4pPr>
-            <a:lvl5pPr>
-              <a:defRPr sz="3300" b="1">
-                <a:solidFill>
-                  <a:srgbClr val="20202B"/>
-                </a:solidFill>
-                <a:latin typeface="Arial"/>
-                <a:ea typeface="Arial"/>
-                <a:cs typeface="Arial"/>
-              </a:defRPr>
-            </a:lvl5pPr>
-            <a:lvl6pPr>
-              <a:defRPr sz="3300" b="1">
-                <a:solidFill>
-                  <a:srgbClr val="20202B"/>
-                </a:solidFill>
-                <a:latin typeface="Arial"/>
-                <a:ea typeface="Arial"/>
-                <a:cs typeface="Arial"/>
-              </a:defRPr>
-            </a:lvl6pPr>
-            <a:lvl7pPr>
-              <a:defRPr sz="3300" b="1">
-                <a:solidFill>
-                  <a:srgbClr val="20202B"/>
-                </a:solidFill>
-                <a:latin typeface="Arial"/>
-                <a:ea typeface="Arial"/>
-                <a:cs typeface="Arial"/>
-              </a:defRPr>
-            </a:lvl7pPr>
-            <a:lvl8pPr>
-              <a:defRPr sz="3300" b="1">
-                <a:solidFill>
-                  <a:srgbClr val="20202B"/>
-                </a:solidFill>
-                <a:latin typeface="Arial"/>
-                <a:ea typeface="Arial"/>
-                <a:cs typeface="Arial"/>
-              </a:defRPr>
-            </a:lvl8pPr>
-            <a:lvl9pPr>
-              <a:defRPr sz="3300" b="1">
-                <a:solidFill>
-                  <a:srgbClr val="20202B"/>
-                </a:solidFill>
-                <a:latin typeface="Arial"/>
-                <a:ea typeface="Arial"/>
-                <a:cs typeface="Arial"/>
-              </a:defRPr>
-            </a:lvl9pPr>
-          </a:lstStyle>
-          <a:p xmlns:a="http://schemas.openxmlformats.org/drawingml/2006/main">
-            <a:pPr>
-              <a:defRPr sz="3300" b="1">
-                <a:solidFill>
-                  <a:srgbClr val="20202B"/>
-                </a:solidFill>
-                <a:latin typeface="Arial"/>
-                <a:ea typeface="Arial"/>
-                <a:cs typeface="Arial"/>
-              </a:defRPr>
-            </a:pPr>
-            <a:r>
-              <a:rPr sz="3300" b="1">
-                <a:solidFill>
-                  <a:srgbClr val="20202B"/>
-                </a:solidFill>
-                <a:latin typeface="Arial"/>
-                <a:ea typeface="Arial"/>
-                <a:cs typeface="Arial"/>
-              </a:rPr>
-              <a:t>Alcance y lectura de las cifras</a:t>
-            </a:r>
-          </a:p>
-        </p:txBody>
-      </p:sp>
-      <p:sp>
-        <p:nvSpPr>
-          <p:cNvPr id="3" name="footer">
-            <a:extLst xmlns:a="http://schemas.openxmlformats.org/drawingml/2006/main">
-              <a:ext uri="{FF2B5EF4-FFF2-40B4-BE49-F238E27FC236}">
-                <a16:creationId xmlns:a16="http://schemas.microsoft.com/office/drawing/2014/main" id="{76A5493E-8815-4D84-ADD1-62A795A6DD6F}"/>
-              </a:ext>
-            </a:extLst>
-          </p:cNvPr>
-          <p:cNvSpPr>
-            <a:spLocks xmlns:a="http://schemas.openxmlformats.org/drawingml/2006/main" noGrp="1"/>
-          </p:cNvSpPr>
-          <p:nvPr/>
-        </p:nvSpPr>
-        <p:spPr>
-          <a:xfrm xmlns:a="http://schemas.openxmlformats.org/drawingml/2006/main">
-            <a:off x="685800" y="6457950"/>
-            <a:ext cx="10096500" cy="190500"/>
-          </a:xfrm>
-          <a:prstGeom xmlns:a="http://schemas.openxmlformats.org/drawingml/2006/main" prst="rect">
-            <a:avLst/>
-          </a:prstGeom>
-          <a:noFill xmlns:a="http://schemas.openxmlformats.org/drawingml/2006/main"/>
-          <a:ln xmlns:a="http://schemas.openxmlformats.org/drawingml/2006/main" w="0">
-            <a:noFill/>
-            <a:prstDash val="solid"/>
-          </a:ln>
-        </p:spPr>
-        <p:txBody>
-          <a:bodyPr xmlns:a="http://schemas.openxmlformats.org/drawingml/2006/main" wrap="square" lIns="0" tIns="0" rIns="0" bIns="0">
-            <a:noAutofit/>
-          </a:bodyPr>
-          <a:lstStyle xmlns:a="http://schemas.openxmlformats.org/drawingml/2006/main">
-            <a:defPPr>
-              <a:defRPr sz="975" b="0">
-                <a:solidFill>
-                  <a:srgbClr val="777080"/>
-                </a:solidFill>
-                <a:latin typeface="Arial"/>
-                <a:ea typeface="Arial"/>
-                <a:cs typeface="Arial"/>
-              </a:defRPr>
-            </a:defPPr>
-            <a:lvl1pPr>
-              <a:defRPr sz="975" b="0">
-                <a:solidFill>
-                  <a:srgbClr val="777080"/>
-                </a:solidFill>
-                <a:latin typeface="Arial"/>
-                <a:ea typeface="Arial"/>
-                <a:cs typeface="Arial"/>
-              </a:defRPr>
-            </a:lvl1pPr>
-            <a:lvl2pPr>
-              <a:defRPr sz="975" b="0">
-                <a:solidFill>
-                  <a:srgbClr val="777080"/>
-                </a:solidFill>
-                <a:latin typeface="Arial"/>
-                <a:ea typeface="Arial"/>
-                <a:cs typeface="Arial"/>
-              </a:defRPr>
-            </a:lvl2pPr>
-            <a:lvl3pPr>
-              <a:defRPr sz="975" b="0">
-                <a:solidFill>
-                  <a:srgbClr val="777080"/>
-                </a:solidFill>
-                <a:latin typeface="Arial"/>
-                <a:ea typeface="Arial"/>
-                <a:cs typeface="Arial"/>
-              </a:defRPr>
-            </a:lvl3pPr>
-            <a:lvl4pPr>
-              <a:defRPr sz="975" b="0">
-                <a:solidFill>
-                  <a:srgbClr val="777080"/>
-                </a:solidFill>
-                <a:latin typeface="Arial"/>
-                <a:ea typeface="Arial"/>
-                <a:cs typeface="Arial"/>
-              </a:defRPr>
-            </a:lvl4pPr>
-            <a:lvl5pPr>
-              <a:defRPr sz="975" b="0">
-                <a:solidFill>
-                  <a:srgbClr val="777080"/>
-                </a:solidFill>
-                <a:latin typeface="Arial"/>
-                <a:ea typeface="Arial"/>
-                <a:cs typeface="Arial"/>
-              </a:defRPr>
-            </a:lvl5pPr>
-            <a:lvl6pPr>
-              <a:defRPr sz="975" b="0">
-                <a:solidFill>
-                  <a:srgbClr val="777080"/>
-                </a:solidFill>
-                <a:latin typeface="Arial"/>
-                <a:ea typeface="Arial"/>
-                <a:cs typeface="Arial"/>
-              </a:defRPr>
-            </a:lvl6pPr>
-            <a:lvl7pPr>
-              <a:defRPr sz="975" b="0">
-                <a:solidFill>
-                  <a:srgbClr val="777080"/>
-                </a:solidFill>
-                <a:latin typeface="Arial"/>
-                <a:ea typeface="Arial"/>
-                <a:cs typeface="Arial"/>
-              </a:defRPr>
-            </a:lvl7pPr>
-            <a:lvl8pPr>
-              <a:defRPr sz="975" b="0">
-                <a:solidFill>
-                  <a:srgbClr val="777080"/>
-                </a:solidFill>
-                <a:latin typeface="Arial"/>
-                <a:ea typeface="Arial"/>
-                <a:cs typeface="Arial"/>
-              </a:defRPr>
-            </a:lvl8pPr>
-            <a:lvl9pPr>
-              <a:defRPr sz="975" b="0">
-                <a:solidFill>
-                  <a:srgbClr val="777080"/>
-                </a:solidFill>
-                <a:latin typeface="Arial"/>
-                <a:ea typeface="Arial"/>
-                <a:cs typeface="Arial"/>
-              </a:defRPr>
-            </a:lvl9pPr>
-          </a:lstStyle>
-          <a:p xmlns:a="http://schemas.openxmlformats.org/drawingml/2006/main">
-            <a:pPr>
-              <a:defRPr sz="975" b="0">
-                <a:solidFill>
-                  <a:srgbClr val="777080"/>
-                </a:solidFill>
-                <a:latin typeface="Arial"/>
-                <a:ea typeface="Arial"/>
-                <a:cs typeface="Arial"/>
-              </a:defRPr>
-            </a:pPr>
-            <a:r>
-              <a:rPr sz="975" b="0">
-                <a:solidFill>
-                  <a:srgbClr val="777080"/>
-                </a:solidFill>
-                <a:latin typeface="Arial"/>
-                <a:ea typeface="Arial"/>
-                <a:cs typeface="Arial"/>
-              </a:rPr>
-              <a:t>MTDH   Septiembre 2026   Nacional - 24 provincias y zona en estudio</a:t>
-            </a:r>
-          </a:p>
-        </p:txBody>
-      </p:sp>
-      <p:sp>
-        <p:nvSpPr>
-          <p:cNvPr id="4" name="page">
-            <a:extLst xmlns:a="http://schemas.openxmlformats.org/drawingml/2006/main">
-              <a:ext uri="{FF2B5EF4-FFF2-40B4-BE49-F238E27FC236}">
-                <a16:creationId xmlns:a16="http://schemas.microsoft.com/office/drawing/2014/main" id="{DC718EE2-72E7-4B3D-89A0-0C0DC36BDCC8}"/>
-              </a:ext>
-            </a:extLst>
-          </p:cNvPr>
-          <p:cNvSpPr>
-            <a:spLocks xmlns:a="http://schemas.openxmlformats.org/drawingml/2006/main" noGrp="1"/>
-          </p:cNvSpPr>
-          <p:nvPr/>
-        </p:nvSpPr>
-        <p:spPr>
-          <a:xfrm xmlns:a="http://schemas.openxmlformats.org/drawingml/2006/main">
-            <a:off x="10953750" y="6457950"/>
-            <a:ext cx="552450" cy="190500"/>
-          </a:xfrm>
-          <a:prstGeom xmlns:a="http://schemas.openxmlformats.org/drawingml/2006/main" prst="rect">
-            <a:avLst/>
-          </a:prstGeom>
-          <a:noFill xmlns:a="http://schemas.openxmlformats.org/drawingml/2006/main"/>
-          <a:ln xmlns:a="http://schemas.openxmlformats.org/drawingml/2006/main" w="0">
-            <a:noFill/>
-            <a:prstDash val="solid"/>
-          </a:ln>
-        </p:spPr>
-        <p:txBody>
-          <a:bodyPr xmlns:a="http://schemas.openxmlformats.org/drawingml/2006/main" wrap="square" lIns="0" tIns="0" rIns="0" bIns="0">
-            <a:noAutofit/>
-          </a:bodyPr>
-          <a:lstStyle xmlns:a="http://schemas.openxmlformats.org/drawingml/2006/main">
-            <a:defPPr>
-              <a:defRPr sz="975" b="0">
-                <a:solidFill>
-                  <a:srgbClr val="777080"/>
-                </a:solidFill>
-                <a:latin typeface="Arial"/>
-                <a:ea typeface="Arial"/>
-                <a:cs typeface="Arial"/>
-              </a:defRPr>
-            </a:defPPr>
-            <a:lvl1pPr>
-              <a:defRPr sz="975" b="0">
-                <a:solidFill>
-                  <a:srgbClr val="777080"/>
-                </a:solidFill>
-                <a:latin typeface="Arial"/>
-                <a:ea typeface="Arial"/>
-                <a:cs typeface="Arial"/>
-              </a:defRPr>
-            </a:lvl1pPr>
-            <a:lvl2pPr>
-              <a:defRPr sz="975" b="0">
-                <a:solidFill>
-                  <a:srgbClr val="777080"/>
-                </a:solidFill>
-                <a:latin typeface="Arial"/>
-                <a:ea typeface="Arial"/>
-                <a:cs typeface="Arial"/>
-              </a:defRPr>
-            </a:lvl2pPr>
-            <a:lvl3pPr>
-              <a:defRPr sz="975" b="0">
-                <a:solidFill>
-                  <a:srgbClr val="777080"/>
-                </a:solidFill>
-                <a:latin typeface="Arial"/>
-                <a:ea typeface="Arial"/>
-                <a:cs typeface="Arial"/>
-              </a:defRPr>
-            </a:lvl3pPr>
-            <a:lvl4pPr>
-              <a:defRPr sz="975" b="0">
-                <a:solidFill>
-                  <a:srgbClr val="777080"/>
-                </a:solidFill>
-                <a:latin typeface="Arial"/>
-                <a:ea typeface="Arial"/>
-                <a:cs typeface="Arial"/>
-              </a:defRPr>
-            </a:lvl4pPr>
-            <a:lvl5pPr>
-              <a:defRPr sz="975" b="0">
-                <a:solidFill>
-                  <a:srgbClr val="777080"/>
-                </a:solidFill>
-                <a:latin typeface="Arial"/>
-                <a:ea typeface="Arial"/>
-                <a:cs typeface="Arial"/>
-              </a:defRPr>
-            </a:lvl5pPr>
-            <a:lvl6pPr>
-              <a:defRPr sz="975" b="0">
-                <a:solidFill>
-                  <a:srgbClr val="777080"/>
-                </a:solidFill>
-                <a:latin typeface="Arial"/>
-                <a:ea typeface="Arial"/>
-                <a:cs typeface="Arial"/>
-              </a:defRPr>
-            </a:lvl6pPr>
-            <a:lvl7pPr>
-              <a:defRPr sz="975" b="0">
-                <a:solidFill>
-                  <a:srgbClr val="777080"/>
-                </a:solidFill>
-                <a:latin typeface="Arial"/>
-                <a:ea typeface="Arial"/>
-                <a:cs typeface="Arial"/>
-              </a:defRPr>
-            </a:lvl7pPr>
-            <a:lvl8pPr>
-              <a:defRPr sz="975" b="0">
-                <a:solidFill>
-                  <a:srgbClr val="777080"/>
-                </a:solidFill>
-                <a:latin typeface="Arial"/>
-                <a:ea typeface="Arial"/>
-                <a:cs typeface="Arial"/>
-              </a:defRPr>
-            </a:lvl8pPr>
-            <a:lvl9pPr>
-              <a:defRPr sz="975" b="0">
-                <a:solidFill>
-                  <a:srgbClr val="777080"/>
-                </a:solidFill>
-                <a:latin typeface="Arial"/>
-                <a:ea typeface="Arial"/>
-                <a:cs typeface="Arial"/>
-              </a:defRPr>
-            </a:lvl9pPr>
-          </a:lstStyle>
-          <a:p xmlns:a="http://schemas.openxmlformats.org/drawingml/2006/main">
-            <a:pPr>
-              <a:defRPr sz="975" b="0">
-                <a:solidFill>
-                  <a:srgbClr val="777080"/>
-                </a:solidFill>
-                <a:latin typeface="Arial"/>
-                <a:ea typeface="Arial"/>
-                <a:cs typeface="Arial"/>
-              </a:defRPr>
-            </a:pPr>
-            <a:r>
-              <a:rPr sz="975" b="0">
-                <a:solidFill>
-                  <a:srgbClr val="777080"/>
-                </a:solidFill>
-                <a:latin typeface="Arial"/>
-                <a:ea typeface="Arial"/>
-                <a:cs typeface="Arial"/>
-              </a:rPr>
-              <a:t>09</a:t>
-            </a:r>
-          </a:p>
-        </p:txBody>
-      </p:sp>
-      <p:sp>
-        <p:nvSpPr>
-          <p:cNvPr id="5" name="method-head-1">
-            <a:extLst xmlns:a="http://schemas.openxmlformats.org/drawingml/2006/main">
-              <a:ext uri="{FF2B5EF4-FFF2-40B4-BE49-F238E27FC236}">
-                <a16:creationId xmlns:a16="http://schemas.microsoft.com/office/drawing/2014/main" id="{5F8AD009-F4F1-4681-B562-6D55F47093FF}"/>
-              </a:ext>
-            </a:extLst>
-          </p:cNvPr>
-          <p:cNvSpPr>
-            <a:spLocks xmlns:a="http://schemas.openxmlformats.org/drawingml/2006/main" noGrp="1"/>
-          </p:cNvSpPr>
-          <p:nvPr/>
-        </p:nvSpPr>
-        <p:spPr>
-          <a:xfrm xmlns:a="http://schemas.openxmlformats.org/drawingml/2006/main">
-            <a:off x="685800" y="1981200"/>
-            <a:ext cx="10477500" cy="342900"/>
-          </a:xfrm>
-          <a:prstGeom xmlns:a="http://schemas.openxmlformats.org/drawingml/2006/main" prst="rect">
-            <a:avLst/>
-          </a:prstGeom>
-          <a:noFill xmlns:a="http://schemas.openxmlformats.org/drawingml/2006/main"/>
-          <a:ln xmlns:a="http://schemas.openxmlformats.org/drawingml/2006/main" w="0">
-            <a:noFill/>
-            <a:prstDash val="solid"/>
-          </a:ln>
-        </p:spPr>
-        <p:txBody>
-          <a:bodyPr xmlns:a="http://schemas.openxmlformats.org/drawingml/2006/main" wrap="square" lIns="0" tIns="0" rIns="0" bIns="0">
-            <a:noAutofit/>
-          </a:bodyPr>
-          <a:lstStyle xmlns:a="http://schemas.openxmlformats.org/drawingml/2006/main">
-            <a:defPPr>
-              <a:defRPr sz="1950" b="1">
-                <a:solidFill>
-                  <a:srgbClr val="512F8D"/>
-                </a:solidFill>
-                <a:latin typeface="Arial"/>
-                <a:ea typeface="Arial"/>
-                <a:cs typeface="Arial"/>
-              </a:defRPr>
-            </a:defPPr>
-            <a:lvl1pPr>
-              <a:defRPr sz="1950" b="1">
-                <a:solidFill>
-                  <a:srgbClr val="512F8D"/>
-                </a:solidFill>
-                <a:latin typeface="Arial"/>
-                <a:ea typeface="Arial"/>
-                <a:cs typeface="Arial"/>
-              </a:defRPr>
-            </a:lvl1pPr>
-            <a:lvl2pPr>
-              <a:defRPr sz="1950" b="1">
-                <a:solidFill>
-                  <a:srgbClr val="512F8D"/>
-                </a:solidFill>
-                <a:latin typeface="Arial"/>
-                <a:ea typeface="Arial"/>
-                <a:cs typeface="Arial"/>
-              </a:defRPr>
-            </a:lvl2pPr>
-            <a:lvl3pPr>
-              <a:defRPr sz="1950" b="1">
-                <a:solidFill>
-                  <a:srgbClr val="512F8D"/>
-                </a:solidFill>
-                <a:latin typeface="Arial"/>
-                <a:ea typeface="Arial"/>
-                <a:cs typeface="Arial"/>
-              </a:defRPr>
-            </a:lvl3pPr>
-            <a:lvl4pPr>
-              <a:defRPr sz="1950" b="1">
-                <a:solidFill>
-                  <a:srgbClr val="512F8D"/>
-                </a:solidFill>
-                <a:latin typeface="Arial"/>
-                <a:ea typeface="Arial"/>
-                <a:cs typeface="Arial"/>
-              </a:defRPr>
-            </a:lvl4pPr>
-            <a:lvl5pPr>
-              <a:defRPr sz="1950" b="1">
-                <a:solidFill>
-                  <a:srgbClr val="512F8D"/>
-                </a:solidFill>
-                <a:latin typeface="Arial"/>
-                <a:ea typeface="Arial"/>
-                <a:cs typeface="Arial"/>
-              </a:defRPr>
-            </a:lvl5pPr>
-            <a:lvl6pPr>
-              <a:defRPr sz="1950" b="1">
-                <a:solidFill>
-                  <a:srgbClr val="512F8D"/>
-                </a:solidFill>
-                <a:latin typeface="Arial"/>
-                <a:ea typeface="Arial"/>
-                <a:cs typeface="Arial"/>
-              </a:defRPr>
-            </a:lvl6pPr>
-            <a:lvl7pPr>
-              <a:defRPr sz="1950" b="1">
-                <a:solidFill>
-                  <a:srgbClr val="512F8D"/>
-                </a:solidFill>
-                <a:latin typeface="Arial"/>
-                <a:ea typeface="Arial"/>
-                <a:cs typeface="Arial"/>
-              </a:defRPr>
-            </a:lvl7pPr>
-            <a:lvl8pPr>
-              <a:defRPr sz="1950" b="1">
-                <a:solidFill>
-                  <a:srgbClr val="512F8D"/>
-                </a:solidFill>
-                <a:latin typeface="Arial"/>
-                <a:ea typeface="Arial"/>
-                <a:cs typeface="Arial"/>
-              </a:defRPr>
-            </a:lvl8pPr>
-            <a:lvl9pPr>
-              <a:defRPr sz="1950" b="1">
-                <a:solidFill>
-                  <a:srgbClr val="512F8D"/>
-                </a:solidFill>
-                <a:latin typeface="Arial"/>
-                <a:ea typeface="Arial"/>
-                <a:cs typeface="Arial"/>
-              </a:defRPr>
-            </a:lvl9pPr>
-          </a:lstStyle>
-          <a:p xmlns:a="http://schemas.openxmlformats.org/drawingml/2006/main">
-            <a:pPr>
-              <a:defRPr sz="1950" b="1">
-                <a:solidFill>
-                  <a:srgbClr val="512F8D"/>
-                </a:solidFill>
-                <a:latin typeface="Arial"/>
-                <a:ea typeface="Arial"/>
-                <a:cs typeface="Arial"/>
-              </a:defRPr>
-            </a:pPr>
-            <a:r>
-              <a:rPr sz="1950" b="1">
-                <a:solidFill>
-                  <a:srgbClr val="512F8D"/>
-                </a:solidFill>
-                <a:latin typeface="Arial"/>
-                <a:ea typeface="Arial"/>
-                <a:cs typeface="Arial"/>
-              </a:rPr>
-              <a:t>Cobertura reportada</a:t>
-            </a:r>
-          </a:p>
-        </p:txBody>
-      </p:sp>
-      <p:sp>
-        <p:nvSpPr>
-          <p:cNvPr id="6" name="method-body-1">
-            <a:extLst xmlns:a="http://schemas.openxmlformats.org/drawingml/2006/main">
-              <a:ext uri="{FF2B5EF4-FFF2-40B4-BE49-F238E27FC236}">
-                <a16:creationId xmlns:a16="http://schemas.microsoft.com/office/drawing/2014/main" id="{1660426F-EDEF-4AF7-A845-8FD90D190E4F}"/>
-              </a:ext>
-            </a:extLst>
-          </p:cNvPr>
-          <p:cNvSpPr>
-            <a:spLocks xmlns:a="http://schemas.openxmlformats.org/drawingml/2006/main" noGrp="1"/>
-          </p:cNvSpPr>
-          <p:nvPr/>
-        </p:nvSpPr>
-        <p:spPr>
-          <a:xfrm xmlns:a="http://schemas.openxmlformats.org/drawingml/2006/main">
-            <a:off x="685800" y="2381250"/>
-            <a:ext cx="10572750" cy="742950"/>
-          </a:xfrm>
-          <a:prstGeom xmlns:a="http://schemas.openxmlformats.org/drawingml/2006/main" prst="rect">
-            <a:avLst/>
-          </a:prstGeom>
-          <a:noFill xmlns:a="http://schemas.openxmlformats.org/drawingml/2006/main"/>
-          <a:ln xmlns:a="http://schemas.openxmlformats.org/drawingml/2006/main" w="0">
-            <a:noFill/>
-            <a:prstDash val="solid"/>
-          </a:ln>
-        </p:spPr>
-        <p:txBody>
-          <a:bodyPr xmlns:a="http://schemas.openxmlformats.org/drawingml/2006/main" wrap="square" lIns="0" tIns="0" rIns="0" bIns="0">
-            <a:noAutofit/>
-          </a:bodyPr>
-          <a:lstStyle xmlns:a="http://schemas.openxmlformats.org/drawingml/2006/main">
-            <a:defPPr>
-              <a:defRPr sz="1800" b="0">
-                <a:solidFill>
-                  <a:srgbClr val="20202B"/>
-                </a:solidFill>
-                <a:latin typeface="Arial"/>
-                <a:ea typeface="Arial"/>
-                <a:cs typeface="Arial"/>
-              </a:defRPr>
-            </a:defPPr>
-            <a:lvl1pPr>
-              <a:defRPr sz="1800" b="0">
-                <a:solidFill>
-                  <a:srgbClr val="20202B"/>
-                </a:solidFill>
-                <a:latin typeface="Arial"/>
-                <a:ea typeface="Arial"/>
-                <a:cs typeface="Arial"/>
-              </a:defRPr>
-            </a:lvl1pPr>
-            <a:lvl2pPr>
-              <a:defRPr sz="1800" b="0">
-                <a:solidFill>
-                  <a:srgbClr val="20202B"/>
-                </a:solidFill>
-                <a:latin typeface="Arial"/>
-                <a:ea typeface="Arial"/>
-                <a:cs typeface="Arial"/>
-              </a:defRPr>
-            </a:lvl2pPr>
-            <a:lvl3pPr>
-              <a:defRPr sz="1800" b="0">
-                <a:solidFill>
-                  <a:srgbClr val="20202B"/>
-                </a:solidFill>
-                <a:latin typeface="Arial"/>
-                <a:ea typeface="Arial"/>
-                <a:cs typeface="Arial"/>
-              </a:defRPr>
-            </a:lvl3pPr>
-            <a:lvl4pPr>
-              <a:defRPr sz="1800" b="0">
-                <a:solidFill>
-                  <a:srgbClr val="20202B"/>
-                </a:solidFill>
-                <a:latin typeface="Arial"/>
-                <a:ea typeface="Arial"/>
-                <a:cs typeface="Arial"/>
-              </a:defRPr>
-            </a:lvl4pPr>
-            <a:lvl5pPr>
-              <a:defRPr sz="1800" b="0">
-                <a:solidFill>
-                  <a:srgbClr val="20202B"/>
-                </a:solidFill>
-                <a:latin typeface="Arial"/>
-                <a:ea typeface="Arial"/>
-                <a:cs typeface="Arial"/>
-              </a:defRPr>
-            </a:lvl5pPr>
-            <a:lvl6pPr>
-              <a:defRPr sz="1800" b="0">
-                <a:solidFill>
-                  <a:srgbClr val="20202B"/>
-                </a:solidFill>
-                <a:latin typeface="Arial"/>
-                <a:ea typeface="Arial"/>
-                <a:cs typeface="Arial"/>
-              </a:defRPr>
-            </a:lvl6pPr>
-            <a:lvl7pPr>
-              <a:defRPr sz="1800" b="0">
-                <a:solidFill>
-                  <a:srgbClr val="20202B"/>
-                </a:solidFill>
-                <a:latin typeface="Arial"/>
-                <a:ea typeface="Arial"/>
-                <a:cs typeface="Arial"/>
-              </a:defRPr>
-            </a:lvl7pPr>
-            <a:lvl8pPr>
-              <a:defRPr sz="1800" b="0">
-                <a:solidFill>
-                  <a:srgbClr val="20202B"/>
-                </a:solidFill>
-                <a:latin typeface="Arial"/>
-                <a:ea typeface="Arial"/>
-                <a:cs typeface="Arial"/>
-              </a:defRPr>
-            </a:lvl8pPr>
-            <a:lvl9pPr>
-              <a:defRPr sz="1800" b="0">
-                <a:solidFill>
-                  <a:srgbClr val="20202B"/>
-                </a:solidFill>
-                <a:latin typeface="Arial"/>
-                <a:ea typeface="Arial"/>
-                <a:cs typeface="Arial"/>
-              </a:defRPr>
-            </a:lvl9pPr>
-          </a:lstStyle>
-          <a:p xmlns:a="http://schemas.openxmlformats.org/drawingml/2006/main">
-            <a:pPr>
-              <a:defRPr sz="1800" b="0">
-                <a:solidFill>
-                  <a:srgbClr val="20202B"/>
-                </a:solidFill>
-                <a:latin typeface="Arial"/>
-                <a:ea typeface="Arial"/>
-                <a:cs typeface="Arial"/>
-              </a:defRPr>
-            </a:pPr>
-            <a:r>
-              <a:rPr sz="1800" b="0">
-                <a:solidFill>
-                  <a:srgbClr val="20202B"/>
-                </a:solidFill>
-                <a:latin typeface="Arial"/>
-                <a:ea typeface="Arial"/>
-                <a:cs typeface="Arial"/>
-              </a:rPr>
-              <a:t>Conteos agregados de beneficiarios y usuarios. La fuente no permite comprobar personas únicas ni eliminar coincidencias entre programas.</a:t>
-            </a:r>
-          </a:p>
-        </p:txBody>
-      </p:sp>
-      <p:sp>
-        <p:nvSpPr>
-          <p:cNvPr id="7" name="method-head-2">
-            <a:extLst xmlns:a="http://schemas.openxmlformats.org/drawingml/2006/main">
-              <a:ext uri="{FF2B5EF4-FFF2-40B4-BE49-F238E27FC236}">
-                <a16:creationId xmlns:a16="http://schemas.microsoft.com/office/drawing/2014/main" id="{1080B6DF-38E8-4480-BA34-DF1DD6B37BC7}"/>
-              </a:ext>
-            </a:extLst>
-          </p:cNvPr>
-          <p:cNvSpPr>
-            <a:spLocks xmlns:a="http://schemas.openxmlformats.org/drawingml/2006/main" noGrp="1"/>
-          </p:cNvSpPr>
-          <p:nvPr/>
-        </p:nvSpPr>
-        <p:spPr>
-          <a:xfrm xmlns:a="http://schemas.openxmlformats.org/drawingml/2006/main">
-            <a:off x="685800" y="3371850"/>
-            <a:ext cx="10477500" cy="342900"/>
-          </a:xfrm>
-          <a:prstGeom xmlns:a="http://schemas.openxmlformats.org/drawingml/2006/main" prst="rect">
-            <a:avLst/>
-          </a:prstGeom>
-          <a:noFill xmlns:a="http://schemas.openxmlformats.org/drawingml/2006/main"/>
-          <a:ln xmlns:a="http://schemas.openxmlformats.org/drawingml/2006/main" w="0">
-            <a:noFill/>
-            <a:prstDash val="solid"/>
-          </a:ln>
-        </p:spPr>
-        <p:txBody>
-          <a:bodyPr xmlns:a="http://schemas.openxmlformats.org/drawingml/2006/main" wrap="square" lIns="0" tIns="0" rIns="0" bIns="0">
-            <a:noAutofit/>
-          </a:bodyPr>
-          <a:lstStyle xmlns:a="http://schemas.openxmlformats.org/drawingml/2006/main">
-            <a:defPPr>
-              <a:defRPr sz="1950" b="1">
-                <a:solidFill>
-                  <a:srgbClr val="512F8D"/>
-                </a:solidFill>
-                <a:latin typeface="Arial"/>
-                <a:ea typeface="Arial"/>
-                <a:cs typeface="Arial"/>
-              </a:defRPr>
-            </a:defPPr>
-            <a:lvl1pPr>
-              <a:defRPr sz="1950" b="1">
-                <a:solidFill>
-                  <a:srgbClr val="512F8D"/>
-                </a:solidFill>
-                <a:latin typeface="Arial"/>
-                <a:ea typeface="Arial"/>
-                <a:cs typeface="Arial"/>
-              </a:defRPr>
-            </a:lvl1pPr>
-            <a:lvl2pPr>
-              <a:defRPr sz="1950" b="1">
-                <a:solidFill>
-                  <a:srgbClr val="512F8D"/>
-                </a:solidFill>
-                <a:latin typeface="Arial"/>
-                <a:ea typeface="Arial"/>
-                <a:cs typeface="Arial"/>
-              </a:defRPr>
-            </a:lvl2pPr>
-            <a:lvl3pPr>
-              <a:defRPr sz="1950" b="1">
-                <a:solidFill>
-                  <a:srgbClr val="512F8D"/>
-                </a:solidFill>
-                <a:latin typeface="Arial"/>
-                <a:ea typeface="Arial"/>
-                <a:cs typeface="Arial"/>
-              </a:defRPr>
-            </a:lvl3pPr>
-            <a:lvl4pPr>
-              <a:defRPr sz="1950" b="1">
-                <a:solidFill>
-                  <a:srgbClr val="512F8D"/>
-                </a:solidFill>
-                <a:latin typeface="Arial"/>
-                <a:ea typeface="Arial"/>
-                <a:cs typeface="Arial"/>
-              </a:defRPr>
-            </a:lvl4pPr>
-            <a:lvl5pPr>
-              <a:defRPr sz="1950" b="1">
-                <a:solidFill>
-                  <a:srgbClr val="512F8D"/>
-                </a:solidFill>
-                <a:latin typeface="Arial"/>
-                <a:ea typeface="Arial"/>
-                <a:cs typeface="Arial"/>
-              </a:defRPr>
-            </a:lvl5pPr>
-            <a:lvl6pPr>
-              <a:defRPr sz="1950" b="1">
-                <a:solidFill>
-                  <a:srgbClr val="512F8D"/>
-                </a:solidFill>
-                <a:latin typeface="Arial"/>
-                <a:ea typeface="Arial"/>
-                <a:cs typeface="Arial"/>
-              </a:defRPr>
-            </a:lvl6pPr>
-            <a:lvl7pPr>
-              <a:defRPr sz="1950" b="1">
-                <a:solidFill>
-                  <a:srgbClr val="512F8D"/>
-                </a:solidFill>
-                <a:latin typeface="Arial"/>
-                <a:ea typeface="Arial"/>
-                <a:cs typeface="Arial"/>
-              </a:defRPr>
-            </a:lvl7pPr>
-            <a:lvl8pPr>
-              <a:defRPr sz="1950" b="1">
-                <a:solidFill>
-                  <a:srgbClr val="512F8D"/>
-                </a:solidFill>
-                <a:latin typeface="Arial"/>
-                <a:ea typeface="Arial"/>
-                <a:cs typeface="Arial"/>
-              </a:defRPr>
-            </a:lvl8pPr>
-            <a:lvl9pPr>
-              <a:defRPr sz="1950" b="1">
-                <a:solidFill>
-                  <a:srgbClr val="512F8D"/>
-                </a:solidFill>
-                <a:latin typeface="Arial"/>
-                <a:ea typeface="Arial"/>
-                <a:cs typeface="Arial"/>
-              </a:defRPr>
-            </a:lvl9pPr>
-          </a:lstStyle>
-          <a:p xmlns:a="http://schemas.openxmlformats.org/drawingml/2006/main">
-            <a:pPr>
-              <a:defRPr sz="1950" b="1">
-                <a:solidFill>
-                  <a:srgbClr val="512F8D"/>
-                </a:solidFill>
-                <a:latin typeface="Arial"/>
-                <a:ea typeface="Arial"/>
-                <a:cs typeface="Arial"/>
-              </a:defRPr>
-            </a:pPr>
-            <a:r>
-              <a:rPr sz="1950" b="1">
-                <a:solidFill>
-                  <a:srgbClr val="512F8D"/>
-                </a:solidFill>
-                <a:latin typeface="Arial"/>
-                <a:ea typeface="Arial"/>
-                <a:cs typeface="Arial"/>
-              </a:rPr>
-              <a:t>Montos acumulados</a:t>
-            </a:r>
-          </a:p>
-        </p:txBody>
-      </p:sp>
-      <p:sp>
-        <p:nvSpPr>
-          <p:cNvPr id="8" name="method-body-2">
-            <a:extLst xmlns:a="http://schemas.openxmlformats.org/drawingml/2006/main">
-              <a:ext uri="{FF2B5EF4-FFF2-40B4-BE49-F238E27FC236}">
-                <a16:creationId xmlns:a16="http://schemas.microsoft.com/office/drawing/2014/main" id="{9028004D-0C9E-47A3-962F-A6837C5BCCBB}"/>
-              </a:ext>
-            </a:extLst>
-          </p:cNvPr>
-          <p:cNvSpPr>
-            <a:spLocks xmlns:a="http://schemas.openxmlformats.org/drawingml/2006/main" noGrp="1"/>
-          </p:cNvSpPr>
-          <p:nvPr/>
-        </p:nvSpPr>
-        <p:spPr>
-          <a:xfrm xmlns:a="http://schemas.openxmlformats.org/drawingml/2006/main">
-            <a:off x="685800" y="3771900"/>
-            <a:ext cx="10572750" cy="742950"/>
-          </a:xfrm>
-          <a:prstGeom xmlns:a="http://schemas.openxmlformats.org/drawingml/2006/main" prst="rect">
-            <a:avLst/>
-          </a:prstGeom>
-          <a:noFill xmlns:a="http://schemas.openxmlformats.org/drawingml/2006/main"/>
-          <a:ln xmlns:a="http://schemas.openxmlformats.org/drawingml/2006/main" w="0">
-            <a:noFill/>
-            <a:prstDash val="solid"/>
-          </a:ln>
-        </p:spPr>
-        <p:txBody>
-          <a:bodyPr xmlns:a="http://schemas.openxmlformats.org/drawingml/2006/main" wrap="square" lIns="0" tIns="0" rIns="0" bIns="0">
-            <a:noAutofit/>
-          </a:bodyPr>
-          <a:lstStyle xmlns:a="http://schemas.openxmlformats.org/drawingml/2006/main">
-            <a:defPPr>
-              <a:defRPr sz="1800" b="0">
-                <a:solidFill>
-                  <a:srgbClr val="20202B"/>
-                </a:solidFill>
-                <a:latin typeface="Arial"/>
-                <a:ea typeface="Arial"/>
-                <a:cs typeface="Arial"/>
-              </a:defRPr>
-            </a:defPPr>
-            <a:lvl1pPr>
-              <a:defRPr sz="1800" b="0">
-                <a:solidFill>
-                  <a:srgbClr val="20202B"/>
-                </a:solidFill>
-                <a:latin typeface="Arial"/>
-                <a:ea typeface="Arial"/>
-                <a:cs typeface="Arial"/>
-              </a:defRPr>
-            </a:lvl1pPr>
-            <a:lvl2pPr>
-              <a:defRPr sz="1800" b="0">
-                <a:solidFill>
-                  <a:srgbClr val="20202B"/>
-                </a:solidFill>
-                <a:latin typeface="Arial"/>
-                <a:ea typeface="Arial"/>
-                <a:cs typeface="Arial"/>
-              </a:defRPr>
-            </a:lvl2pPr>
-            <a:lvl3pPr>
-              <a:defRPr sz="1800" b="0">
-                <a:solidFill>
-                  <a:srgbClr val="20202B"/>
-                </a:solidFill>
-                <a:latin typeface="Arial"/>
-                <a:ea typeface="Arial"/>
-                <a:cs typeface="Arial"/>
-              </a:defRPr>
-            </a:lvl3pPr>
-            <a:lvl4pPr>
-              <a:defRPr sz="1800" b="0">
-                <a:solidFill>
-                  <a:srgbClr val="20202B"/>
-                </a:solidFill>
-                <a:latin typeface="Arial"/>
-                <a:ea typeface="Arial"/>
-                <a:cs typeface="Arial"/>
-              </a:defRPr>
-            </a:lvl4pPr>
-            <a:lvl5pPr>
-              <a:defRPr sz="1800" b="0">
-                <a:solidFill>
-                  <a:srgbClr val="20202B"/>
-                </a:solidFill>
-                <a:latin typeface="Arial"/>
-                <a:ea typeface="Arial"/>
-                <a:cs typeface="Arial"/>
-              </a:defRPr>
-            </a:lvl5pPr>
-            <a:lvl6pPr>
-              <a:defRPr sz="1800" b="0">
-                <a:solidFill>
-                  <a:srgbClr val="20202B"/>
-                </a:solidFill>
-                <a:latin typeface="Arial"/>
-                <a:ea typeface="Arial"/>
-                <a:cs typeface="Arial"/>
-              </a:defRPr>
-            </a:lvl6pPr>
-            <a:lvl7pPr>
-              <a:defRPr sz="1800" b="0">
-                <a:solidFill>
-                  <a:srgbClr val="20202B"/>
-                </a:solidFill>
-                <a:latin typeface="Arial"/>
-                <a:ea typeface="Arial"/>
-                <a:cs typeface="Arial"/>
-              </a:defRPr>
-            </a:lvl7pPr>
-            <a:lvl8pPr>
-              <a:defRPr sz="1800" b="0">
-                <a:solidFill>
-                  <a:srgbClr val="20202B"/>
-                </a:solidFill>
-                <a:latin typeface="Arial"/>
-                <a:ea typeface="Arial"/>
-                <a:cs typeface="Arial"/>
-              </a:defRPr>
-            </a:lvl8pPr>
-            <a:lvl9pPr>
-              <a:defRPr sz="1800" b="0">
-                <a:solidFill>
-                  <a:srgbClr val="20202B"/>
-                </a:solidFill>
-                <a:latin typeface="Arial"/>
-                <a:ea typeface="Arial"/>
-                <a:cs typeface="Arial"/>
-              </a:defRPr>
-            </a:lvl9pPr>
-          </a:lstStyle>
-          <a:p xmlns:a="http://schemas.openxmlformats.org/drawingml/2006/main">
-            <a:pPr>
-              <a:defRPr sz="1800" b="0">
-                <a:solidFill>
-                  <a:srgbClr val="20202B"/>
-                </a:solidFill>
-                <a:latin typeface="Arial"/>
-                <a:ea typeface="Arial"/>
-                <a:cs typeface="Arial"/>
-              </a:defRPr>
-            </a:pPr>
-            <a:r>
-              <a:rPr sz="1800" b="0">
-                <a:solidFill>
-                  <a:srgbClr val="20202B"/>
-                </a:solidFill>
-                <a:latin typeface="Arial"/>
-                <a:ea typeface="Arial"/>
-                <a:cs typeface="Arial"/>
-              </a:rPr>
-              <a:t>El fiscal 2026 corresponde al presupuesto del año en la fuente. El acumulado de gobierno lo incluye y añade períodos anteriores. No se suman entre sí.</a:t>
-            </a:r>
-          </a:p>
-        </p:txBody>
-      </p:sp>
-      <p:sp>
-        <p:nvSpPr>
-          <p:cNvPr id="9" name="method-head-3">
-            <a:extLst xmlns:a="http://schemas.openxmlformats.org/drawingml/2006/main">
-              <a:ext uri="{FF2B5EF4-FFF2-40B4-BE49-F238E27FC236}">
-                <a16:creationId xmlns:a16="http://schemas.microsoft.com/office/drawing/2014/main" id="{37A8A915-7ECB-4133-9C46-A14F769A2AA9}"/>
-              </a:ext>
-            </a:extLst>
-          </p:cNvPr>
-          <p:cNvSpPr>
-            <a:spLocks xmlns:a="http://schemas.openxmlformats.org/drawingml/2006/main" noGrp="1"/>
-          </p:cNvSpPr>
-          <p:nvPr/>
-        </p:nvSpPr>
-        <p:spPr>
-          <a:xfrm xmlns:a="http://schemas.openxmlformats.org/drawingml/2006/main">
-            <a:off x="685800" y="4762500"/>
-            <a:ext cx="10477500" cy="342900"/>
-          </a:xfrm>
-          <a:prstGeom xmlns:a="http://schemas.openxmlformats.org/drawingml/2006/main" prst="rect">
-            <a:avLst/>
-          </a:prstGeom>
-          <a:noFill xmlns:a="http://schemas.openxmlformats.org/drawingml/2006/main"/>
-          <a:ln xmlns:a="http://schemas.openxmlformats.org/drawingml/2006/main" w="0">
-            <a:noFill/>
-            <a:prstDash val="solid"/>
-          </a:ln>
-        </p:spPr>
-        <p:txBody>
-          <a:bodyPr xmlns:a="http://schemas.openxmlformats.org/drawingml/2006/main" wrap="square" lIns="0" tIns="0" rIns="0" bIns="0">
-            <a:noAutofit/>
-          </a:bodyPr>
-          <a:lstStyle xmlns:a="http://schemas.openxmlformats.org/drawingml/2006/main">
-            <a:defPPr>
-              <a:defRPr sz="1950" b="1">
-                <a:solidFill>
-                  <a:srgbClr val="512F8D"/>
-                </a:solidFill>
-                <a:latin typeface="Arial"/>
-                <a:ea typeface="Arial"/>
-                <a:cs typeface="Arial"/>
-              </a:defRPr>
-            </a:defPPr>
-            <a:lvl1pPr>
-              <a:defRPr sz="1950" b="1">
-                <a:solidFill>
-                  <a:srgbClr val="512F8D"/>
-                </a:solidFill>
-                <a:latin typeface="Arial"/>
-                <a:ea typeface="Arial"/>
-                <a:cs typeface="Arial"/>
-              </a:defRPr>
-            </a:lvl1pPr>
-            <a:lvl2pPr>
-              <a:defRPr sz="1950" b="1">
-                <a:solidFill>
-                  <a:srgbClr val="512F8D"/>
-                </a:solidFill>
-                <a:latin typeface="Arial"/>
-                <a:ea typeface="Arial"/>
-                <a:cs typeface="Arial"/>
-              </a:defRPr>
-            </a:lvl2pPr>
-            <a:lvl3pPr>
-              <a:defRPr sz="1950" b="1">
-                <a:solidFill>
-                  <a:srgbClr val="512F8D"/>
-                </a:solidFill>
-                <a:latin typeface="Arial"/>
-                <a:ea typeface="Arial"/>
-                <a:cs typeface="Arial"/>
-              </a:defRPr>
-            </a:lvl3pPr>
-            <a:lvl4pPr>
-              <a:defRPr sz="1950" b="1">
-                <a:solidFill>
-                  <a:srgbClr val="512F8D"/>
-                </a:solidFill>
-                <a:latin typeface="Arial"/>
-                <a:ea typeface="Arial"/>
-                <a:cs typeface="Arial"/>
-              </a:defRPr>
-            </a:lvl4pPr>
-            <a:lvl5pPr>
-              <a:defRPr sz="1950" b="1">
-                <a:solidFill>
-                  <a:srgbClr val="512F8D"/>
-                </a:solidFill>
-                <a:latin typeface="Arial"/>
-                <a:ea typeface="Arial"/>
-                <a:cs typeface="Arial"/>
-              </a:defRPr>
-            </a:lvl5pPr>
-            <a:lvl6pPr>
-              <a:defRPr sz="1950" b="1">
-                <a:solidFill>
-                  <a:srgbClr val="512F8D"/>
-                </a:solidFill>
-                <a:latin typeface="Arial"/>
-                <a:ea typeface="Arial"/>
-                <a:cs typeface="Arial"/>
-              </a:defRPr>
-            </a:lvl6pPr>
-            <a:lvl7pPr>
-              <a:defRPr sz="1950" b="1">
-                <a:solidFill>
-                  <a:srgbClr val="512F8D"/>
-                </a:solidFill>
-                <a:latin typeface="Arial"/>
-                <a:ea typeface="Arial"/>
-                <a:cs typeface="Arial"/>
-              </a:defRPr>
-            </a:lvl7pPr>
-            <a:lvl8pPr>
-              <a:defRPr sz="1950" b="1">
-                <a:solidFill>
-                  <a:srgbClr val="512F8D"/>
-                </a:solidFill>
-                <a:latin typeface="Arial"/>
-                <a:ea typeface="Arial"/>
-                <a:cs typeface="Arial"/>
-              </a:defRPr>
-            </a:lvl8pPr>
-            <a:lvl9pPr>
-              <a:defRPr sz="1950" b="1">
-                <a:solidFill>
-                  <a:srgbClr val="512F8D"/>
-                </a:solidFill>
-                <a:latin typeface="Arial"/>
-                <a:ea typeface="Arial"/>
-                <a:cs typeface="Arial"/>
-              </a:defRPr>
-            </a:lvl9pPr>
-          </a:lstStyle>
-          <a:p xmlns:a="http://schemas.openxmlformats.org/drawingml/2006/main">
-            <a:pPr>
-              <a:defRPr sz="1950" b="1">
-                <a:solidFill>
-                  <a:srgbClr val="512F8D"/>
-                </a:solidFill>
-                <a:latin typeface="Arial"/>
-                <a:ea typeface="Arial"/>
-                <a:cs typeface="Arial"/>
-              </a:defRPr>
-            </a:pPr>
-            <a:r>
-              <a:rPr sz="1950" b="1">
-                <a:solidFill>
-                  <a:srgbClr val="512F8D"/>
-                </a:solidFill>
-                <a:latin typeface="Arial"/>
-                <a:ea typeface="Arial"/>
-                <a:cs typeface="Arial"/>
-              </a:rPr>
-              <a:t>Presupuesto ejecutado y unidades</a:t>
-            </a:r>
-          </a:p>
-        </p:txBody>
-      </p:sp>
-      <p:sp>
-        <p:nvSpPr>
-          <p:cNvPr id="10" name="method-body-3">
-            <a:extLst xmlns:a="http://schemas.openxmlformats.org/drawingml/2006/main">
-              <a:ext uri="{FF2B5EF4-FFF2-40B4-BE49-F238E27FC236}">
-                <a16:creationId xmlns:a16="http://schemas.microsoft.com/office/drawing/2014/main" id="{901EA0C3-125D-4A64-9AF6-4784152DE1B0}"/>
-              </a:ext>
-            </a:extLst>
-          </p:cNvPr>
-          <p:cNvSpPr>
-            <a:spLocks xmlns:a="http://schemas.openxmlformats.org/drawingml/2006/main" noGrp="1"/>
-          </p:cNvSpPr>
-          <p:nvPr/>
-        </p:nvSpPr>
-        <p:spPr>
-          <a:xfrm xmlns:a="http://schemas.openxmlformats.org/drawingml/2006/main">
-            <a:off x="685800" y="5162550"/>
-            <a:ext cx="10572750" cy="895350"/>
-          </a:xfrm>
-          <a:prstGeom xmlns:a="http://schemas.openxmlformats.org/drawingml/2006/main" prst="rect">
-            <a:avLst/>
-          </a:prstGeom>
-          <a:noFill xmlns:a="http://schemas.openxmlformats.org/drawingml/2006/main"/>
-          <a:ln xmlns:a="http://schemas.openxmlformats.org/drawingml/2006/main" w="0">
-            <a:noFill/>
-            <a:prstDash val="solid"/>
-          </a:ln>
-        </p:spPr>
-        <p:txBody>
-          <a:bodyPr xmlns:a="http://schemas.openxmlformats.org/drawingml/2006/main" wrap="square" lIns="0" tIns="0" rIns="0" bIns="0">
-            <a:noAutofit/>
-          </a:bodyPr>
-          <a:lstStyle xmlns:a="http://schemas.openxmlformats.org/drawingml/2006/main">
-            <a:defPPr>
-              <a:defRPr sz="1800" b="0">
-                <a:solidFill>
-                  <a:srgbClr val="20202B"/>
-                </a:solidFill>
-                <a:latin typeface="Arial"/>
-                <a:ea typeface="Arial"/>
-                <a:cs typeface="Arial"/>
-              </a:defRPr>
-            </a:defPPr>
-            <a:lvl1pPr>
-              <a:defRPr sz="1800" b="0">
-                <a:solidFill>
-                  <a:srgbClr val="20202B"/>
-                </a:solidFill>
-                <a:latin typeface="Arial"/>
-                <a:ea typeface="Arial"/>
-                <a:cs typeface="Arial"/>
-              </a:defRPr>
-            </a:lvl1pPr>
-            <a:lvl2pPr>
-              <a:defRPr sz="1800" b="0">
-                <a:solidFill>
-                  <a:srgbClr val="20202B"/>
-                </a:solidFill>
-                <a:latin typeface="Arial"/>
-                <a:ea typeface="Arial"/>
-                <a:cs typeface="Arial"/>
-              </a:defRPr>
-            </a:lvl2pPr>
-            <a:lvl3pPr>
-              <a:defRPr sz="1800" b="0">
-                <a:solidFill>
-                  <a:srgbClr val="20202B"/>
-                </a:solidFill>
-                <a:latin typeface="Arial"/>
-                <a:ea typeface="Arial"/>
-                <a:cs typeface="Arial"/>
-              </a:defRPr>
-            </a:lvl3pPr>
-            <a:lvl4pPr>
-              <a:defRPr sz="1800" b="0">
-                <a:solidFill>
-                  <a:srgbClr val="20202B"/>
-                </a:solidFill>
-                <a:latin typeface="Arial"/>
-                <a:ea typeface="Arial"/>
-                <a:cs typeface="Arial"/>
-              </a:defRPr>
-            </a:lvl4pPr>
-            <a:lvl5pPr>
-              <a:defRPr sz="1800" b="0">
-                <a:solidFill>
-                  <a:srgbClr val="20202B"/>
-                </a:solidFill>
-                <a:latin typeface="Arial"/>
-                <a:ea typeface="Arial"/>
-                <a:cs typeface="Arial"/>
-              </a:defRPr>
-            </a:lvl5pPr>
-            <a:lvl6pPr>
-              <a:defRPr sz="1800" b="0">
-                <a:solidFill>
-                  <a:srgbClr val="20202B"/>
-                </a:solidFill>
-                <a:latin typeface="Arial"/>
-                <a:ea typeface="Arial"/>
-                <a:cs typeface="Arial"/>
-              </a:defRPr>
-            </a:lvl6pPr>
-            <a:lvl7pPr>
-              <a:defRPr sz="1800" b="0">
-                <a:solidFill>
-                  <a:srgbClr val="20202B"/>
-                </a:solidFill>
-                <a:latin typeface="Arial"/>
-                <a:ea typeface="Arial"/>
-                <a:cs typeface="Arial"/>
-              </a:defRPr>
-            </a:lvl7pPr>
-            <a:lvl8pPr>
-              <a:defRPr sz="1800" b="0">
-                <a:solidFill>
-                  <a:srgbClr val="20202B"/>
-                </a:solidFill>
-                <a:latin typeface="Arial"/>
-                <a:ea typeface="Arial"/>
-                <a:cs typeface="Arial"/>
-              </a:defRPr>
-            </a:lvl8pPr>
-            <a:lvl9pPr>
-              <a:defRPr sz="1800" b="0">
-                <a:solidFill>
-                  <a:srgbClr val="20202B"/>
-                </a:solidFill>
-                <a:latin typeface="Arial"/>
-                <a:ea typeface="Arial"/>
-                <a:cs typeface="Arial"/>
-              </a:defRPr>
-            </a:lvl9pPr>
-          </a:lstStyle>
-          <a:p xmlns:a="http://schemas.openxmlformats.org/drawingml/2006/main">
-            <a:pPr>
-              <a:defRPr sz="1800" b="0">
-                <a:solidFill>
-                  <a:srgbClr val="20202B"/>
-                </a:solidFill>
-                <a:latin typeface="Arial"/>
-                <a:ea typeface="Arial"/>
-                <a:cs typeface="Arial"/>
-              </a:defRPr>
-            </a:pPr>
-            <a:r>
-              <a:rPr sz="1800" b="0">
-                <a:solidFill>
-                  <a:srgbClr val="20202B"/>
-                </a:solidFill>
-                <a:latin typeface="Arial"/>
-                <a:ea typeface="Arial"/>
-                <a:cs typeface="Arial"/>
-              </a:rPr>
-              <a:t>Ejecución presupuestaria: N/D. La fuente no certifica el gasto ejecutado. Las unidades corresponden a protección integral. N/D distingue un dato ausente de un cero reportado.</a:t>
-            </a:r>
-          </a:p>
-        </p:txBody>
-      </p:sp>
-    </p:spTree>
-    <p:extLst>
-      <p:ext uri="{BB962C8B-B14F-4D97-AF65-F5344CB8AC3E}">
-        <p14:creationId xmlns:p14="http://schemas.microsoft.com/office/powerpoint/2010/main" val="2108744431"/>
       </p:ext>
     </p:extLst>
   </p:cSld>
